--- a/media/exports/reports/2026-09/cost-to-raise.pptx
+++ b/media/exports/reports/2026-09/cost-to-raise.pptx
@@ -274,7 +274,9 @@
     <a:lstStyle/>
     <a:p>
       <a:pPr>
-        <a:defRPr sz="1800"/>
+        <a:defRPr sz="1800">
+          <a:latin typeface="Roboto"/>
+        </a:defRPr>
       </a:pPr>
       <a:endParaRPr lang="en-US"/>
     </a:p>
@@ -570,7 +572,9 @@
     <a:lstStyle/>
     <a:p>
       <a:pPr>
-        <a:defRPr sz="1800"/>
+        <a:defRPr sz="1800">
+          <a:latin typeface="Roboto"/>
+        </a:defRPr>
       </a:pPr>
       <a:endParaRPr/>
     </a:p>
@@ -3601,11 +3605,17 @@
           <a:bodyPr rtlCol="0" anchor="ctr"/>
           <a:lstStyle/>
           <a:p>
+            <a:pPr>
+              <a:defRPr>
+                <a:latin typeface="Roboto"/>
+              </a:defRPr>
+            </a:pPr>
             <a:r>
               <a:rPr sz="1600" b="1">
                 <a:solidFill>
                   <a:srgbClr val="FFFFFF"/>
                 </a:solidFill>
+                <a:latin typeface="Roboto"/>
               </a:rPr>
               <a:t>4th</a:t>
             </a:r>
@@ -3634,14 +3644,19 @@
           </a:bodyPr>
           <a:lstStyle/>
           <a:p>
+            <a:pPr>
+              <a:defRPr>
+                <a:latin typeface="Roboto"/>
+              </a:defRPr>
+            </a:pPr>
             <a:r>
               <a:rPr sz="1800" b="1">
                 <a:solidFill>
                   <a:srgbClr val="25342A"/>
                 </a:solidFill>
-                <a:latin typeface="Arial"/>
-              </a:rPr>
-              <a:t>The 4th Sheet</a:t>
+                <a:latin typeface="Roboto"/>
+              </a:rPr>
+              <a:t>The Fourth Sheet</a:t>
             </a:r>
           </a:p>
         </p:txBody>
@@ -3668,12 +3683,17 @@
           </a:bodyPr>
           <a:lstStyle/>
           <a:p>
+            <a:pPr>
+              <a:defRPr>
+                <a:latin typeface="Roboto"/>
+              </a:defRPr>
+            </a:pPr>
             <a:r>
               <a:rPr sz="1100" b="1">
                 <a:solidFill>
                   <a:srgbClr val="8A7A52"/>
                 </a:solidFill>
-                <a:latin typeface="Arial"/>
+                <a:latin typeface="Roboto"/>
               </a:rPr>
               <a:t>SAMPLE DATA · invented figures for demonstration</a:t>
             </a:r>
@@ -3702,12 +3722,17 @@
           </a:bodyPr>
           <a:lstStyle/>
           <a:p>
+            <a:pPr>
+              <a:defRPr>
+                <a:latin typeface="Roboto"/>
+              </a:defRPr>
+            </a:pPr>
             <a:r>
               <a:rPr sz="3400" b="1">
                 <a:solidFill>
                   <a:srgbClr val="25342A"/>
                 </a:solidFill>
-                <a:latin typeface="Arial"/>
+                <a:latin typeface="Roboto"/>
               </a:rPr>
               <a:t>What does it cost to raise a dollar?</a:t>
             </a:r>
@@ -3736,12 +3761,17 @@
           </a:bodyPr>
           <a:lstStyle/>
           <a:p>
+            <a:pPr>
+              <a:defRPr>
+                <a:latin typeface="Roboto"/>
+              </a:defRPr>
+            </a:pPr>
             <a:r>
               <a:rPr sz="1600" b="0">
                 <a:solidFill>
                   <a:srgbClr val="5F6F63"/>
                 </a:solidFill>
-                <a:latin typeface="Arial"/>
+                <a:latin typeface="Roboto"/>
               </a:rPr>
               <a:t>Sample Community Services Ltd</a:t>
             </a:r>
@@ -3770,12 +3800,17 @@
           </a:bodyPr>
           <a:lstStyle/>
           <a:p>
+            <a:pPr>
+              <a:defRPr>
+                <a:latin typeface="Roboto"/>
+              </a:defRPr>
+            </a:pPr>
             <a:r>
               <a:rPr sz="1400" b="0">
                 <a:solidFill>
                   <a:srgbClr val="25342A"/>
                 </a:solidFill>
-                <a:latin typeface="Arial"/>
+                <a:latin typeface="Roboto"/>
               </a:rPr>
               <a:t>Period: September 2026. What fundraising costs (grant writing, donor campaigns, events) for every dollar it brings in. Pick a source and every number, chart and note follows it.</a:t>
             </a:r>
@@ -3804,45 +3839,65 @@
           </a:bodyPr>
           <a:lstStyle/>
           <a:p>
+            <a:pPr>
+              <a:defRPr>
+                <a:latin typeface="Roboto"/>
+              </a:defRPr>
+            </a:pPr>
             <a:r>
               <a:rPr sz="1100" b="0">
                 <a:solidFill>
                   <a:srgbClr val="5F6F63"/>
                 </a:solidFill>
-                <a:latin typeface="Arial"/>
+                <a:latin typeface="Roboto"/>
               </a:rPr>
               <a:t>How final is this data?</a:t>
             </a:r>
           </a:p>
           <a:p>
+            <a:pPr>
+              <a:defRPr>
+                <a:latin typeface="Roboto"/>
+              </a:defRPr>
+            </a:pPr>
             <a:r>
               <a:rPr sz="1100" b="0">
                 <a:solidFill>
                   <a:srgbClr val="5F6F63"/>
                 </a:solidFill>
-                <a:latin typeface="Arial"/>
+                <a:latin typeface="Roboto"/>
               </a:rPr>
               <a:t>August 2026: Locked. August 2026 is locked (closed 2 Sep 2026). These numbers won't change.</a:t>
             </a:r>
           </a:p>
           <a:p>
+            <a:pPr>
+              <a:defRPr>
+                <a:latin typeface="Roboto"/>
+              </a:defRPr>
+            </a:pPr>
             <a:r>
               <a:rPr sz="1100" b="0">
                 <a:solidFill>
                   <a:srgbClr val="5F6F63"/>
                 </a:solidFill>
-                <a:latin typeface="Arial"/>
+                <a:latin typeface="Roboto"/>
               </a:rPr>
               <a:t>September 2026: Locked. September 2026 is locked (closed 2 Oct 2026). These numbers won't change.</a:t>
             </a:r>
           </a:p>
           <a:p>
+            <a:pPr>
+              <a:defRPr>
+                <a:latin typeface="Roboto"/>
+              </a:defRPr>
+            </a:pPr>
             <a:r>
               <a:rPr sz="1100" b="0">
                 <a:solidFill>
                   <a:srgbClr val="5F6F63"/>
                 </a:solidFill>
-                <a:latin typeface="Arial"/>
+                <a:latin typeface="Roboto"/>
               </a:rPr>
               <a:t>October 2026: Incomplete. October 2026 is still in progress: figures to 6 Oct only.</a:t>
             </a:r>
@@ -3871,12 +3926,17 @@
           </a:bodyPr>
           <a:lstStyle/>
           <a:p>
+            <a:pPr>
+              <a:defRPr>
+                <a:latin typeface="Roboto"/>
+              </a:defRPr>
+            </a:pPr>
             <a:r>
               <a:rPr sz="900" b="0">
                 <a:solidFill>
                   <a:srgbClr val="5F6F63"/>
                 </a:solidFill>
-                <a:latin typeface="Arial"/>
+                <a:latin typeface="Roboto"/>
               </a:rPr>
               <a:t>cost-to-raise.pptx</a:t>
             </a:r>
@@ -3905,13 +3965,17 @@
           </a:bodyPr>
           <a:lstStyle/>
           <a:p>
-            <a:pPr algn="ctr"/>
+            <a:pPr algn="ctr">
+              <a:defRPr>
+                <a:latin typeface="Roboto"/>
+              </a:defRPr>
+            </a:pPr>
             <a:r>
               <a:rPr sz="900" b="0">
                 <a:solidFill>
                   <a:srgbClr val="5F6F63"/>
                 </a:solidFill>
-                <a:latin typeface="Arial"/>
+                <a:latin typeface="Roboto"/>
               </a:rPr>
               <a:t>Data retrieved 2pm, Tue 6 Oct 2026 · Sample data</a:t>
             </a:r>
@@ -3940,13 +4004,17 @@
           </a:bodyPr>
           <a:lstStyle/>
           <a:p>
-            <a:pPr algn="r"/>
+            <a:pPr algn="r">
+              <a:defRPr>
+                <a:latin typeface="Roboto"/>
+              </a:defRPr>
+            </a:pPr>
             <a:r>
               <a:rPr sz="900" b="0">
                 <a:solidFill>
                   <a:srgbClr val="5F6F63"/>
                 </a:solidFill>
-                <a:latin typeface="Arial"/>
+                <a:latin typeface="Roboto"/>
               </a:rPr>
               <a:t>Slide 1 of 11</a:t>
             </a:r>
@@ -4010,7 +4078,11 @@
           <a:bodyPr rtlCol="0" anchor="ctr"/>
           <a:lstStyle/>
           <a:p>
-            <a:pPr algn="ctr"/>
+            <a:pPr algn="ctr">
+              <a:defRPr>
+                <a:latin typeface="Roboto"/>
+              </a:defRPr>
+            </a:pPr>
           </a:p>
         </p:txBody>
       </p:sp>
@@ -4036,12 +4108,17 @@
           </a:bodyPr>
           <a:lstStyle/>
           <a:p>
+            <a:pPr>
+              <a:defRPr>
+                <a:latin typeface="Roboto"/>
+              </a:defRPr>
+            </a:pPr>
             <a:r>
               <a:rPr sz="1000" b="0">
                 <a:solidFill>
                   <a:srgbClr val="5F6F63"/>
                 </a:solidFill>
-                <a:latin typeface="Arial"/>
+                <a:latin typeface="Roboto"/>
               </a:rPr>
               <a:t>Sample Community Services Ltd · What does it cost to raise a dollar?</a:t>
             </a:r>
@@ -4070,12 +4147,17 @@
           </a:bodyPr>
           <a:lstStyle/>
           <a:p>
+            <a:pPr>
+              <a:defRPr>
+                <a:latin typeface="Roboto"/>
+              </a:defRPr>
+            </a:pPr>
             <a:r>
               <a:rPr sz="2400" b="1">
                 <a:solidFill>
                   <a:srgbClr val="25342A"/>
                 </a:solidFill>
-                <a:latin typeface="Arial"/>
+                <a:latin typeface="Roboto"/>
               </a:rPr>
               <a:t>What it shows · Source: Fundraising events</a:t>
             </a:r>
@@ -4123,7 +4205,11 @@
           <a:bodyPr rtlCol="0" anchor="ctr"/>
           <a:lstStyle/>
           <a:p>
-            <a:pPr algn="ctr"/>
+            <a:pPr algn="ctr">
+              <a:defRPr>
+                <a:latin typeface="Roboto"/>
+              </a:defRPr>
+            </a:pPr>
           </a:p>
         </p:txBody>
       </p:sp>
@@ -4149,12 +4235,17 @@
           </a:bodyPr>
           <a:lstStyle/>
           <a:p>
+            <a:pPr>
+              <a:defRPr>
+                <a:latin typeface="Roboto"/>
+              </a:defRPr>
+            </a:pPr>
             <a:r>
               <a:rPr sz="1100" b="1">
                 <a:solidFill>
                   <a:srgbClr val="5F6F63"/>
                 </a:solidFill>
-                <a:latin typeface="Arial"/>
+                <a:latin typeface="Roboto"/>
               </a:rPr>
               <a:t>WHAT IT SHOWS</a:t>
             </a:r>
@@ -4183,12 +4274,17 @@
           </a:bodyPr>
           <a:lstStyle/>
           <a:p>
+            <a:pPr>
+              <a:defRPr>
+                <a:latin typeface="Roboto"/>
+              </a:defRPr>
+            </a:pPr>
             <a:r>
               <a:rPr sz="1600" b="0">
                 <a:solidFill>
                   <a:srgbClr val="25342A"/>
                 </a:solidFill>
-                <a:latin typeface="Arial"/>
+                <a:latin typeface="Roboto"/>
               </a:rPr>
               <a:t>Fundraising events cost 46¢ to raise each dollar this financial year to date ($19,300 of event costs for $41,600), against 41¢ in the same period last year.</a:t>
             </a:r>
@@ -4236,7 +4332,11 @@
           <a:bodyPr rtlCol="0" anchor="ctr"/>
           <a:lstStyle/>
           <a:p>
-            <a:pPr algn="ctr"/>
+            <a:pPr algn="ctr">
+              <a:defRPr>
+                <a:latin typeface="Roboto"/>
+              </a:defRPr>
+            </a:pPr>
           </a:p>
         </p:txBody>
       </p:sp>
@@ -4262,12 +4362,17 @@
           </a:bodyPr>
           <a:lstStyle/>
           <a:p>
+            <a:pPr>
+              <a:defRPr>
+                <a:latin typeface="Roboto"/>
+              </a:defRPr>
+            </a:pPr>
             <a:r>
               <a:rPr sz="1100" b="1">
                 <a:solidFill>
                   <a:srgbClr val="5F6F63"/>
                 </a:solidFill>
-                <a:latin typeface="Arial"/>
+                <a:latin typeface="Roboto"/>
               </a:rPr>
               <a:t>WHAT YOU'D DO ABOUT IT</a:t>
             </a:r>
@@ -4296,12 +4401,17 @@
           </a:bodyPr>
           <a:lstStyle/>
           <a:p>
+            <a:pPr>
+              <a:defRPr>
+                <a:latin typeface="Roboto"/>
+              </a:defRPr>
+            </a:pPr>
             <a:r>
               <a:rPr sz="1600" b="0">
                 <a:solidFill>
                   <a:srgbClr val="25342A"/>
                 </a:solidFill>
-                <a:latin typeface="Arial"/>
+                <a:latin typeface="Roboto"/>
               </a:rPr>
               <a:t>Usually the dearest money to raise: events are worth counting for what else they bring too (new donors, profile).</a:t>
             </a:r>
@@ -4330,12 +4440,17 @@
           </a:bodyPr>
           <a:lstStyle/>
           <a:p>
+            <a:pPr>
+              <a:defRPr>
+                <a:latin typeface="Roboto"/>
+              </a:defRPr>
+            </a:pPr>
             <a:r>
               <a:rPr sz="900" b="0">
                 <a:solidFill>
                   <a:srgbClr val="5F6F63"/>
                 </a:solidFill>
-                <a:latin typeface="Arial"/>
+                <a:latin typeface="Roboto"/>
               </a:rPr>
               <a:t>cost-to-raise.pptx</a:t>
             </a:r>
@@ -4364,13 +4479,17 @@
           </a:bodyPr>
           <a:lstStyle/>
           <a:p>
-            <a:pPr algn="ctr"/>
+            <a:pPr algn="ctr">
+              <a:defRPr>
+                <a:latin typeface="Roboto"/>
+              </a:defRPr>
+            </a:pPr>
             <a:r>
               <a:rPr sz="900" b="0">
                 <a:solidFill>
                   <a:srgbClr val="5F6F63"/>
                 </a:solidFill>
-                <a:latin typeface="Arial"/>
+                <a:latin typeface="Roboto"/>
               </a:rPr>
               <a:t>Data retrieved 2pm, Tue 6 Oct 2026 · Sample data</a:t>
             </a:r>
@@ -4399,13 +4518,17 @@
           </a:bodyPr>
           <a:lstStyle/>
           <a:p>
-            <a:pPr algn="r"/>
+            <a:pPr algn="r">
+              <a:defRPr>
+                <a:latin typeface="Roboto"/>
+              </a:defRPr>
+            </a:pPr>
             <a:r>
               <a:rPr sz="900" b="0">
                 <a:solidFill>
                   <a:srgbClr val="5F6F63"/>
                 </a:solidFill>
-                <a:latin typeface="Arial"/>
+                <a:latin typeface="Roboto"/>
               </a:rPr>
               <a:t>Slide 10 of 11</a:t>
             </a:r>
@@ -4469,7 +4592,11 @@
           <a:bodyPr rtlCol="0" anchor="ctr"/>
           <a:lstStyle/>
           <a:p>
-            <a:pPr algn="ctr"/>
+            <a:pPr algn="ctr">
+              <a:defRPr>
+                <a:latin typeface="Roboto"/>
+              </a:defRPr>
+            </a:pPr>
           </a:p>
         </p:txBody>
       </p:sp>
@@ -4495,12 +4622,17 @@
           </a:bodyPr>
           <a:lstStyle/>
           <a:p>
+            <a:pPr>
+              <a:defRPr>
+                <a:latin typeface="Roboto"/>
+              </a:defRPr>
+            </a:pPr>
             <a:r>
               <a:rPr sz="1000" b="0">
                 <a:solidFill>
                   <a:srgbClr val="5F6F63"/>
                 </a:solidFill>
-                <a:latin typeface="Arial"/>
+                <a:latin typeface="Roboto"/>
               </a:rPr>
               <a:t>Sample Community Services Ltd · What does it cost to raise a dollar?</a:t>
             </a:r>
@@ -4529,12 +4661,17 @@
           </a:bodyPr>
           <a:lstStyle/>
           <a:p>
+            <a:pPr>
+              <a:defRPr>
+                <a:latin typeface="Roboto"/>
+              </a:defRPr>
+            </a:pPr>
             <a:r>
               <a:rPr sz="2400" b="1">
                 <a:solidFill>
                   <a:srgbClr val="25342A"/>
                 </a:solidFill>
-                <a:latin typeface="Arial"/>
+                <a:latin typeface="Roboto"/>
               </a:rPr>
               <a:t>Cost to raise a dollar, by month (cents) · Cents per $1 · Every source at once</a:t>
             </a:r>
@@ -4563,12 +4700,17 @@
           </a:bodyPr>
           <a:lstStyle/>
           <a:p>
+            <a:pPr>
+              <a:defRPr>
+                <a:latin typeface="Roboto"/>
+              </a:defRPr>
+            </a:pPr>
             <a:r>
               <a:rPr sz="1200" b="0">
                 <a:solidFill>
                   <a:srgbClr val="5F6F63"/>
                 </a:solidFill>
-                <a:latin typeface="Arial"/>
+                <a:latin typeface="Roboto"/>
               </a:rPr>
               <a:t>Months with an event (the gala, the Christmas appeal) jump. A gap means nothing was raised that month.</a:t>
             </a:r>
@@ -4615,12 +4757,17 @@
           </a:bodyPr>
           <a:lstStyle/>
           <a:p>
+            <a:pPr>
+              <a:defRPr>
+                <a:latin typeface="Roboto"/>
+              </a:defRPr>
+            </a:pPr>
             <a:r>
               <a:rPr sz="900" b="0">
                 <a:solidFill>
                   <a:srgbClr val="5F6F63"/>
                 </a:solidFill>
-                <a:latin typeface="Arial"/>
+                <a:latin typeface="Roboto"/>
               </a:rPr>
               <a:t>cost-to-raise.pptx</a:t>
             </a:r>
@@ -4649,13 +4796,17 @@
           </a:bodyPr>
           <a:lstStyle/>
           <a:p>
-            <a:pPr algn="ctr"/>
+            <a:pPr algn="ctr">
+              <a:defRPr>
+                <a:latin typeface="Roboto"/>
+              </a:defRPr>
+            </a:pPr>
             <a:r>
               <a:rPr sz="900" b="0">
                 <a:solidFill>
                   <a:srgbClr val="5F6F63"/>
                 </a:solidFill>
-                <a:latin typeface="Arial"/>
+                <a:latin typeface="Roboto"/>
               </a:rPr>
               <a:t>Data retrieved 2pm, Tue 6 Oct 2026 · Sample data</a:t>
             </a:r>
@@ -4684,13 +4835,17 @@
           </a:bodyPr>
           <a:lstStyle/>
           <a:p>
-            <a:pPr algn="r"/>
+            <a:pPr algn="r">
+              <a:defRPr>
+                <a:latin typeface="Roboto"/>
+              </a:defRPr>
+            </a:pPr>
             <a:r>
               <a:rPr sz="900" b="0">
                 <a:solidFill>
                   <a:srgbClr val="5F6F63"/>
                 </a:solidFill>
-                <a:latin typeface="Arial"/>
+                <a:latin typeface="Roboto"/>
               </a:rPr>
               <a:t>Slide 11 of 11</a:t>
             </a:r>
@@ -4754,7 +4909,11 @@
           <a:bodyPr rtlCol="0" anchor="ctr"/>
           <a:lstStyle/>
           <a:p>
-            <a:pPr algn="ctr"/>
+            <a:pPr algn="ctr">
+              <a:defRPr>
+                <a:latin typeface="Roboto"/>
+              </a:defRPr>
+            </a:pPr>
           </a:p>
         </p:txBody>
       </p:sp>
@@ -4780,12 +4939,17 @@
           </a:bodyPr>
           <a:lstStyle/>
           <a:p>
+            <a:pPr>
+              <a:defRPr>
+                <a:latin typeface="Roboto"/>
+              </a:defRPr>
+            </a:pPr>
             <a:r>
               <a:rPr sz="1000" b="0">
                 <a:solidFill>
                   <a:srgbClr val="5F6F63"/>
                 </a:solidFill>
-                <a:latin typeface="Arial"/>
+                <a:latin typeface="Roboto"/>
               </a:rPr>
               <a:t>Sample Community Services Ltd · What does it cost to raise a dollar?</a:t>
             </a:r>
@@ -4814,12 +4978,17 @@
           </a:bodyPr>
           <a:lstStyle/>
           <a:p>
+            <a:pPr>
+              <a:defRPr>
+                <a:latin typeface="Roboto"/>
+              </a:defRPr>
+            </a:pPr>
             <a:r>
               <a:rPr sz="2400" b="1">
                 <a:solidFill>
                   <a:srgbClr val="25342A"/>
                 </a:solidFill>
-                <a:latin typeface="Arial"/>
+                <a:latin typeface="Roboto"/>
               </a:rPr>
               <a:t>Headline numbers · Source: All fundraising</a:t>
             </a:r>
@@ -4867,7 +5036,11 @@
           <a:bodyPr rtlCol="0" anchor="ctr"/>
           <a:lstStyle/>
           <a:p>
-            <a:pPr algn="ctr"/>
+            <a:pPr algn="ctr">
+              <a:defRPr>
+                <a:latin typeface="Roboto"/>
+              </a:defRPr>
+            </a:pPr>
           </a:p>
         </p:txBody>
       </p:sp>
@@ -4893,12 +5066,17 @@
           </a:bodyPr>
           <a:lstStyle/>
           <a:p>
+            <a:pPr>
+              <a:defRPr>
+                <a:latin typeface="Roboto"/>
+              </a:defRPr>
+            </a:pPr>
             <a:r>
               <a:rPr sz="1200" b="0">
                 <a:solidFill>
                   <a:srgbClr val="5F6F63"/>
                 </a:solidFill>
-                <a:latin typeface="Arial"/>
+                <a:latin typeface="Roboto"/>
               </a:rPr>
               <a:t>September · all fundraising</a:t>
             </a:r>
@@ -4927,12 +5105,17 @@
           </a:bodyPr>
           <a:lstStyle/>
           <a:p>
+            <a:pPr>
+              <a:defRPr>
+                <a:latin typeface="Roboto"/>
+              </a:defRPr>
+            </a:pPr>
             <a:r>
               <a:rPr sz="3000" b="1">
                 <a:solidFill>
                   <a:srgbClr val="2F7A5D"/>
                 </a:solidFill>
-                <a:latin typeface="Arial"/>
+                <a:latin typeface="Roboto"/>
               </a:rPr>
               <a:t>20¢</a:t>
             </a:r>
@@ -4961,12 +5144,17 @@
           </a:bodyPr>
           <a:lstStyle/>
           <a:p>
+            <a:pPr>
+              <a:defRPr>
+                <a:latin typeface="Roboto"/>
+              </a:defRPr>
+            </a:pPr>
             <a:r>
               <a:rPr sz="1100" b="0">
                 <a:solidFill>
                   <a:srgbClr val="5F6F63"/>
                 </a:solidFill>
-                <a:latin typeface="Arial"/>
+                <a:latin typeface="Roboto"/>
               </a:rPr>
               <a:t>August 13¢</a:t>
             </a:r>
@@ -5014,7 +5202,11 @@
           <a:bodyPr rtlCol="0" anchor="ctr"/>
           <a:lstStyle/>
           <a:p>
-            <a:pPr algn="ctr"/>
+            <a:pPr algn="ctr">
+              <a:defRPr>
+                <a:latin typeface="Roboto"/>
+              </a:defRPr>
+            </a:pPr>
           </a:p>
         </p:txBody>
       </p:sp>
@@ -5040,12 +5232,17 @@
           </a:bodyPr>
           <a:lstStyle/>
           <a:p>
+            <a:pPr>
+              <a:defRPr>
+                <a:latin typeface="Roboto"/>
+              </a:defRPr>
+            </a:pPr>
             <a:r>
               <a:rPr sz="1200" b="0">
                 <a:solidFill>
                   <a:srgbClr val="5F6F63"/>
                 </a:solidFill>
-                <a:latin typeface="Arial"/>
+                <a:latin typeface="Roboto"/>
               </a:rPr>
               <a:t>Year to date (Jul to Sep 2026)</a:t>
             </a:r>
@@ -5074,12 +5271,17 @@
           </a:bodyPr>
           <a:lstStyle/>
           <a:p>
+            <a:pPr>
+              <a:defRPr>
+                <a:latin typeface="Roboto"/>
+              </a:defRPr>
+            </a:pPr>
             <a:r>
               <a:rPr sz="3000" b="1">
                 <a:solidFill>
                   <a:srgbClr val="2F7A5D"/>
                 </a:solidFill>
-                <a:latin typeface="Arial"/>
+                <a:latin typeface="Roboto"/>
               </a:rPr>
               <a:t>15¢</a:t>
             </a:r>
@@ -5108,12 +5310,17 @@
           </a:bodyPr>
           <a:lstStyle/>
           <a:p>
+            <a:pPr>
+              <a:defRPr>
+                <a:latin typeface="Roboto"/>
+              </a:defRPr>
+            </a:pPr>
             <a:r>
               <a:rPr sz="1100" b="0">
                 <a:solidFill>
                   <a:srgbClr val="5F6F63"/>
                 </a:solidFill>
-                <a:latin typeface="Arial"/>
+                <a:latin typeface="Roboto"/>
               </a:rPr>
               <a:t>same period last year: 16¢</a:t>
             </a:r>
@@ -5142,12 +5349,17 @@
           </a:bodyPr>
           <a:lstStyle/>
           <a:p>
+            <a:pPr>
+              <a:defRPr>
+                <a:latin typeface="Roboto"/>
+              </a:defRPr>
+            </a:pPr>
             <a:r>
               <a:rPr sz="900" b="0">
                 <a:solidFill>
                   <a:srgbClr val="5F6F63"/>
                 </a:solidFill>
-                <a:latin typeface="Arial"/>
+                <a:latin typeface="Roboto"/>
               </a:rPr>
               <a:t>cost-to-raise.pptx</a:t>
             </a:r>
@@ -5176,13 +5388,17 @@
           </a:bodyPr>
           <a:lstStyle/>
           <a:p>
-            <a:pPr algn="ctr"/>
+            <a:pPr algn="ctr">
+              <a:defRPr>
+                <a:latin typeface="Roboto"/>
+              </a:defRPr>
+            </a:pPr>
             <a:r>
               <a:rPr sz="900" b="0">
                 <a:solidFill>
                   <a:srgbClr val="5F6F63"/>
                 </a:solidFill>
-                <a:latin typeface="Arial"/>
+                <a:latin typeface="Roboto"/>
               </a:rPr>
               <a:t>Data retrieved 2pm, Tue 6 Oct 2026 · Sample data</a:t>
             </a:r>
@@ -5211,13 +5427,17 @@
           </a:bodyPr>
           <a:lstStyle/>
           <a:p>
-            <a:pPr algn="r"/>
+            <a:pPr algn="r">
+              <a:defRPr>
+                <a:latin typeface="Roboto"/>
+              </a:defRPr>
+            </a:pPr>
             <a:r>
               <a:rPr sz="900" b="0">
                 <a:solidFill>
                   <a:srgbClr val="5F6F63"/>
                 </a:solidFill>
-                <a:latin typeface="Arial"/>
+                <a:latin typeface="Roboto"/>
               </a:rPr>
               <a:t>Slide 2 of 11</a:t>
             </a:r>
@@ -5281,7 +5501,11 @@
           <a:bodyPr rtlCol="0" anchor="ctr"/>
           <a:lstStyle/>
           <a:p>
-            <a:pPr algn="ctr"/>
+            <a:pPr algn="ctr">
+              <a:defRPr>
+                <a:latin typeface="Roboto"/>
+              </a:defRPr>
+            </a:pPr>
           </a:p>
         </p:txBody>
       </p:sp>
@@ -5307,12 +5531,17 @@
           </a:bodyPr>
           <a:lstStyle/>
           <a:p>
+            <a:pPr>
+              <a:defRPr>
+                <a:latin typeface="Roboto"/>
+              </a:defRPr>
+            </a:pPr>
             <a:r>
               <a:rPr sz="1000" b="0">
                 <a:solidFill>
                   <a:srgbClr val="5F6F63"/>
                 </a:solidFill>
-                <a:latin typeface="Arial"/>
+                <a:latin typeface="Roboto"/>
               </a:rPr>
               <a:t>Sample Community Services Ltd · What does it cost to raise a dollar?</a:t>
             </a:r>
@@ -5341,12 +5570,17 @@
           </a:bodyPr>
           <a:lstStyle/>
           <a:p>
+            <a:pPr>
+              <a:defRPr>
+                <a:latin typeface="Roboto"/>
+              </a:defRPr>
+            </a:pPr>
             <a:r>
               <a:rPr sz="2400" b="1">
                 <a:solidFill>
                   <a:srgbClr val="25342A"/>
                 </a:solidFill>
-                <a:latin typeface="Arial"/>
+                <a:latin typeface="Roboto"/>
               </a:rPr>
               <a:t>Cost to raise a dollar, by source, September 2026 (cents) · Source: All fundraising</a:t>
             </a:r>
@@ -5393,12 +5627,17 @@
           </a:bodyPr>
           <a:lstStyle/>
           <a:p>
+            <a:pPr>
+              <a:defRPr>
+                <a:latin typeface="Roboto"/>
+              </a:defRPr>
+            </a:pPr>
             <a:r>
               <a:rPr sz="900" b="0">
                 <a:solidFill>
                   <a:srgbClr val="5F6F63"/>
                 </a:solidFill>
-                <a:latin typeface="Arial"/>
+                <a:latin typeface="Roboto"/>
               </a:rPr>
               <a:t>cost-to-raise.pptx</a:t>
             </a:r>
@@ -5427,13 +5666,17 @@
           </a:bodyPr>
           <a:lstStyle/>
           <a:p>
-            <a:pPr algn="ctr"/>
+            <a:pPr algn="ctr">
+              <a:defRPr>
+                <a:latin typeface="Roboto"/>
+              </a:defRPr>
+            </a:pPr>
             <a:r>
               <a:rPr sz="900" b="0">
                 <a:solidFill>
                   <a:srgbClr val="5F6F63"/>
                 </a:solidFill>
-                <a:latin typeface="Arial"/>
+                <a:latin typeface="Roboto"/>
               </a:rPr>
               <a:t>Data retrieved 2pm, Tue 6 Oct 2026 · Sample data</a:t>
             </a:r>
@@ -5462,13 +5705,17 @@
           </a:bodyPr>
           <a:lstStyle/>
           <a:p>
-            <a:pPr algn="r"/>
+            <a:pPr algn="r">
+              <a:defRPr>
+                <a:latin typeface="Roboto"/>
+              </a:defRPr>
+            </a:pPr>
             <a:r>
               <a:rPr sz="900" b="0">
                 <a:solidFill>
                   <a:srgbClr val="5F6F63"/>
                 </a:solidFill>
-                <a:latin typeface="Arial"/>
+                <a:latin typeface="Roboto"/>
               </a:rPr>
               <a:t>Slide 3 of 11</a:t>
             </a:r>
@@ -5532,7 +5779,11 @@
           <a:bodyPr rtlCol="0" anchor="ctr"/>
           <a:lstStyle/>
           <a:p>
-            <a:pPr algn="ctr"/>
+            <a:pPr algn="ctr">
+              <a:defRPr>
+                <a:latin typeface="Roboto"/>
+              </a:defRPr>
+            </a:pPr>
           </a:p>
         </p:txBody>
       </p:sp>
@@ -5558,12 +5809,17 @@
           </a:bodyPr>
           <a:lstStyle/>
           <a:p>
+            <a:pPr>
+              <a:defRPr>
+                <a:latin typeface="Roboto"/>
+              </a:defRPr>
+            </a:pPr>
             <a:r>
               <a:rPr sz="1000" b="0">
                 <a:solidFill>
                   <a:srgbClr val="5F6F63"/>
                 </a:solidFill>
-                <a:latin typeface="Arial"/>
+                <a:latin typeface="Roboto"/>
               </a:rPr>
               <a:t>Sample Community Services Ltd · What does it cost to raise a dollar?</a:t>
             </a:r>
@@ -5592,12 +5848,17 @@
           </a:bodyPr>
           <a:lstStyle/>
           <a:p>
+            <a:pPr>
+              <a:defRPr>
+                <a:latin typeface="Roboto"/>
+              </a:defRPr>
+            </a:pPr>
             <a:r>
               <a:rPr sz="2400" b="1">
                 <a:solidFill>
                   <a:srgbClr val="25342A"/>
                 </a:solidFill>
-                <a:latin typeface="Arial"/>
+                <a:latin typeface="Roboto"/>
               </a:rPr>
               <a:t>What it shows · Source: All fundraising</a:t>
             </a:r>
@@ -5645,7 +5906,11 @@
           <a:bodyPr rtlCol="0" anchor="ctr"/>
           <a:lstStyle/>
           <a:p>
-            <a:pPr algn="ctr"/>
+            <a:pPr algn="ctr">
+              <a:defRPr>
+                <a:latin typeface="Roboto"/>
+              </a:defRPr>
+            </a:pPr>
           </a:p>
         </p:txBody>
       </p:sp>
@@ -5671,12 +5936,17 @@
           </a:bodyPr>
           <a:lstStyle/>
           <a:p>
+            <a:pPr>
+              <a:defRPr>
+                <a:latin typeface="Roboto"/>
+              </a:defRPr>
+            </a:pPr>
             <a:r>
               <a:rPr sz="1100" b="1">
                 <a:solidFill>
                   <a:srgbClr val="5F6F63"/>
                 </a:solidFill>
-                <a:latin typeface="Arial"/>
+                <a:latin typeface="Roboto"/>
               </a:rPr>
               <a:t>WHAT IT SHOWS</a:t>
             </a:r>
@@ -5705,12 +5975,17 @@
           </a:bodyPr>
           <a:lstStyle/>
           <a:p>
+            <a:pPr>
+              <a:defRPr>
+                <a:latin typeface="Roboto"/>
+              </a:defRPr>
+            </a:pPr>
             <a:r>
               <a:rPr sz="1600" b="0">
                 <a:solidFill>
                   <a:srgbClr val="25342A"/>
                 </a:solidFill>
-                <a:latin typeface="Arial"/>
+                <a:latin typeface="Roboto"/>
               </a:rPr>
               <a:t>September cost 20¢ to raise each dollar, against 13¢ in August. Fundraising events raised $41,600 and cost $16,900. This financial year to date it has cost 15¢ a dollar, against 16¢ in the same period last year.</a:t>
             </a:r>
@@ -5758,7 +6033,11 @@
           <a:bodyPr rtlCol="0" anchor="ctr"/>
           <a:lstStyle/>
           <a:p>
-            <a:pPr algn="ctr"/>
+            <a:pPr algn="ctr">
+              <a:defRPr>
+                <a:latin typeface="Roboto"/>
+              </a:defRPr>
+            </a:pPr>
           </a:p>
         </p:txBody>
       </p:sp>
@@ -5784,12 +6063,17 @@
           </a:bodyPr>
           <a:lstStyle/>
           <a:p>
+            <a:pPr>
+              <a:defRPr>
+                <a:latin typeface="Roboto"/>
+              </a:defRPr>
+            </a:pPr>
             <a:r>
               <a:rPr sz="1100" b="1">
                 <a:solidFill>
                   <a:srgbClr val="5F6F63"/>
                 </a:solidFill>
-                <a:latin typeface="Arial"/>
+                <a:latin typeface="Roboto"/>
               </a:rPr>
               <a:t>WHAT YOU'D DO ABOUT IT</a:t>
             </a:r>
@@ -5818,12 +6102,17 @@
           </a:bodyPr>
           <a:lstStyle/>
           <a:p>
+            <a:pPr>
+              <a:defRPr>
+                <a:latin typeface="Roboto"/>
+              </a:defRPr>
+            </a:pPr>
             <a:r>
               <a:rPr sz="1600" b="0">
                 <a:solidFill>
                   <a:srgbClr val="25342A"/>
                 </a:solidFill>
-                <a:latin typeface="Arial"/>
+                <a:latin typeface="Roboto"/>
               </a:rPr>
               <a:t>The year-to-date figure is steadier than single months: events make some months jump. Pick a source above to see which one moves it.</a:t>
             </a:r>
@@ -5852,12 +6141,17 @@
           </a:bodyPr>
           <a:lstStyle/>
           <a:p>
+            <a:pPr>
+              <a:defRPr>
+                <a:latin typeface="Roboto"/>
+              </a:defRPr>
+            </a:pPr>
             <a:r>
               <a:rPr sz="900" b="0">
                 <a:solidFill>
                   <a:srgbClr val="5F6F63"/>
                 </a:solidFill>
-                <a:latin typeface="Arial"/>
+                <a:latin typeface="Roboto"/>
               </a:rPr>
               <a:t>cost-to-raise.pptx</a:t>
             </a:r>
@@ -5886,13 +6180,17 @@
           </a:bodyPr>
           <a:lstStyle/>
           <a:p>
-            <a:pPr algn="ctr"/>
+            <a:pPr algn="ctr">
+              <a:defRPr>
+                <a:latin typeface="Roboto"/>
+              </a:defRPr>
+            </a:pPr>
             <a:r>
               <a:rPr sz="900" b="0">
                 <a:solidFill>
                   <a:srgbClr val="5F6F63"/>
                 </a:solidFill>
-                <a:latin typeface="Arial"/>
+                <a:latin typeface="Roboto"/>
               </a:rPr>
               <a:t>Data retrieved 2pm, Tue 6 Oct 2026 · Sample data</a:t>
             </a:r>
@@ -5921,13 +6219,17 @@
           </a:bodyPr>
           <a:lstStyle/>
           <a:p>
-            <a:pPr algn="r"/>
+            <a:pPr algn="r">
+              <a:defRPr>
+                <a:latin typeface="Roboto"/>
+              </a:defRPr>
+            </a:pPr>
             <a:r>
               <a:rPr sz="900" b="0">
                 <a:solidFill>
                   <a:srgbClr val="5F6F63"/>
                 </a:solidFill>
-                <a:latin typeface="Arial"/>
+                <a:latin typeface="Roboto"/>
               </a:rPr>
               <a:t>Slide 4 of 11</a:t>
             </a:r>
@@ -5991,7 +6293,11 @@
           <a:bodyPr rtlCol="0" anchor="ctr"/>
           <a:lstStyle/>
           <a:p>
-            <a:pPr algn="ctr"/>
+            <a:pPr algn="ctr">
+              <a:defRPr>
+                <a:latin typeface="Roboto"/>
+              </a:defRPr>
+            </a:pPr>
           </a:p>
         </p:txBody>
       </p:sp>
@@ -6017,12 +6323,17 @@
           </a:bodyPr>
           <a:lstStyle/>
           <a:p>
+            <a:pPr>
+              <a:defRPr>
+                <a:latin typeface="Roboto"/>
+              </a:defRPr>
+            </a:pPr>
             <a:r>
               <a:rPr sz="1000" b="0">
                 <a:solidFill>
                   <a:srgbClr val="5F6F63"/>
                 </a:solidFill>
-                <a:latin typeface="Arial"/>
+                <a:latin typeface="Roboto"/>
               </a:rPr>
               <a:t>Sample Community Services Ltd · What does it cost to raise a dollar?</a:t>
             </a:r>
@@ -6051,12 +6362,17 @@
           </a:bodyPr>
           <a:lstStyle/>
           <a:p>
+            <a:pPr>
+              <a:defRPr>
+                <a:latin typeface="Roboto"/>
+              </a:defRPr>
+            </a:pPr>
             <a:r>
               <a:rPr sz="2400" b="1">
                 <a:solidFill>
                   <a:srgbClr val="25342A"/>
                 </a:solidFill>
-                <a:latin typeface="Arial"/>
+                <a:latin typeface="Roboto"/>
               </a:rPr>
               <a:t>Headline numbers · Source: Grants</a:t>
             </a:r>
@@ -6104,7 +6420,11 @@
           <a:bodyPr rtlCol="0" anchor="ctr"/>
           <a:lstStyle/>
           <a:p>
-            <a:pPr algn="ctr"/>
+            <a:pPr algn="ctr">
+              <a:defRPr>
+                <a:latin typeface="Roboto"/>
+              </a:defRPr>
+            </a:pPr>
           </a:p>
         </p:txBody>
       </p:sp>
@@ -6130,12 +6450,17 @@
           </a:bodyPr>
           <a:lstStyle/>
           <a:p>
+            <a:pPr>
+              <a:defRPr>
+                <a:latin typeface="Roboto"/>
+              </a:defRPr>
+            </a:pPr>
             <a:r>
               <a:rPr sz="1200" b="0">
                 <a:solidFill>
                   <a:srgbClr val="5F6F63"/>
                 </a:solidFill>
-                <a:latin typeface="Arial"/>
+                <a:latin typeface="Roboto"/>
               </a:rPr>
               <a:t>September · Grants</a:t>
             </a:r>
@@ -6164,12 +6489,17 @@
           </a:bodyPr>
           <a:lstStyle/>
           <a:p>
+            <a:pPr>
+              <a:defRPr>
+                <a:latin typeface="Roboto"/>
+              </a:defRPr>
+            </a:pPr>
             <a:r>
               <a:rPr sz="3000" b="1">
                 <a:solidFill>
                   <a:srgbClr val="2F7A5D"/>
                 </a:solidFill>
-                <a:latin typeface="Arial"/>
+                <a:latin typeface="Roboto"/>
               </a:rPr>
               <a:t>9¢</a:t>
             </a:r>
@@ -6198,12 +6528,17 @@
           </a:bodyPr>
           <a:lstStyle/>
           <a:p>
+            <a:pPr>
+              <a:defRPr>
+                <a:latin typeface="Roboto"/>
+              </a:defRPr>
+            </a:pPr>
             <a:r>
               <a:rPr sz="1100" b="0">
                 <a:solidFill>
                   <a:srgbClr val="5F6F63"/>
                 </a:solidFill>
-                <a:latin typeface="Arial"/>
+                <a:latin typeface="Roboto"/>
               </a:rPr>
               <a:t>August 10¢</a:t>
             </a:r>
@@ -6251,7 +6586,11 @@
           <a:bodyPr rtlCol="0" anchor="ctr"/>
           <a:lstStyle/>
           <a:p>
-            <a:pPr algn="ctr"/>
+            <a:pPr algn="ctr">
+              <a:defRPr>
+                <a:latin typeface="Roboto"/>
+              </a:defRPr>
+            </a:pPr>
           </a:p>
         </p:txBody>
       </p:sp>
@@ -6277,12 +6616,17 @@
           </a:bodyPr>
           <a:lstStyle/>
           <a:p>
+            <a:pPr>
+              <a:defRPr>
+                <a:latin typeface="Roboto"/>
+              </a:defRPr>
+            </a:pPr>
             <a:r>
               <a:rPr sz="1200" b="0">
                 <a:solidFill>
                   <a:srgbClr val="5F6F63"/>
                 </a:solidFill>
-                <a:latin typeface="Arial"/>
+                <a:latin typeface="Roboto"/>
               </a:rPr>
               <a:t>Year to date (Jul to Sep 2026)</a:t>
             </a:r>
@@ -6311,12 +6655,17 @@
           </a:bodyPr>
           <a:lstStyle/>
           <a:p>
+            <a:pPr>
+              <a:defRPr>
+                <a:latin typeface="Roboto"/>
+              </a:defRPr>
+            </a:pPr>
             <a:r>
               <a:rPr sz="3000" b="1">
                 <a:solidFill>
                   <a:srgbClr val="2F7A5D"/>
                 </a:solidFill>
-                <a:latin typeface="Arial"/>
+                <a:latin typeface="Roboto"/>
               </a:rPr>
               <a:t>10¢</a:t>
             </a:r>
@@ -6345,12 +6694,17 @@
           </a:bodyPr>
           <a:lstStyle/>
           <a:p>
+            <a:pPr>
+              <a:defRPr>
+                <a:latin typeface="Roboto"/>
+              </a:defRPr>
+            </a:pPr>
             <a:r>
               <a:rPr sz="1100" b="0">
                 <a:solidFill>
                   <a:srgbClr val="5F6F63"/>
                 </a:solidFill>
-                <a:latin typeface="Arial"/>
+                <a:latin typeface="Roboto"/>
               </a:rPr>
               <a:t>same period last year: 12¢</a:t>
             </a:r>
@@ -6379,12 +6733,17 @@
           </a:bodyPr>
           <a:lstStyle/>
           <a:p>
+            <a:pPr>
+              <a:defRPr>
+                <a:latin typeface="Roboto"/>
+              </a:defRPr>
+            </a:pPr>
             <a:r>
               <a:rPr sz="900" b="0">
                 <a:solidFill>
                   <a:srgbClr val="5F6F63"/>
                 </a:solidFill>
-                <a:latin typeface="Arial"/>
+                <a:latin typeface="Roboto"/>
               </a:rPr>
               <a:t>cost-to-raise.pptx</a:t>
             </a:r>
@@ -6413,13 +6772,17 @@
           </a:bodyPr>
           <a:lstStyle/>
           <a:p>
-            <a:pPr algn="ctr"/>
+            <a:pPr algn="ctr">
+              <a:defRPr>
+                <a:latin typeface="Roboto"/>
+              </a:defRPr>
+            </a:pPr>
             <a:r>
               <a:rPr sz="900" b="0">
                 <a:solidFill>
                   <a:srgbClr val="5F6F63"/>
                 </a:solidFill>
-                <a:latin typeface="Arial"/>
+                <a:latin typeface="Roboto"/>
               </a:rPr>
               <a:t>Data retrieved 2pm, Tue 6 Oct 2026 · Sample data</a:t>
             </a:r>
@@ -6448,13 +6811,17 @@
           </a:bodyPr>
           <a:lstStyle/>
           <a:p>
-            <a:pPr algn="r"/>
+            <a:pPr algn="r">
+              <a:defRPr>
+                <a:latin typeface="Roboto"/>
+              </a:defRPr>
+            </a:pPr>
             <a:r>
               <a:rPr sz="900" b="0">
                 <a:solidFill>
                   <a:srgbClr val="5F6F63"/>
                 </a:solidFill>
-                <a:latin typeface="Arial"/>
+                <a:latin typeface="Roboto"/>
               </a:rPr>
               <a:t>Slide 5 of 11</a:t>
             </a:r>
@@ -6518,7 +6885,11 @@
           <a:bodyPr rtlCol="0" anchor="ctr"/>
           <a:lstStyle/>
           <a:p>
-            <a:pPr algn="ctr"/>
+            <a:pPr algn="ctr">
+              <a:defRPr>
+                <a:latin typeface="Roboto"/>
+              </a:defRPr>
+            </a:pPr>
           </a:p>
         </p:txBody>
       </p:sp>
@@ -6544,12 +6915,17 @@
           </a:bodyPr>
           <a:lstStyle/>
           <a:p>
+            <a:pPr>
+              <a:defRPr>
+                <a:latin typeface="Roboto"/>
+              </a:defRPr>
+            </a:pPr>
             <a:r>
               <a:rPr sz="1000" b="0">
                 <a:solidFill>
                   <a:srgbClr val="5F6F63"/>
                 </a:solidFill>
-                <a:latin typeface="Arial"/>
+                <a:latin typeface="Roboto"/>
               </a:rPr>
               <a:t>Sample Community Services Ltd · What does it cost to raise a dollar?</a:t>
             </a:r>
@@ -6578,12 +6954,17 @@
           </a:bodyPr>
           <a:lstStyle/>
           <a:p>
+            <a:pPr>
+              <a:defRPr>
+                <a:latin typeface="Roboto"/>
+              </a:defRPr>
+            </a:pPr>
             <a:r>
               <a:rPr sz="2400" b="1">
                 <a:solidFill>
                   <a:srgbClr val="25342A"/>
                 </a:solidFill>
-                <a:latin typeface="Arial"/>
+                <a:latin typeface="Roboto"/>
               </a:rPr>
               <a:t>What it shows · Source: Grants</a:t>
             </a:r>
@@ -6631,7 +7012,11 @@
           <a:bodyPr rtlCol="0" anchor="ctr"/>
           <a:lstStyle/>
           <a:p>
-            <a:pPr algn="ctr"/>
+            <a:pPr algn="ctr">
+              <a:defRPr>
+                <a:latin typeface="Roboto"/>
+              </a:defRPr>
+            </a:pPr>
           </a:p>
         </p:txBody>
       </p:sp>
@@ -6657,12 +7042,17 @@
           </a:bodyPr>
           <a:lstStyle/>
           <a:p>
+            <a:pPr>
+              <a:defRPr>
+                <a:latin typeface="Roboto"/>
+              </a:defRPr>
+            </a:pPr>
             <a:r>
               <a:rPr sz="1100" b="1">
                 <a:solidFill>
                   <a:srgbClr val="5F6F63"/>
                 </a:solidFill>
-                <a:latin typeface="Arial"/>
+                <a:latin typeface="Roboto"/>
               </a:rPr>
               <a:t>WHAT IT SHOWS</a:t>
             </a:r>
@@ -6691,12 +7081,17 @@
           </a:bodyPr>
           <a:lstStyle/>
           <a:p>
+            <a:pPr>
+              <a:defRPr>
+                <a:latin typeface="Roboto"/>
+              </a:defRPr>
+            </a:pPr>
             <a:r>
               <a:rPr sz="1600" b="0">
                 <a:solidFill>
                   <a:srgbClr val="25342A"/>
                 </a:solidFill>
-                <a:latin typeface="Arial"/>
+                <a:latin typeface="Roboto"/>
               </a:rPr>
               <a:t>Grants cost 10¢ to raise each dollar this financial year to date ($21,300 of grant writing and reporting for $223,318), against 12¢ in the same period last year.</a:t>
             </a:r>
@@ -6744,7 +7139,11 @@
           <a:bodyPr rtlCol="0" anchor="ctr"/>
           <a:lstStyle/>
           <a:p>
-            <a:pPr algn="ctr"/>
+            <a:pPr algn="ctr">
+              <a:defRPr>
+                <a:latin typeface="Roboto"/>
+              </a:defRPr>
+            </a:pPr>
           </a:p>
         </p:txBody>
       </p:sp>
@@ -6770,12 +7169,17 @@
           </a:bodyPr>
           <a:lstStyle/>
           <a:p>
+            <a:pPr>
+              <a:defRPr>
+                <a:latin typeface="Roboto"/>
+              </a:defRPr>
+            </a:pPr>
             <a:r>
               <a:rPr sz="1100" b="1">
                 <a:solidFill>
                   <a:srgbClr val="5F6F63"/>
                 </a:solidFill>
-                <a:latin typeface="Arial"/>
+                <a:latin typeface="Roboto"/>
               </a:rPr>
               <a:t>WHAT YOU'D DO ABOUT IT</a:t>
             </a:r>
@@ -6804,12 +7208,17 @@
           </a:bodyPr>
           <a:lstStyle/>
           <a:p>
+            <a:pPr>
+              <a:defRPr>
+                <a:latin typeface="Roboto"/>
+              </a:defRPr>
+            </a:pPr>
             <a:r>
               <a:rPr sz="1600" b="0">
                 <a:solidFill>
                   <a:srgbClr val="25342A"/>
                 </a:solidFill>
-                <a:latin typeface="Arial"/>
+                <a:latin typeface="Roboto"/>
               </a:rPr>
               <a:t>Usually the cheapest money to raise, as long as the time that goes into applications and acquittals is protected.</a:t>
             </a:r>
@@ -6838,12 +7247,17 @@
           </a:bodyPr>
           <a:lstStyle/>
           <a:p>
+            <a:pPr>
+              <a:defRPr>
+                <a:latin typeface="Roboto"/>
+              </a:defRPr>
+            </a:pPr>
             <a:r>
               <a:rPr sz="900" b="0">
                 <a:solidFill>
                   <a:srgbClr val="5F6F63"/>
                 </a:solidFill>
-                <a:latin typeface="Arial"/>
+                <a:latin typeface="Roboto"/>
               </a:rPr>
               <a:t>cost-to-raise.pptx</a:t>
             </a:r>
@@ -6872,13 +7286,17 @@
           </a:bodyPr>
           <a:lstStyle/>
           <a:p>
-            <a:pPr algn="ctr"/>
+            <a:pPr algn="ctr">
+              <a:defRPr>
+                <a:latin typeface="Roboto"/>
+              </a:defRPr>
+            </a:pPr>
             <a:r>
               <a:rPr sz="900" b="0">
                 <a:solidFill>
                   <a:srgbClr val="5F6F63"/>
                 </a:solidFill>
-                <a:latin typeface="Arial"/>
+                <a:latin typeface="Roboto"/>
               </a:rPr>
               <a:t>Data retrieved 2pm, Tue 6 Oct 2026 · Sample data</a:t>
             </a:r>
@@ -6907,13 +7325,17 @@
           </a:bodyPr>
           <a:lstStyle/>
           <a:p>
-            <a:pPr algn="r"/>
+            <a:pPr algn="r">
+              <a:defRPr>
+                <a:latin typeface="Roboto"/>
+              </a:defRPr>
+            </a:pPr>
             <a:r>
               <a:rPr sz="900" b="0">
                 <a:solidFill>
                   <a:srgbClr val="5F6F63"/>
                 </a:solidFill>
-                <a:latin typeface="Arial"/>
+                <a:latin typeface="Roboto"/>
               </a:rPr>
               <a:t>Slide 6 of 11</a:t>
             </a:r>
@@ -6977,7 +7399,11 @@
           <a:bodyPr rtlCol="0" anchor="ctr"/>
           <a:lstStyle/>
           <a:p>
-            <a:pPr algn="ctr"/>
+            <a:pPr algn="ctr">
+              <a:defRPr>
+                <a:latin typeface="Roboto"/>
+              </a:defRPr>
+            </a:pPr>
           </a:p>
         </p:txBody>
       </p:sp>
@@ -7003,12 +7429,17 @@
           </a:bodyPr>
           <a:lstStyle/>
           <a:p>
+            <a:pPr>
+              <a:defRPr>
+                <a:latin typeface="Roboto"/>
+              </a:defRPr>
+            </a:pPr>
             <a:r>
               <a:rPr sz="1000" b="0">
                 <a:solidFill>
                   <a:srgbClr val="5F6F63"/>
                 </a:solidFill>
-                <a:latin typeface="Arial"/>
+                <a:latin typeface="Roboto"/>
               </a:rPr>
               <a:t>Sample Community Services Ltd · What does it cost to raise a dollar?</a:t>
             </a:r>
@@ -7037,12 +7468,17 @@
           </a:bodyPr>
           <a:lstStyle/>
           <a:p>
+            <a:pPr>
+              <a:defRPr>
+                <a:latin typeface="Roboto"/>
+              </a:defRPr>
+            </a:pPr>
             <a:r>
               <a:rPr sz="2400" b="1">
                 <a:solidFill>
                   <a:srgbClr val="25342A"/>
                 </a:solidFill>
-                <a:latin typeface="Arial"/>
+                <a:latin typeface="Roboto"/>
               </a:rPr>
               <a:t>Headline numbers · Source: Donations</a:t>
             </a:r>
@@ -7090,7 +7526,11 @@
           <a:bodyPr rtlCol="0" anchor="ctr"/>
           <a:lstStyle/>
           <a:p>
-            <a:pPr algn="ctr"/>
+            <a:pPr algn="ctr">
+              <a:defRPr>
+                <a:latin typeface="Roboto"/>
+              </a:defRPr>
+            </a:pPr>
           </a:p>
         </p:txBody>
       </p:sp>
@@ -7116,12 +7556,17 @@
           </a:bodyPr>
           <a:lstStyle/>
           <a:p>
+            <a:pPr>
+              <a:defRPr>
+                <a:latin typeface="Roboto"/>
+              </a:defRPr>
+            </a:pPr>
             <a:r>
               <a:rPr sz="1200" b="0">
                 <a:solidFill>
                   <a:srgbClr val="5F6F63"/>
                 </a:solidFill>
-                <a:latin typeface="Arial"/>
+                <a:latin typeface="Roboto"/>
               </a:rPr>
               <a:t>September · Donations</a:t>
             </a:r>
@@ -7150,12 +7595,17 @@
           </a:bodyPr>
           <a:lstStyle/>
           <a:p>
+            <a:pPr>
+              <a:defRPr>
+                <a:latin typeface="Roboto"/>
+              </a:defRPr>
+            </a:pPr>
             <a:r>
               <a:rPr sz="3000" b="1">
                 <a:solidFill>
                   <a:srgbClr val="2F7A5D"/>
                 </a:solidFill>
-                <a:latin typeface="Arial"/>
+                <a:latin typeface="Roboto"/>
               </a:rPr>
               <a:t>19¢</a:t>
             </a:r>
@@ -7184,12 +7634,17 @@
           </a:bodyPr>
           <a:lstStyle/>
           <a:p>
+            <a:pPr>
+              <a:defRPr>
+                <a:latin typeface="Roboto"/>
+              </a:defRPr>
+            </a:pPr>
             <a:r>
               <a:rPr sz="1100" b="0">
                 <a:solidFill>
                   <a:srgbClr val="5F6F63"/>
                 </a:solidFill>
-                <a:latin typeface="Arial"/>
+                <a:latin typeface="Roboto"/>
               </a:rPr>
               <a:t>August 12¢</a:t>
             </a:r>
@@ -7237,7 +7692,11 @@
           <a:bodyPr rtlCol="0" anchor="ctr"/>
           <a:lstStyle/>
           <a:p>
-            <a:pPr algn="ctr"/>
+            <a:pPr algn="ctr">
+              <a:defRPr>
+                <a:latin typeface="Roboto"/>
+              </a:defRPr>
+            </a:pPr>
           </a:p>
         </p:txBody>
       </p:sp>
@@ -7263,12 +7722,17 @@
           </a:bodyPr>
           <a:lstStyle/>
           <a:p>
+            <a:pPr>
+              <a:defRPr>
+                <a:latin typeface="Roboto"/>
+              </a:defRPr>
+            </a:pPr>
             <a:r>
               <a:rPr sz="1200" b="0">
                 <a:solidFill>
                   <a:srgbClr val="5F6F63"/>
                 </a:solidFill>
-                <a:latin typeface="Arial"/>
+                <a:latin typeface="Roboto"/>
               </a:rPr>
               <a:t>Year to date (Jul to Sep 2026)</a:t>
             </a:r>
@@ -7297,12 +7761,17 @@
           </a:bodyPr>
           <a:lstStyle/>
           <a:p>
+            <a:pPr>
+              <a:defRPr>
+                <a:latin typeface="Roboto"/>
+              </a:defRPr>
+            </a:pPr>
             <a:r>
               <a:rPr sz="3000" b="1">
                 <a:solidFill>
                   <a:srgbClr val="2F7A5D"/>
                 </a:solidFill>
-                <a:latin typeface="Arial"/>
+                <a:latin typeface="Roboto"/>
               </a:rPr>
               <a:t>16¢</a:t>
             </a:r>
@@ -7331,12 +7800,17 @@
           </a:bodyPr>
           <a:lstStyle/>
           <a:p>
+            <a:pPr>
+              <a:defRPr>
+                <a:latin typeface="Roboto"/>
+              </a:defRPr>
+            </a:pPr>
             <a:r>
               <a:rPr sz="1100" b="0">
                 <a:solidFill>
                   <a:srgbClr val="5F6F63"/>
                 </a:solidFill>
-                <a:latin typeface="Arial"/>
+                <a:latin typeface="Roboto"/>
               </a:rPr>
               <a:t>same period last year: 14¢</a:t>
             </a:r>
@@ -7365,12 +7839,17 @@
           </a:bodyPr>
           <a:lstStyle/>
           <a:p>
+            <a:pPr>
+              <a:defRPr>
+                <a:latin typeface="Roboto"/>
+              </a:defRPr>
+            </a:pPr>
             <a:r>
               <a:rPr sz="900" b="0">
                 <a:solidFill>
                   <a:srgbClr val="5F6F63"/>
                 </a:solidFill>
-                <a:latin typeface="Arial"/>
+                <a:latin typeface="Roboto"/>
               </a:rPr>
               <a:t>cost-to-raise.pptx</a:t>
             </a:r>
@@ -7399,13 +7878,17 @@
           </a:bodyPr>
           <a:lstStyle/>
           <a:p>
-            <a:pPr algn="ctr"/>
+            <a:pPr algn="ctr">
+              <a:defRPr>
+                <a:latin typeface="Roboto"/>
+              </a:defRPr>
+            </a:pPr>
             <a:r>
               <a:rPr sz="900" b="0">
                 <a:solidFill>
                   <a:srgbClr val="5F6F63"/>
                 </a:solidFill>
-                <a:latin typeface="Arial"/>
+                <a:latin typeface="Roboto"/>
               </a:rPr>
               <a:t>Data retrieved 2pm, Tue 6 Oct 2026 · Sample data</a:t>
             </a:r>
@@ -7434,13 +7917,17 @@
           </a:bodyPr>
           <a:lstStyle/>
           <a:p>
-            <a:pPr algn="r"/>
+            <a:pPr algn="r">
+              <a:defRPr>
+                <a:latin typeface="Roboto"/>
+              </a:defRPr>
+            </a:pPr>
             <a:r>
               <a:rPr sz="900" b="0">
                 <a:solidFill>
                   <a:srgbClr val="5F6F63"/>
                 </a:solidFill>
-                <a:latin typeface="Arial"/>
+                <a:latin typeface="Roboto"/>
               </a:rPr>
               <a:t>Slide 7 of 11</a:t>
             </a:r>
@@ -7504,7 +7991,11 @@
           <a:bodyPr rtlCol="0" anchor="ctr"/>
           <a:lstStyle/>
           <a:p>
-            <a:pPr algn="ctr"/>
+            <a:pPr algn="ctr">
+              <a:defRPr>
+                <a:latin typeface="Roboto"/>
+              </a:defRPr>
+            </a:pPr>
           </a:p>
         </p:txBody>
       </p:sp>
@@ -7530,12 +8021,17 @@
           </a:bodyPr>
           <a:lstStyle/>
           <a:p>
+            <a:pPr>
+              <a:defRPr>
+                <a:latin typeface="Roboto"/>
+              </a:defRPr>
+            </a:pPr>
             <a:r>
               <a:rPr sz="1000" b="0">
                 <a:solidFill>
                   <a:srgbClr val="5F6F63"/>
                 </a:solidFill>
-                <a:latin typeface="Arial"/>
+                <a:latin typeface="Roboto"/>
               </a:rPr>
               <a:t>Sample Community Services Ltd · What does it cost to raise a dollar?</a:t>
             </a:r>
@@ -7564,12 +8060,17 @@
           </a:bodyPr>
           <a:lstStyle/>
           <a:p>
+            <a:pPr>
+              <a:defRPr>
+                <a:latin typeface="Roboto"/>
+              </a:defRPr>
+            </a:pPr>
             <a:r>
               <a:rPr sz="2400" b="1">
                 <a:solidFill>
                   <a:srgbClr val="25342A"/>
                 </a:solidFill>
-                <a:latin typeface="Arial"/>
+                <a:latin typeface="Roboto"/>
               </a:rPr>
               <a:t>What it shows · Source: Donations</a:t>
             </a:r>
@@ -7617,7 +8118,11 @@
           <a:bodyPr rtlCol="0" anchor="ctr"/>
           <a:lstStyle/>
           <a:p>
-            <a:pPr algn="ctr"/>
+            <a:pPr algn="ctr">
+              <a:defRPr>
+                <a:latin typeface="Roboto"/>
+              </a:defRPr>
+            </a:pPr>
           </a:p>
         </p:txBody>
       </p:sp>
@@ -7643,12 +8148,17 @@
           </a:bodyPr>
           <a:lstStyle/>
           <a:p>
+            <a:pPr>
+              <a:defRPr>
+                <a:latin typeface="Roboto"/>
+              </a:defRPr>
+            </a:pPr>
             <a:r>
               <a:rPr sz="1100" b="1">
                 <a:solidFill>
                   <a:srgbClr val="5F6F63"/>
                 </a:solidFill>
-                <a:latin typeface="Arial"/>
+                <a:latin typeface="Roboto"/>
               </a:rPr>
               <a:t>WHAT IT SHOWS</a:t>
             </a:r>
@@ -7677,12 +8187,17 @@
           </a:bodyPr>
           <a:lstStyle/>
           <a:p>
+            <a:pPr>
+              <a:defRPr>
+                <a:latin typeface="Roboto"/>
+              </a:defRPr>
+            </a:pPr>
             <a:r>
               <a:rPr sz="1600" b="0">
                 <a:solidFill>
                   <a:srgbClr val="25342A"/>
                 </a:solidFill>
-                <a:latin typeface="Arial"/>
+                <a:latin typeface="Roboto"/>
               </a:rPr>
               <a:t>Donations cost 16¢ to raise each dollar this financial year to date ($9,800 of donor campaigns for $60,600), against 14¢ in the same period last year.</a:t>
             </a:r>
@@ -7730,7 +8245,11 @@
           <a:bodyPr rtlCol="0" anchor="ctr"/>
           <a:lstStyle/>
           <a:p>
-            <a:pPr algn="ctr"/>
+            <a:pPr algn="ctr">
+              <a:defRPr>
+                <a:latin typeface="Roboto"/>
+              </a:defRPr>
+            </a:pPr>
           </a:p>
         </p:txBody>
       </p:sp>
@@ -7756,12 +8275,17 @@
           </a:bodyPr>
           <a:lstStyle/>
           <a:p>
+            <a:pPr>
+              <a:defRPr>
+                <a:latin typeface="Roboto"/>
+              </a:defRPr>
+            </a:pPr>
             <a:r>
               <a:rPr sz="1100" b="1">
                 <a:solidFill>
                   <a:srgbClr val="5F6F63"/>
                 </a:solidFill>
-                <a:latin typeface="Arial"/>
+                <a:latin typeface="Roboto"/>
               </a:rPr>
               <a:t>WHAT YOU'D DO ABOUT IT</a:t>
             </a:r>
@@ -7790,12 +8314,17 @@
           </a:bodyPr>
           <a:lstStyle/>
           <a:p>
+            <a:pPr>
+              <a:defRPr>
+                <a:latin typeface="Roboto"/>
+              </a:defRPr>
+            </a:pPr>
             <a:r>
               <a:rPr sz="1600" b="0">
                 <a:solidFill>
                   <a:srgbClr val="25342A"/>
                 </a:solidFill>
-                <a:latin typeface="Arial"/>
+                <a:latin typeface="Roboto"/>
               </a:rPr>
               <a:t>Steady and cheap, and untied: the money that builds reserves.</a:t>
             </a:r>
@@ -7824,12 +8353,17 @@
           </a:bodyPr>
           <a:lstStyle/>
           <a:p>
+            <a:pPr>
+              <a:defRPr>
+                <a:latin typeface="Roboto"/>
+              </a:defRPr>
+            </a:pPr>
             <a:r>
               <a:rPr sz="900" b="0">
                 <a:solidFill>
                   <a:srgbClr val="5F6F63"/>
                 </a:solidFill>
-                <a:latin typeface="Arial"/>
+                <a:latin typeface="Roboto"/>
               </a:rPr>
               <a:t>cost-to-raise.pptx</a:t>
             </a:r>
@@ -7858,13 +8392,17 @@
           </a:bodyPr>
           <a:lstStyle/>
           <a:p>
-            <a:pPr algn="ctr"/>
+            <a:pPr algn="ctr">
+              <a:defRPr>
+                <a:latin typeface="Roboto"/>
+              </a:defRPr>
+            </a:pPr>
             <a:r>
               <a:rPr sz="900" b="0">
                 <a:solidFill>
                   <a:srgbClr val="5F6F63"/>
                 </a:solidFill>
-                <a:latin typeface="Arial"/>
+                <a:latin typeface="Roboto"/>
               </a:rPr>
               <a:t>Data retrieved 2pm, Tue 6 Oct 2026 · Sample data</a:t>
             </a:r>
@@ -7893,13 +8431,17 @@
           </a:bodyPr>
           <a:lstStyle/>
           <a:p>
-            <a:pPr algn="r"/>
+            <a:pPr algn="r">
+              <a:defRPr>
+                <a:latin typeface="Roboto"/>
+              </a:defRPr>
+            </a:pPr>
             <a:r>
               <a:rPr sz="900" b="0">
                 <a:solidFill>
                   <a:srgbClr val="5F6F63"/>
                 </a:solidFill>
-                <a:latin typeface="Arial"/>
+                <a:latin typeface="Roboto"/>
               </a:rPr>
               <a:t>Slide 8 of 11</a:t>
             </a:r>
@@ -7963,7 +8505,11 @@
           <a:bodyPr rtlCol="0" anchor="ctr"/>
           <a:lstStyle/>
           <a:p>
-            <a:pPr algn="ctr"/>
+            <a:pPr algn="ctr">
+              <a:defRPr>
+                <a:latin typeface="Roboto"/>
+              </a:defRPr>
+            </a:pPr>
           </a:p>
         </p:txBody>
       </p:sp>
@@ -7989,12 +8535,17 @@
           </a:bodyPr>
           <a:lstStyle/>
           <a:p>
+            <a:pPr>
+              <a:defRPr>
+                <a:latin typeface="Roboto"/>
+              </a:defRPr>
+            </a:pPr>
             <a:r>
               <a:rPr sz="1000" b="0">
                 <a:solidFill>
                   <a:srgbClr val="5F6F63"/>
                 </a:solidFill>
-                <a:latin typeface="Arial"/>
+                <a:latin typeface="Roboto"/>
               </a:rPr>
               <a:t>Sample Community Services Ltd · What does it cost to raise a dollar?</a:t>
             </a:r>
@@ -8023,12 +8574,17 @@
           </a:bodyPr>
           <a:lstStyle/>
           <a:p>
+            <a:pPr>
+              <a:defRPr>
+                <a:latin typeface="Roboto"/>
+              </a:defRPr>
+            </a:pPr>
             <a:r>
               <a:rPr sz="2400" b="1">
                 <a:solidFill>
                   <a:srgbClr val="25342A"/>
                 </a:solidFill>
-                <a:latin typeface="Arial"/>
+                <a:latin typeface="Roboto"/>
               </a:rPr>
               <a:t>Headline numbers · Source: Fundraising events</a:t>
             </a:r>
@@ -8076,7 +8632,11 @@
           <a:bodyPr rtlCol="0" anchor="ctr"/>
           <a:lstStyle/>
           <a:p>
-            <a:pPr algn="ctr"/>
+            <a:pPr algn="ctr">
+              <a:defRPr>
+                <a:latin typeface="Roboto"/>
+              </a:defRPr>
+            </a:pPr>
           </a:p>
         </p:txBody>
       </p:sp>
@@ -8102,12 +8662,17 @@
           </a:bodyPr>
           <a:lstStyle/>
           <a:p>
+            <a:pPr>
+              <a:defRPr>
+                <a:latin typeface="Roboto"/>
+              </a:defRPr>
+            </a:pPr>
             <a:r>
               <a:rPr sz="1200" b="0">
                 <a:solidFill>
                   <a:srgbClr val="5F6F63"/>
                 </a:solidFill>
-                <a:latin typeface="Arial"/>
+                <a:latin typeface="Roboto"/>
               </a:rPr>
               <a:t>September · Fundraising events</a:t>
             </a:r>
@@ -8136,12 +8701,17 @@
           </a:bodyPr>
           <a:lstStyle/>
           <a:p>
+            <a:pPr>
+              <a:defRPr>
+                <a:latin typeface="Roboto"/>
+              </a:defRPr>
+            </a:pPr>
             <a:r>
               <a:rPr sz="3000" b="1">
                 <a:solidFill>
                   <a:srgbClr val="2F7A5D"/>
                 </a:solidFill>
-                <a:latin typeface="Arial"/>
+                <a:latin typeface="Roboto"/>
               </a:rPr>
               <a:t>41¢</a:t>
             </a:r>
@@ -8170,12 +8740,17 @@
           </a:bodyPr>
           <a:lstStyle/>
           <a:p>
+            <a:pPr>
+              <a:defRPr>
+                <a:latin typeface="Roboto"/>
+              </a:defRPr>
+            </a:pPr>
             <a:r>
               <a:rPr sz="1100" b="0">
                 <a:solidFill>
                   <a:srgbClr val="5F6F63"/>
                 </a:solidFill>
-                <a:latin typeface="Arial"/>
+                <a:latin typeface="Roboto"/>
               </a:rPr>
               <a:t>August none raised</a:t>
             </a:r>
@@ -8223,7 +8798,11 @@
           <a:bodyPr rtlCol="0" anchor="ctr"/>
           <a:lstStyle/>
           <a:p>
-            <a:pPr algn="ctr"/>
+            <a:pPr algn="ctr">
+              <a:defRPr>
+                <a:latin typeface="Roboto"/>
+              </a:defRPr>
+            </a:pPr>
           </a:p>
         </p:txBody>
       </p:sp>
@@ -8249,12 +8828,17 @@
           </a:bodyPr>
           <a:lstStyle/>
           <a:p>
+            <a:pPr>
+              <a:defRPr>
+                <a:latin typeface="Roboto"/>
+              </a:defRPr>
+            </a:pPr>
             <a:r>
               <a:rPr sz="1200" b="0">
                 <a:solidFill>
                   <a:srgbClr val="5F6F63"/>
                 </a:solidFill>
-                <a:latin typeface="Arial"/>
+                <a:latin typeface="Roboto"/>
               </a:rPr>
               <a:t>Year to date (Jul to Sep 2026)</a:t>
             </a:r>
@@ -8283,12 +8867,17 @@
           </a:bodyPr>
           <a:lstStyle/>
           <a:p>
+            <a:pPr>
+              <a:defRPr>
+                <a:latin typeface="Roboto"/>
+              </a:defRPr>
+            </a:pPr>
             <a:r>
               <a:rPr sz="3000" b="1">
                 <a:solidFill>
                   <a:srgbClr val="2F7A5D"/>
                 </a:solidFill>
-                <a:latin typeface="Arial"/>
+                <a:latin typeface="Roboto"/>
               </a:rPr>
               <a:t>46¢</a:t>
             </a:r>
@@ -8317,12 +8906,17 @@
           </a:bodyPr>
           <a:lstStyle/>
           <a:p>
+            <a:pPr>
+              <a:defRPr>
+                <a:latin typeface="Roboto"/>
+              </a:defRPr>
+            </a:pPr>
             <a:r>
               <a:rPr sz="1100" b="0">
                 <a:solidFill>
                   <a:srgbClr val="5F6F63"/>
                 </a:solidFill>
-                <a:latin typeface="Arial"/>
+                <a:latin typeface="Roboto"/>
               </a:rPr>
               <a:t>same period last year: 41¢</a:t>
             </a:r>
@@ -8351,12 +8945,17 @@
           </a:bodyPr>
           <a:lstStyle/>
           <a:p>
+            <a:pPr>
+              <a:defRPr>
+                <a:latin typeface="Roboto"/>
+              </a:defRPr>
+            </a:pPr>
             <a:r>
               <a:rPr sz="900" b="0">
                 <a:solidFill>
                   <a:srgbClr val="5F6F63"/>
                 </a:solidFill>
-                <a:latin typeface="Arial"/>
+                <a:latin typeface="Roboto"/>
               </a:rPr>
               <a:t>cost-to-raise.pptx</a:t>
             </a:r>
@@ -8385,13 +8984,17 @@
           </a:bodyPr>
           <a:lstStyle/>
           <a:p>
-            <a:pPr algn="ctr"/>
+            <a:pPr algn="ctr">
+              <a:defRPr>
+                <a:latin typeface="Roboto"/>
+              </a:defRPr>
+            </a:pPr>
             <a:r>
               <a:rPr sz="900" b="0">
                 <a:solidFill>
                   <a:srgbClr val="5F6F63"/>
                 </a:solidFill>
-                <a:latin typeface="Arial"/>
+                <a:latin typeface="Roboto"/>
               </a:rPr>
               <a:t>Data retrieved 2pm, Tue 6 Oct 2026 · Sample data</a:t>
             </a:r>
@@ -8420,13 +9023,17 @@
           </a:bodyPr>
           <a:lstStyle/>
           <a:p>
-            <a:pPr algn="r"/>
+            <a:pPr algn="r">
+              <a:defRPr>
+                <a:latin typeface="Roboto"/>
+              </a:defRPr>
+            </a:pPr>
             <a:r>
               <a:rPr sz="900" b="0">
                 <a:solidFill>
                   <a:srgbClr val="5F6F63"/>
                 </a:solidFill>
-                <a:latin typeface="Arial"/>
+                <a:latin typeface="Roboto"/>
               </a:rPr>
               <a:t>Slide 9 of 11</a:t>
             </a:r>

--- a/media/exports/reports/2026-09/cost-to-raise.pptx
+++ b/media/exports/reports/2026-09/cost-to-raise.pptx
@@ -6,16 +6,10 @@
   </p:sldMasterIdLst>
   <p:sldIdLst>
     <p:sldId id="256" r:id="rId7"/>
-    <p:sldId id="257" r:id="rId8"/>
-    <p:sldId id="258" r:id="rId9"/>
-    <p:sldId id="259" r:id="rId10"/>
-    <p:sldId id="260" r:id="rId11"/>
-    <p:sldId id="261" r:id="rId12"/>
-    <p:sldId id="262" r:id="rId13"/>
-    <p:sldId id="263" r:id="rId14"/>
-    <p:sldId id="264" r:id="rId15"/>
-    <p:sldId id="265" r:id="rId16"/>
-    <p:sldId id="266" r:id="rId17"/>
+    <p:sldId id="257" r:id="rId9"/>
+    <p:sldId id="258" r:id="rId10"/>
+    <p:sldId id="259" r:id="rId11"/>
+    <p:sldId id="260" r:id="rId12"/>
   </p:sldIdLst>
   <p:sldSz cx="12191695" cy="6858000" type="screen4x3"/>
   <p:notesSz cx="6858000" cy="9144000"/>
@@ -121,8 +115,19 @@
 <c:chartSpace xmlns:c="http://schemas.openxmlformats.org/drawingml/2006/chart" xmlns:a="http://schemas.openxmlformats.org/drawingml/2006/main" xmlns:r="http://schemas.openxmlformats.org/officeDocument/2006/relationships">
   <c:date1904 val="0"/>
   <c:chart>
-    <c:autoTitleDeleted val="0"/>
+    <c:autoTitleDeleted val="1"/>
     <c:plotArea>
+      <c:layout>
+        <c:manualLayout>
+          <c:layoutTarget val="inner"/>
+          <c:xMode val="edge"/>
+          <c:yMode val="edge"/>
+          <c:x val="0.3"/>
+          <c:y val="0.03"/>
+          <c:w val="0.58"/>
+          <c:h val="0.88"/>
+        </c:manualLayout>
+      </c:layout>
       <c:barChart>
         <c:barDir val="bar"/>
         <c:grouping val="clustered"/>
@@ -135,7 +140,7 @@
               <c:strCache>
                 <c:ptCount val="1"/>
                 <c:pt idx="0">
-                  <c:v>Value</c:v>
+                  <c:v>Cost to raise a dollar</c:v>
                 </c:pt>
               </c:strCache>
             </c:strRef>
@@ -207,7 +212,7 @@
             <a:lstStyle/>
             <a:p>
               <a:pPr>
-                <a:defRPr sz="1100"/>
+                <a:defRPr sz="1000"/>
               </a:pPr>
             </a:p>
           </c:txPr>
@@ -244,7 +249,7 @@
           <a:lstStyle/>
           <a:p>
             <a:pPr>
-              <a:defRPr sz="1200"/>
+              <a:defRPr sz="1100"/>
             </a:pPr>
           </a:p>
         </c:txPr>
@@ -257,7 +262,10 @@
       </c:catAx>
       <c:valAx>
         <c:axId val="-2113994440"/>
-        <c:scaling/>
+        <c:scaling>
+          <c:max val="47.15"/>
+          <c:min val="0.0"/>
+        </c:scaling>
         <c:delete/>
         <c:axPos val="b"/>
         <c:majorTickMark val="out"/>
@@ -292,9 +300,19 @@
   <c:date1904 val="0"/>
   <c:roundedCorners val="0"/>
   <c:chart>
-    <c:autoTitleDeleted val="0"/>
+    <c:autoTitleDeleted val="1"/>
     <c:plotArea>
-      <c:layout/>
+      <c:layout>
+        <c:manualLayout>
+          <c:layoutTarget val="inner"/>
+          <c:xMode val="edge"/>
+          <c:yMode val="edge"/>
+          <c:x val="0.11"/>
+          <c:y val="0.05"/>
+          <c:w val="0.86"/>
+          <c:h val="0.8"/>
+        </c:manualLayout>
+      </c:layout>
       <c:areaChart>
         <c:grouping val="standard"/>
         <c:varyColors val="0"/>
@@ -307,7 +325,7 @@
               <c:strCache>
                 <c:ptCount val="1"/>
                 <c:pt idx="0">
-                  <c:v>Value</c:v>
+                  <c:v>Cents per $1</c:v>
                 </c:pt>
               </c:strCache>
             </c:strRef>
@@ -411,16 +429,16 @@
                 <c:formatCode>0"¢";[Red](0"¢")</c:formatCode>
                 <c:ptCount val="24"/>
                 <c:pt idx="0">
-                  <c:v>21</c:v>
+                  <c:v>24</c:v>
                 </c:pt>
                 <c:pt idx="1">
-                  <c:v>19</c:v>
+                  <c:v>20</c:v>
                 </c:pt>
                 <c:pt idx="2">
                   <c:v>22</c:v>
                 </c:pt>
                 <c:pt idx="3">
-                  <c:v>12</c:v>
+                  <c:v>10</c:v>
                 </c:pt>
                 <c:pt idx="4">
                   <c:v>11</c:v>
@@ -435,28 +453,28 @@
                   <c:v>11</c:v>
                 </c:pt>
                 <c:pt idx="8">
-                  <c:v>13</c:v>
+                  <c:v>12</c:v>
                 </c:pt>
                 <c:pt idx="9">
-                  <c:v>13</c:v>
+                  <c:v>12</c:v>
                 </c:pt>
                 <c:pt idx="10">
                   <c:v>12</c:v>
                 </c:pt>
                 <c:pt idx="11">
-                  <c:v>21</c:v>
+                  <c:v>11</c:v>
                 </c:pt>
                 <c:pt idx="12">
-                  <c:v>11</c:v>
+                  <c:v>10</c:v>
                 </c:pt>
                 <c:pt idx="13">
-                  <c:v>11</c:v>
+                  <c:v>10</c:v>
                 </c:pt>
                 <c:pt idx="14">
-                  <c:v>14</c:v>
+                  <c:v>10</c:v>
                 </c:pt>
                 <c:pt idx="15">
-                  <c:v>13</c:v>
+                  <c:v>12</c:v>
                 </c:pt>
                 <c:pt idx="16">
                   <c:v>13</c:v>
@@ -471,16 +489,16 @@
                   <c:v>10</c:v>
                 </c:pt>
                 <c:pt idx="20">
-                  <c:v>11</c:v>
+                  <c:v>10</c:v>
                 </c:pt>
                 <c:pt idx="21">
-                  <c:v>11</c:v>
+                  <c:v>10</c:v>
                 </c:pt>
                 <c:pt idx="22">
-                  <c:v>13</c:v>
+                  <c:v>10</c:v>
                 </c:pt>
                 <c:pt idx="23">
-                  <c:v>20</c:v>
+                  <c:v>9</c:v>
                 </c:pt>
               </c:numCache>
             </c:numRef>
@@ -522,12 +540,15 @@
         <c:auto val="1"/>
         <c:lblAlgn val="ctr"/>
         <c:lblOffset val="100"/>
+        <c:tickLblSkip val="3"/>
         <c:noMultiLvlLbl val="0"/>
       </c:catAx>
       <c:valAx>
         <c:axId val="-2100718248"/>
         <c:scaling>
           <c:orientation val="minMax"/>
+          <c:max val="25.0"/>
+          <c:min val="0.0"/>
         </c:scaling>
         <c:delete val="0"/>
         <c:axPos val="l"/>
@@ -561,6 +582,7 @@
         <c:crossAx val="-2101159928"/>
         <c:crosses val="autoZero"/>
         <c:crossBetween val="midCat"/>
+        <c:majorUnit val="5.0"/>
       </c:valAx>
     </c:plotArea>
     <c:plotVisOnly val="1"/>
@@ -583,6 +605,1210 @@
     <c:autoUpdate val="0"/>
   </c:externalData>
 </c:chartSpace>
+</file>
+
+<file path=ppt/charts/chart3.xml><?xml version="1.0" encoding="utf-8"?>
+<c:chartSpace xmlns:c="http://schemas.openxmlformats.org/drawingml/2006/chart" xmlns:a="http://schemas.openxmlformats.org/drawingml/2006/main" xmlns:r="http://schemas.openxmlformats.org/officeDocument/2006/relationships">
+  <c:date1904 val="0"/>
+  <c:roundedCorners val="0"/>
+  <c:chart>
+    <c:autoTitleDeleted val="1"/>
+    <c:plotArea>
+      <c:layout>
+        <c:manualLayout>
+          <c:layoutTarget val="inner"/>
+          <c:xMode val="edge"/>
+          <c:yMode val="edge"/>
+          <c:x val="0.11"/>
+          <c:y val="0.05"/>
+          <c:w val="0.86"/>
+          <c:h val="0.8"/>
+        </c:manualLayout>
+      </c:layout>
+      <c:areaChart>
+        <c:grouping val="standard"/>
+        <c:varyColors val="0"/>
+        <c:ser>
+          <c:idx val="0"/>
+          <c:order val="0"/>
+          <c:tx>
+            <c:strRef>
+              <c:f>Sheet1!$B$1</c:f>
+              <c:strCache>
+                <c:ptCount val="1"/>
+                <c:pt idx="0">
+                  <c:v>Cents per $1</c:v>
+                </c:pt>
+              </c:strCache>
+            </c:strRef>
+          </c:tx>
+          <c:spPr>
+            <a:solidFill>
+              <a:srgbClr val="0E9F6E">
+                <a:alpha val="25000"/>
+              </a:srgbClr>
+            </a:solidFill>
+            <a:ln w="31750">
+              <a:solidFill>
+                <a:srgbClr val="0E9F6E"/>
+              </a:solidFill>
+            </a:ln>
+          </c:spPr>
+          <c:cat>
+            <c:strRef>
+              <c:f>Sheet1!$A$2:$A$25</c:f>
+              <c:strCache>
+                <c:ptCount val="24"/>
+                <c:pt idx="0">
+                  <c:v>Oct 24</c:v>
+                </c:pt>
+                <c:pt idx="1">
+                  <c:v>Nov 24</c:v>
+                </c:pt>
+                <c:pt idx="2">
+                  <c:v>Dec 24</c:v>
+                </c:pt>
+                <c:pt idx="3">
+                  <c:v>Jan 25</c:v>
+                </c:pt>
+                <c:pt idx="4">
+                  <c:v>Feb 25</c:v>
+                </c:pt>
+                <c:pt idx="5">
+                  <c:v>Mar 25</c:v>
+                </c:pt>
+                <c:pt idx="6">
+                  <c:v>Apr 25</c:v>
+                </c:pt>
+                <c:pt idx="7">
+                  <c:v>May 25</c:v>
+                </c:pt>
+                <c:pt idx="8">
+                  <c:v>Jun 25</c:v>
+                </c:pt>
+                <c:pt idx="9">
+                  <c:v>Jul 25</c:v>
+                </c:pt>
+                <c:pt idx="10">
+                  <c:v>Aug 25</c:v>
+                </c:pt>
+                <c:pt idx="11">
+                  <c:v>Sep 25</c:v>
+                </c:pt>
+                <c:pt idx="12">
+                  <c:v>Oct 25</c:v>
+                </c:pt>
+                <c:pt idx="13">
+                  <c:v>Nov 25</c:v>
+                </c:pt>
+                <c:pt idx="14">
+                  <c:v>Dec 25</c:v>
+                </c:pt>
+                <c:pt idx="15">
+                  <c:v>Jan 26</c:v>
+                </c:pt>
+                <c:pt idx="16">
+                  <c:v>Feb 26</c:v>
+                </c:pt>
+                <c:pt idx="17">
+                  <c:v>Mar 26</c:v>
+                </c:pt>
+                <c:pt idx="18">
+                  <c:v>Apr 26</c:v>
+                </c:pt>
+                <c:pt idx="19">
+                  <c:v>May 26</c:v>
+                </c:pt>
+                <c:pt idx="20">
+                  <c:v>Jun 26</c:v>
+                </c:pt>
+                <c:pt idx="21">
+                  <c:v>Jul 26</c:v>
+                </c:pt>
+                <c:pt idx="22">
+                  <c:v>Aug 26</c:v>
+                </c:pt>
+                <c:pt idx="23">
+                  <c:v>Sep 26</c:v>
+                </c:pt>
+              </c:strCache>
+            </c:strRef>
+          </c:cat>
+          <c:val>
+            <c:numRef>
+              <c:f>Sheet1!$B$2:$B$25</c:f>
+              <c:numCache>
+                <c:formatCode>0"¢";[Red](0"¢")</c:formatCode>
+                <c:ptCount val="24"/>
+                <c:pt idx="0">
+                  <c:v>14</c:v>
+                </c:pt>
+                <c:pt idx="1">
+                  <c:v>18</c:v>
+                </c:pt>
+                <c:pt idx="2">
+                  <c:v>18</c:v>
+                </c:pt>
+                <c:pt idx="3">
+                  <c:v>18</c:v>
+                </c:pt>
+                <c:pt idx="4">
+                  <c:v>14</c:v>
+                </c:pt>
+                <c:pt idx="5">
+                  <c:v>14</c:v>
+                </c:pt>
+                <c:pt idx="6">
+                  <c:v>14</c:v>
+                </c:pt>
+                <c:pt idx="7">
+                  <c:v>14</c:v>
+                </c:pt>
+                <c:pt idx="8">
+                  <c:v>14</c:v>
+                </c:pt>
+                <c:pt idx="9">
+                  <c:v>16</c:v>
+                </c:pt>
+                <c:pt idx="10">
+                  <c:v>14</c:v>
+                </c:pt>
+                <c:pt idx="11">
+                  <c:v>14</c:v>
+                </c:pt>
+                <c:pt idx="12">
+                  <c:v>14</c:v>
+                </c:pt>
+                <c:pt idx="13">
+                  <c:v>17</c:v>
+                </c:pt>
+                <c:pt idx="14">
+                  <c:v>17</c:v>
+                </c:pt>
+                <c:pt idx="15">
+                  <c:v>17</c:v>
+                </c:pt>
+                <c:pt idx="16">
+                  <c:v>13</c:v>
+                </c:pt>
+                <c:pt idx="17">
+                  <c:v>13</c:v>
+                </c:pt>
+                <c:pt idx="18">
+                  <c:v>13</c:v>
+                </c:pt>
+                <c:pt idx="19">
+                  <c:v>13</c:v>
+                </c:pt>
+                <c:pt idx="20">
+                  <c:v>14</c:v>
+                </c:pt>
+                <c:pt idx="21">
+                  <c:v>15</c:v>
+                </c:pt>
+                <c:pt idx="22">
+                  <c:v>12</c:v>
+                </c:pt>
+                <c:pt idx="23">
+                  <c:v>19</c:v>
+                </c:pt>
+              </c:numCache>
+            </c:numRef>
+          </c:val>
+        </c:ser>
+        <c:dLbls>
+          <c:showLegendKey val="0"/>
+          <c:showVal val="0"/>
+          <c:showCatName val="0"/>
+          <c:showSerName val="0"/>
+          <c:showPercent val="0"/>
+          <c:showBubbleSize val="0"/>
+        </c:dLbls>
+        <c:axId val="-2101159928"/>
+        <c:axId val="-2100718248"/>
+      </c:areaChart>
+      <c:catAx>
+        <c:axId val="-2101159928"/>
+        <c:scaling>
+          <c:orientation val="minMax"/>
+        </c:scaling>
+        <c:delete val="0"/>
+        <c:axPos val="b"/>
+        <c:numFmt formatCode="General" sourceLinked="1"/>
+        <c:majorTickMark val="out"/>
+        <c:minorTickMark val="none"/>
+        <c:tickLblPos val="nextTo"/>
+        <c:txPr>
+          <a:bodyPr/>
+          <a:lstStyle/>
+          <a:p>
+            <a:pPr>
+              <a:defRPr sz="1000"/>
+            </a:pPr>
+          </a:p>
+        </c:txPr>
+        <c:crossAx val="-2100718248"/>
+        <c:crosses val="autoZero"/>
+        <c:auto val="1"/>
+        <c:lblAlgn val="ctr"/>
+        <c:lblOffset val="100"/>
+        <c:tickLblSkip val="3"/>
+        <c:noMultiLvlLbl val="0"/>
+      </c:catAx>
+      <c:valAx>
+        <c:axId val="-2100718248"/>
+        <c:scaling>
+          <c:orientation val="minMax"/>
+          <c:max val="20.0"/>
+          <c:min val="0.0"/>
+        </c:scaling>
+        <c:delete val="0"/>
+        <c:axPos val="l"/>
+        <c:majorGridlines>
+          <c:spPr>
+            <a:ln>
+              <a:solidFill>
+                <a:srgbClr val="E6EAE7"/>
+              </a:solidFill>
+            </a:ln>
+          </c:spPr>
+        </c:majorGridlines>
+        <c:numFmt formatCode="0&quot;¢&quot;;[Red](0&quot;¢&quot;)" sourceLinked="0"/>
+        <c:majorTickMark val="out"/>
+        <c:minorTickMark val="none"/>
+        <c:tickLblPos val="nextTo"/>
+        <c:spPr>
+          <a:ln>
+            <a:noFill/>
+          </a:ln>
+        </c:spPr>
+        <c:txPr>
+          <a:bodyPr/>
+          <a:lstStyle/>
+          <a:p>
+            <a:pPr>
+              <a:defRPr sz="1000"/>
+            </a:pPr>
+          </a:p>
+        </c:txPr>
+        <c:crossAx val="-2101159928"/>
+        <c:crosses val="autoZero"/>
+        <c:crossBetween val="midCat"/>
+        <c:majorUnit val="5.0"/>
+      </c:valAx>
+    </c:plotArea>
+    <c:plotVisOnly val="1"/>
+    <c:dispBlanksAs val="zero"/>
+    <c:showDLblsOverMax val="0"/>
+  </c:chart>
+  <c:txPr>
+    <a:bodyPr/>
+    <a:lstStyle/>
+    <a:p>
+      <a:pPr>
+        <a:defRPr sz="1800">
+          <a:latin typeface="Roboto"/>
+        </a:defRPr>
+      </a:pPr>
+      <a:endParaRPr/>
+    </a:p>
+  </c:txPr>
+  <c:externalData r:id="rId1">
+    <c:autoUpdate val="0"/>
+  </c:externalData>
+</c:chartSpace>
+</file>
+
+<file path=ppt/charts/chart4.xml><?xml version="1.0" encoding="utf-8"?>
+<c:chartSpace xmlns:c="http://schemas.openxmlformats.org/drawingml/2006/chart" xmlns:a="http://schemas.openxmlformats.org/drawingml/2006/main" xmlns:r="http://schemas.openxmlformats.org/officeDocument/2006/relationships">
+  <c:date1904 val="0"/>
+  <c:roundedCorners val="0"/>
+  <c:chart>
+    <c:autoTitleDeleted val="1"/>
+    <c:plotArea>
+      <c:layout>
+        <c:manualLayout>
+          <c:layoutTarget val="inner"/>
+          <c:xMode val="edge"/>
+          <c:yMode val="edge"/>
+          <c:x val="0.11"/>
+          <c:y val="0.05"/>
+          <c:w val="0.86"/>
+          <c:h val="0.8"/>
+        </c:manualLayout>
+      </c:layout>
+      <c:areaChart>
+        <c:grouping val="standard"/>
+        <c:varyColors val="0"/>
+        <c:ser>
+          <c:idx val="0"/>
+          <c:order val="0"/>
+          <c:tx>
+            <c:strRef>
+              <c:f>Sheet1!$B$1</c:f>
+              <c:strCache>
+                <c:ptCount val="1"/>
+                <c:pt idx="0">
+                  <c:v>Cents per $1</c:v>
+                </c:pt>
+              </c:strCache>
+            </c:strRef>
+          </c:tx>
+          <c:spPr>
+            <a:solidFill>
+              <a:srgbClr val="0E9F6E">
+                <a:alpha val="25000"/>
+              </a:srgbClr>
+            </a:solidFill>
+            <a:ln w="31750">
+              <a:solidFill>
+                <a:srgbClr val="0E9F6E"/>
+              </a:solidFill>
+            </a:ln>
+          </c:spPr>
+          <c:cat>
+            <c:strRef>
+              <c:f>Sheet1!$A$2:$A$5</c:f>
+              <c:strCache>
+                <c:ptCount val="4"/>
+                <c:pt idx="0">
+                  <c:v>Dec 24</c:v>
+                </c:pt>
+                <c:pt idx="1">
+                  <c:v>Sep 25</c:v>
+                </c:pt>
+                <c:pt idx="2">
+                  <c:v>Dec 25</c:v>
+                </c:pt>
+                <c:pt idx="3">
+                  <c:v>Sep 26</c:v>
+                </c:pt>
+              </c:strCache>
+            </c:strRef>
+          </c:cat>
+          <c:val>
+            <c:numRef>
+              <c:f>Sheet1!$B$2:$B$5</c:f>
+              <c:numCache>
+                <c:formatCode>0"¢";[Red](0"¢")</c:formatCode>
+                <c:ptCount val="4"/>
+                <c:pt idx="0">
+                  <c:v>42</c:v>
+                </c:pt>
+                <c:pt idx="1">
+                  <c:v>41</c:v>
+                </c:pt>
+                <c:pt idx="2">
+                  <c:v>42</c:v>
+                </c:pt>
+                <c:pt idx="3">
+                  <c:v>41</c:v>
+                </c:pt>
+              </c:numCache>
+            </c:numRef>
+          </c:val>
+        </c:ser>
+        <c:dLbls>
+          <c:showLegendKey val="0"/>
+          <c:showVal val="0"/>
+          <c:showCatName val="0"/>
+          <c:showSerName val="0"/>
+          <c:showPercent val="0"/>
+          <c:showBubbleSize val="0"/>
+        </c:dLbls>
+        <c:axId val="-2101159928"/>
+        <c:axId val="-2100718248"/>
+      </c:areaChart>
+      <c:catAx>
+        <c:axId val="-2101159928"/>
+        <c:scaling>
+          <c:orientation val="minMax"/>
+        </c:scaling>
+        <c:delete val="0"/>
+        <c:axPos val="b"/>
+        <c:numFmt formatCode="General" sourceLinked="1"/>
+        <c:majorTickMark val="out"/>
+        <c:minorTickMark val="none"/>
+        <c:tickLblPos val="nextTo"/>
+        <c:txPr>
+          <a:bodyPr/>
+          <a:lstStyle/>
+          <a:p>
+            <a:pPr>
+              <a:defRPr sz="1000"/>
+            </a:pPr>
+          </a:p>
+        </c:txPr>
+        <c:crossAx val="-2100718248"/>
+        <c:crosses val="autoZero"/>
+        <c:auto val="1"/>
+        <c:lblAlgn val="ctr"/>
+        <c:lblOffset val="100"/>
+        <c:tickLblSkip val="1"/>
+        <c:noMultiLvlLbl val="0"/>
+      </c:catAx>
+      <c:valAx>
+        <c:axId val="-2100718248"/>
+        <c:scaling>
+          <c:orientation val="minMax"/>
+          <c:max val="50.0"/>
+          <c:min val="0.0"/>
+        </c:scaling>
+        <c:delete val="0"/>
+        <c:axPos val="l"/>
+        <c:majorGridlines>
+          <c:spPr>
+            <a:ln>
+              <a:solidFill>
+                <a:srgbClr val="E6EAE7"/>
+              </a:solidFill>
+            </a:ln>
+          </c:spPr>
+        </c:majorGridlines>
+        <c:numFmt formatCode="0&quot;¢&quot;;[Red](0&quot;¢&quot;)" sourceLinked="0"/>
+        <c:majorTickMark val="out"/>
+        <c:minorTickMark val="none"/>
+        <c:tickLblPos val="nextTo"/>
+        <c:spPr>
+          <a:ln>
+            <a:noFill/>
+          </a:ln>
+        </c:spPr>
+        <c:txPr>
+          <a:bodyPr/>
+          <a:lstStyle/>
+          <a:p>
+            <a:pPr>
+              <a:defRPr sz="1000"/>
+            </a:pPr>
+          </a:p>
+        </c:txPr>
+        <c:crossAx val="-2101159928"/>
+        <c:crosses val="autoZero"/>
+        <c:crossBetween val="midCat"/>
+        <c:majorUnit val="10.0"/>
+      </c:valAx>
+    </c:plotArea>
+    <c:plotVisOnly val="1"/>
+    <c:dispBlanksAs val="zero"/>
+    <c:showDLblsOverMax val="0"/>
+  </c:chart>
+  <c:txPr>
+    <a:bodyPr/>
+    <a:lstStyle/>
+    <a:p>
+      <a:pPr>
+        <a:defRPr sz="1800">
+          <a:latin typeface="Roboto"/>
+        </a:defRPr>
+      </a:pPr>
+      <a:endParaRPr/>
+    </a:p>
+  </c:txPr>
+  <c:externalData r:id="rId1">
+    <c:autoUpdate val="0"/>
+  </c:externalData>
+</c:chartSpace>
+</file>
+
+<file path=ppt/notesMasters/notesMaster1.xml><?xml version="1.0" encoding="utf-8"?>
+<p:notesMaster xmlns:a="http://schemas.openxmlformats.org/drawingml/2006/main" xmlns:p="http://schemas.openxmlformats.org/presentationml/2006/main" xmlns:r="http://schemas.openxmlformats.org/officeDocument/2006/relationships">
+  <p:cSld>
+    <p:bg>
+      <p:bgRef idx="1001">
+        <a:schemeClr val="bg1"/>
+      </p:bgRef>
+    </p:bg>
+    <p:spTree>
+      <p:nvGrpSpPr>
+        <p:cNvPr id="1" name=""/>
+        <p:cNvGrpSpPr/>
+        <p:nvPr/>
+      </p:nvGrpSpPr>
+      <p:grpSpPr>
+        <a:xfrm>
+          <a:off x="0" y="0"/>
+          <a:ext cx="0" cy="0"/>
+          <a:chOff x="0" y="0"/>
+          <a:chExt cx="0" cy="0"/>
+        </a:xfrm>
+      </p:grpSpPr>
+      <p:sp>
+        <p:nvSpPr>
+          <p:cNvPr id="2" name="Header Placeholder 1"/>
+          <p:cNvSpPr>
+            <a:spLocks noGrp="1"/>
+          </p:cNvSpPr>
+          <p:nvPr>
+            <p:ph type="hdr" sz="quarter"/>
+          </p:nvPr>
+        </p:nvSpPr>
+        <p:spPr>
+          <a:xfrm>
+            <a:off x="0" y="0"/>
+            <a:ext cx="2971800" cy="457200"/>
+          </a:xfrm>
+          <a:prstGeom prst="rect">
+            <a:avLst/>
+          </a:prstGeom>
+        </p:spPr>
+        <p:txBody>
+          <a:bodyPr vert="horz" lIns="91440" tIns="45720" rIns="91440" bIns="45720" rtlCol="0"/>
+          <a:lstStyle>
+            <a:lvl1pPr algn="l">
+              <a:defRPr sz="1200"/>
+            </a:lvl1pPr>
+          </a:lstStyle>
+          <a:p>
+            <a:endParaRPr lang="en-US"/>
+          </a:p>
+        </p:txBody>
+      </p:sp>
+      <p:sp>
+        <p:nvSpPr>
+          <p:cNvPr id="3" name="Date Placeholder 2"/>
+          <p:cNvSpPr>
+            <a:spLocks noGrp="1"/>
+          </p:cNvSpPr>
+          <p:nvPr>
+            <p:ph type="dt" idx="1"/>
+          </p:nvPr>
+        </p:nvSpPr>
+        <p:spPr>
+          <a:xfrm>
+            <a:off x="3884613" y="0"/>
+            <a:ext cx="2971800" cy="457200"/>
+          </a:xfrm>
+          <a:prstGeom prst="rect">
+            <a:avLst/>
+          </a:prstGeom>
+        </p:spPr>
+        <p:txBody>
+          <a:bodyPr vert="horz" lIns="91440" tIns="45720" rIns="91440" bIns="45720" rtlCol="0"/>
+          <a:lstStyle>
+            <a:lvl1pPr algn="r">
+              <a:defRPr sz="1200"/>
+            </a:lvl1pPr>
+          </a:lstStyle>
+          <a:p>
+            <a:fld id="{0F89C1C7-3DCD-1040-A9CF-14679D8B5DDD}" type="datetimeFigureOut">
+              <a:rPr lang="en-US" smtClean="0"/>
+              <a:t>10/17/16</a:t>
+            </a:fld>
+            <a:endParaRPr lang="en-US"/>
+          </a:p>
+        </p:txBody>
+      </p:sp>
+      <p:sp>
+        <p:nvSpPr>
+          <p:cNvPr id="4" name="Slide Image Placeholder 3"/>
+          <p:cNvSpPr>
+            <a:spLocks noGrp="1" noRot="1" noChangeAspect="1"/>
+          </p:cNvSpPr>
+          <p:nvPr>
+            <p:ph type="sldImg" idx="2"/>
+          </p:nvPr>
+        </p:nvSpPr>
+        <p:spPr>
+          <a:xfrm>
+            <a:off x="1143000" y="685800"/>
+            <a:ext cx="4572000" cy="3429000"/>
+          </a:xfrm>
+          <a:prstGeom prst="rect">
+            <a:avLst/>
+          </a:prstGeom>
+          <a:noFill/>
+          <a:ln w="12700">
+            <a:solidFill>
+              <a:prstClr val="black"/>
+            </a:solidFill>
+          </a:ln>
+        </p:spPr>
+        <p:txBody>
+          <a:bodyPr vert="horz" lIns="91440" tIns="45720" rIns="91440" bIns="45720" rtlCol="0" anchor="ctr"/>
+          <a:lstStyle/>
+          <a:p>
+            <a:endParaRPr lang="en-US"/>
+          </a:p>
+        </p:txBody>
+      </p:sp>
+      <p:sp>
+        <p:nvSpPr>
+          <p:cNvPr id="5" name="Notes Placeholder 4"/>
+          <p:cNvSpPr>
+            <a:spLocks noGrp="1"/>
+          </p:cNvSpPr>
+          <p:nvPr>
+            <p:ph type="body" sz="quarter" idx="3"/>
+          </p:nvPr>
+        </p:nvSpPr>
+        <p:spPr>
+          <a:xfrm>
+            <a:off x="685800" y="4343400"/>
+            <a:ext cx="5486400" cy="4114800"/>
+          </a:xfrm>
+          <a:prstGeom prst="rect">
+            <a:avLst/>
+          </a:prstGeom>
+        </p:spPr>
+        <p:txBody>
+          <a:bodyPr vert="horz" lIns="91440" tIns="45720" rIns="91440" bIns="45720" rtlCol="0"/>
+          <a:lstStyle/>
+          <a:p>
+            <a:pPr lvl="0"/>
+            <a:r>
+              <a:rPr lang="en-US" smtClean="0"/>
+              <a:t>Click to edit Master text styles</a:t>
+            </a:r>
+          </a:p>
+          <a:p>
+            <a:pPr lvl="1"/>
+            <a:r>
+              <a:rPr lang="en-US" smtClean="0"/>
+              <a:t>Second level</a:t>
+            </a:r>
+          </a:p>
+          <a:p>
+            <a:pPr lvl="2"/>
+            <a:r>
+              <a:rPr lang="en-US" smtClean="0"/>
+              <a:t>Third level</a:t>
+            </a:r>
+          </a:p>
+          <a:p>
+            <a:pPr lvl="3"/>
+            <a:r>
+              <a:rPr lang="en-US" smtClean="0"/>
+              <a:t>Fourth level</a:t>
+            </a:r>
+          </a:p>
+          <a:p>
+            <a:pPr lvl="4"/>
+            <a:r>
+              <a:rPr lang="en-US" smtClean="0"/>
+              <a:t>Fifth level</a:t>
+            </a:r>
+            <a:endParaRPr lang="en-US"/>
+          </a:p>
+        </p:txBody>
+      </p:sp>
+      <p:sp>
+        <p:nvSpPr>
+          <p:cNvPr id="6" name="Footer Placeholder 5"/>
+          <p:cNvSpPr>
+            <a:spLocks noGrp="1"/>
+          </p:cNvSpPr>
+          <p:nvPr>
+            <p:ph type="ftr" sz="quarter" idx="4"/>
+          </p:nvPr>
+        </p:nvSpPr>
+        <p:spPr>
+          <a:xfrm>
+            <a:off x="0" y="8685213"/>
+            <a:ext cx="2971800" cy="457200"/>
+          </a:xfrm>
+          <a:prstGeom prst="rect">
+            <a:avLst/>
+          </a:prstGeom>
+        </p:spPr>
+        <p:txBody>
+          <a:bodyPr vert="horz" lIns="91440" tIns="45720" rIns="91440" bIns="45720" rtlCol="0" anchor="b"/>
+          <a:lstStyle>
+            <a:lvl1pPr algn="l">
+              <a:defRPr sz="1200"/>
+            </a:lvl1pPr>
+          </a:lstStyle>
+          <a:p>
+            <a:endParaRPr lang="en-US"/>
+          </a:p>
+        </p:txBody>
+      </p:sp>
+      <p:sp>
+        <p:nvSpPr>
+          <p:cNvPr id="7" name="Slide Number Placeholder 6"/>
+          <p:cNvSpPr>
+            <a:spLocks noGrp="1"/>
+          </p:cNvSpPr>
+          <p:nvPr>
+            <p:ph type="sldNum" sz="quarter" idx="5"/>
+          </p:nvPr>
+        </p:nvSpPr>
+        <p:spPr>
+          <a:xfrm>
+            <a:off x="3884613" y="8685213"/>
+            <a:ext cx="2971800" cy="457200"/>
+          </a:xfrm>
+          <a:prstGeom prst="rect">
+            <a:avLst/>
+          </a:prstGeom>
+        </p:spPr>
+        <p:txBody>
+          <a:bodyPr vert="horz" lIns="91440" tIns="45720" rIns="91440" bIns="45720" rtlCol="0" anchor="b"/>
+          <a:lstStyle>
+            <a:lvl1pPr algn="r">
+              <a:defRPr sz="1200"/>
+            </a:lvl1pPr>
+          </a:lstStyle>
+          <a:p>
+            <a:fld id="{BB5E49A5-4136-284D-997B-48E1D791AD67}" type="slidenum">
+              <a:rPr lang="en-US" smtClean="0"/>
+              <a:t>‹#›</a:t>
+            </a:fld>
+            <a:endParaRPr lang="en-US"/>
+          </a:p>
+        </p:txBody>
+      </p:sp>
+    </p:spTree>
+    <p:extLst>
+      <p:ext uri="{BB962C8B-B14F-4D97-AF65-F5344CB8AC3E}">
+        <p14:creationId xmlns:p14="http://schemas.microsoft.com/office/powerpoint/2010/main" val="2623252185"/>
+      </p:ext>
+    </p:extLst>
+  </p:cSld>
+  <p:clrMap bg1="lt1" tx1="dk1" bg2="lt2" tx2="dk2" accent1="accent1" accent2="accent2" accent3="accent3" accent4="accent4" accent5="accent5" accent6="accent6" hlink="hlink" folHlink="folHlink"/>
+  <p:notesStyle>
+    <a:lvl1pPr marL="0" algn="l" defTabSz="457200" rtl="0" eaLnBrk="1" latinLnBrk="0" hangingPunct="1">
+      <a:defRPr sz="1200" kern="1200">
+        <a:solidFill>
+          <a:schemeClr val="tx1"/>
+        </a:solidFill>
+        <a:latin typeface="+mn-lt"/>
+        <a:ea typeface="+mn-ea"/>
+        <a:cs typeface="+mn-cs"/>
+      </a:defRPr>
+    </a:lvl1pPr>
+    <a:lvl2pPr marL="457200" algn="l" defTabSz="457200" rtl="0" eaLnBrk="1" latinLnBrk="0" hangingPunct="1">
+      <a:defRPr sz="1200" kern="1200">
+        <a:solidFill>
+          <a:schemeClr val="tx1"/>
+        </a:solidFill>
+        <a:latin typeface="+mn-lt"/>
+        <a:ea typeface="+mn-ea"/>
+        <a:cs typeface="+mn-cs"/>
+      </a:defRPr>
+    </a:lvl2pPr>
+    <a:lvl3pPr marL="914400" algn="l" defTabSz="457200" rtl="0" eaLnBrk="1" latinLnBrk="0" hangingPunct="1">
+      <a:defRPr sz="1200" kern="1200">
+        <a:solidFill>
+          <a:schemeClr val="tx1"/>
+        </a:solidFill>
+        <a:latin typeface="+mn-lt"/>
+        <a:ea typeface="+mn-ea"/>
+        <a:cs typeface="+mn-cs"/>
+      </a:defRPr>
+    </a:lvl3pPr>
+    <a:lvl4pPr marL="1371600" algn="l" defTabSz="457200" rtl="0" eaLnBrk="1" latinLnBrk="0" hangingPunct="1">
+      <a:defRPr sz="1200" kern="1200">
+        <a:solidFill>
+          <a:schemeClr val="tx1"/>
+        </a:solidFill>
+        <a:latin typeface="+mn-lt"/>
+        <a:ea typeface="+mn-ea"/>
+        <a:cs typeface="+mn-cs"/>
+      </a:defRPr>
+    </a:lvl4pPr>
+    <a:lvl5pPr marL="1828800" algn="l" defTabSz="457200" rtl="0" eaLnBrk="1" latinLnBrk="0" hangingPunct="1">
+      <a:defRPr sz="1200" kern="1200">
+        <a:solidFill>
+          <a:schemeClr val="tx1"/>
+        </a:solidFill>
+        <a:latin typeface="+mn-lt"/>
+        <a:ea typeface="+mn-ea"/>
+        <a:cs typeface="+mn-cs"/>
+      </a:defRPr>
+    </a:lvl5pPr>
+    <a:lvl6pPr marL="2286000" algn="l" defTabSz="457200" rtl="0" eaLnBrk="1" latinLnBrk="0" hangingPunct="1">
+      <a:defRPr sz="1200" kern="1200">
+        <a:solidFill>
+          <a:schemeClr val="tx1"/>
+        </a:solidFill>
+        <a:latin typeface="+mn-lt"/>
+        <a:ea typeface="+mn-ea"/>
+        <a:cs typeface="+mn-cs"/>
+      </a:defRPr>
+    </a:lvl6pPr>
+    <a:lvl7pPr marL="2743200" algn="l" defTabSz="457200" rtl="0" eaLnBrk="1" latinLnBrk="0" hangingPunct="1">
+      <a:defRPr sz="1200" kern="1200">
+        <a:solidFill>
+          <a:schemeClr val="tx1"/>
+        </a:solidFill>
+        <a:latin typeface="+mn-lt"/>
+        <a:ea typeface="+mn-ea"/>
+        <a:cs typeface="+mn-cs"/>
+      </a:defRPr>
+    </a:lvl7pPr>
+    <a:lvl8pPr marL="3200400" algn="l" defTabSz="457200" rtl="0" eaLnBrk="1" latinLnBrk="0" hangingPunct="1">
+      <a:defRPr sz="1200" kern="1200">
+        <a:solidFill>
+          <a:schemeClr val="tx1"/>
+        </a:solidFill>
+        <a:latin typeface="+mn-lt"/>
+        <a:ea typeface="+mn-ea"/>
+        <a:cs typeface="+mn-cs"/>
+      </a:defRPr>
+    </a:lvl8pPr>
+    <a:lvl9pPr marL="3657600" algn="l" defTabSz="457200" rtl="0" eaLnBrk="1" latinLnBrk="0" hangingPunct="1">
+      <a:defRPr sz="1200" kern="1200">
+        <a:solidFill>
+          <a:schemeClr val="tx1"/>
+        </a:solidFill>
+        <a:latin typeface="+mn-lt"/>
+        <a:ea typeface="+mn-ea"/>
+        <a:cs typeface="+mn-cs"/>
+      </a:defRPr>
+    </a:lvl9pPr>
+  </p:notesStyle>
+</p:notesMaster>
+</file>
+
+<file path=ppt/notesSlides/notesSlide1.xml><?xml version="1.0" encoding="utf-8"?>
+<p:notes xmlns:a="http://schemas.openxmlformats.org/drawingml/2006/main" xmlns:p="http://schemas.openxmlformats.org/presentationml/2006/main" xmlns:r="http://schemas.openxmlformats.org/officeDocument/2006/relationships">
+  <p:cSld>
+    <p:spTree>
+      <p:nvGrpSpPr>
+        <p:cNvPr id="1" name=""/>
+        <p:cNvGrpSpPr/>
+        <p:nvPr/>
+      </p:nvGrpSpPr>
+      <p:grpSpPr>
+        <a:xfrm>
+          <a:off x="0" y="0"/>
+          <a:ext cx="0" cy="0"/>
+          <a:chOff x="0" y="0"/>
+          <a:chExt cx="0" cy="0"/>
+        </a:xfrm>
+      </p:grpSpPr>
+      <p:sp>
+        <p:nvSpPr>
+          <p:cNvPr id="2" name="Slide Image Placeholder 1"/>
+          <p:cNvSpPr>
+            <a:spLocks noGrp="1"/>
+          </p:cNvSpPr>
+          <p:nvPr>
+            <p:ph type="sldImg" idx="2"/>
+          </p:nvPr>
+        </p:nvSpPr>
+        <p:spPr/>
+      </p:sp>
+      <p:sp>
+        <p:nvSpPr>
+          <p:cNvPr id="3" name="Notes Placeholder 2"/>
+          <p:cNvSpPr>
+            <a:spLocks noGrp="1"/>
+          </p:cNvSpPr>
+          <p:nvPr>
+            <p:ph type="body" idx="3" sz="quarter"/>
+          </p:nvPr>
+        </p:nvSpPr>
+        <p:spPr/>
+        <p:txBody>
+          <a:bodyPr/>
+          <a:lstStyle/>
+          <a:p>
+            <a:r>
+              <a:t>What does it cost to raise a dollar?. Sample Community Services Ltd. Period: September 2026. What fundraising costs (grant writing, donor campaigns, events) for every dollar it brings in. Pick a source and every number, chart and note follows it.</a:t>
+            </a:r>
+          </a:p>
+        </p:txBody>
+      </p:sp>
+      <p:sp>
+        <p:nvSpPr>
+          <p:cNvPr id="4" name="Slide Number Placeholder 3"/>
+          <p:cNvSpPr>
+            <a:spLocks noGrp="1"/>
+          </p:cNvSpPr>
+          <p:nvPr>
+            <p:ph type="sldNum" idx="5" sz="quarter"/>
+          </p:nvPr>
+        </p:nvSpPr>
+        <p:spPr/>
+      </p:sp>
+    </p:spTree>
+  </p:cSld>
+  <p:clrMapOvr>
+    <a:masterClrMapping/>
+  </p:clrMapOvr>
+</p:notes>
+</file>
+
+<file path=ppt/notesSlides/notesSlide2.xml><?xml version="1.0" encoding="utf-8"?>
+<p:notes xmlns:a="http://schemas.openxmlformats.org/drawingml/2006/main" xmlns:p="http://schemas.openxmlformats.org/presentationml/2006/main" xmlns:r="http://schemas.openxmlformats.org/officeDocument/2006/relationships">
+  <p:cSld>
+    <p:spTree>
+      <p:nvGrpSpPr>
+        <p:cNvPr id="1" name=""/>
+        <p:cNvGrpSpPr/>
+        <p:nvPr/>
+      </p:nvGrpSpPr>
+      <p:grpSpPr>
+        <a:xfrm>
+          <a:off x="0" y="0"/>
+          <a:ext cx="0" cy="0"/>
+          <a:chOff x="0" y="0"/>
+          <a:chExt cx="0" cy="0"/>
+        </a:xfrm>
+      </p:grpSpPr>
+      <p:sp>
+        <p:nvSpPr>
+          <p:cNvPr id="2" name="Slide Image Placeholder 1"/>
+          <p:cNvSpPr>
+            <a:spLocks noGrp="1"/>
+          </p:cNvSpPr>
+          <p:nvPr>
+            <p:ph type="sldImg" idx="2"/>
+          </p:nvPr>
+        </p:nvSpPr>
+        <p:spPr/>
+      </p:sp>
+      <p:sp>
+        <p:nvSpPr>
+          <p:cNvPr id="3" name="Notes Placeholder 2"/>
+          <p:cNvSpPr>
+            <a:spLocks noGrp="1"/>
+          </p:cNvSpPr>
+          <p:nvPr>
+            <p:ph type="body" idx="3" sz="quarter"/>
+          </p:nvPr>
+        </p:nvSpPr>
+        <p:spPr/>
+        <p:txBody>
+          <a:bodyPr/>
+          <a:lstStyle/>
+          <a:p>
+            <a:r>
+              <a:t>All fundraising. September · all fundraising: 20¢; Year to date (Jul to Sep 2026): 15¢. September cost 20¢ to raise each dollar, against 13¢ in August. Fundraising events raised $41,600 and cost $16,900. This financial year to date it has cost 15¢ a dollar, against 16¢ in the same period last year. The year-to-date figure is steadier than single months: events make some months jump. Pick a source above to see which one moves it.</a:t>
+            </a:r>
+          </a:p>
+        </p:txBody>
+      </p:sp>
+      <p:sp>
+        <p:nvSpPr>
+          <p:cNvPr id="4" name="Slide Number Placeholder 3"/>
+          <p:cNvSpPr>
+            <a:spLocks noGrp="1"/>
+          </p:cNvSpPr>
+          <p:nvPr>
+            <p:ph type="sldNum" idx="5" sz="quarter"/>
+          </p:nvPr>
+        </p:nvSpPr>
+        <p:spPr/>
+      </p:sp>
+    </p:spTree>
+  </p:cSld>
+  <p:clrMapOvr>
+    <a:masterClrMapping/>
+  </p:clrMapOvr>
+</p:notes>
+</file>
+
+<file path=ppt/notesSlides/notesSlide3.xml><?xml version="1.0" encoding="utf-8"?>
+<p:notes xmlns:a="http://schemas.openxmlformats.org/drawingml/2006/main" xmlns:p="http://schemas.openxmlformats.org/presentationml/2006/main" xmlns:r="http://schemas.openxmlformats.org/officeDocument/2006/relationships">
+  <p:cSld>
+    <p:spTree>
+      <p:nvGrpSpPr>
+        <p:cNvPr id="1" name=""/>
+        <p:cNvGrpSpPr/>
+        <p:nvPr/>
+      </p:nvGrpSpPr>
+      <p:grpSpPr>
+        <a:xfrm>
+          <a:off x="0" y="0"/>
+          <a:ext cx="0" cy="0"/>
+          <a:chOff x="0" y="0"/>
+          <a:chExt cx="0" cy="0"/>
+        </a:xfrm>
+      </p:grpSpPr>
+      <p:sp>
+        <p:nvSpPr>
+          <p:cNvPr id="2" name="Slide Image Placeholder 1"/>
+          <p:cNvSpPr>
+            <a:spLocks noGrp="1"/>
+          </p:cNvSpPr>
+          <p:nvPr>
+            <p:ph type="sldImg" idx="2"/>
+          </p:nvPr>
+        </p:nvSpPr>
+        <p:spPr/>
+      </p:sp>
+      <p:sp>
+        <p:nvSpPr>
+          <p:cNvPr id="3" name="Notes Placeholder 2"/>
+          <p:cNvSpPr>
+            <a:spLocks noGrp="1"/>
+          </p:cNvSpPr>
+          <p:nvPr>
+            <p:ph type="body" idx="3" sz="quarter"/>
+          </p:nvPr>
+        </p:nvSpPr>
+        <p:spPr/>
+        <p:txBody>
+          <a:bodyPr/>
+          <a:lstStyle/>
+          <a:p>
+            <a:r>
+              <a:t>Grants. September · Grants: 9¢; Year to date (Jul to Sep 2026): 10¢. Grants cost 10¢ to raise each dollar this financial year to date ($21,300 of grant writing and reporting for $223,318), against 12¢ in the same period last year. Usually the cheapest money to raise, as long as the time that goes into applications and acquittals is protected.</a:t>
+            </a:r>
+          </a:p>
+        </p:txBody>
+      </p:sp>
+      <p:sp>
+        <p:nvSpPr>
+          <p:cNvPr id="4" name="Slide Number Placeholder 3"/>
+          <p:cNvSpPr>
+            <a:spLocks noGrp="1"/>
+          </p:cNvSpPr>
+          <p:nvPr>
+            <p:ph type="sldNum" idx="5" sz="quarter"/>
+          </p:nvPr>
+        </p:nvSpPr>
+        <p:spPr/>
+      </p:sp>
+    </p:spTree>
+  </p:cSld>
+  <p:clrMapOvr>
+    <a:masterClrMapping/>
+  </p:clrMapOvr>
+</p:notes>
+</file>
+
+<file path=ppt/notesSlides/notesSlide4.xml><?xml version="1.0" encoding="utf-8"?>
+<p:notes xmlns:a="http://schemas.openxmlformats.org/drawingml/2006/main" xmlns:p="http://schemas.openxmlformats.org/presentationml/2006/main" xmlns:r="http://schemas.openxmlformats.org/officeDocument/2006/relationships">
+  <p:cSld>
+    <p:spTree>
+      <p:nvGrpSpPr>
+        <p:cNvPr id="1" name=""/>
+        <p:cNvGrpSpPr/>
+        <p:nvPr/>
+      </p:nvGrpSpPr>
+      <p:grpSpPr>
+        <a:xfrm>
+          <a:off x="0" y="0"/>
+          <a:ext cx="0" cy="0"/>
+          <a:chOff x="0" y="0"/>
+          <a:chExt cx="0" cy="0"/>
+        </a:xfrm>
+      </p:grpSpPr>
+      <p:sp>
+        <p:nvSpPr>
+          <p:cNvPr id="2" name="Slide Image Placeholder 1"/>
+          <p:cNvSpPr>
+            <a:spLocks noGrp="1"/>
+          </p:cNvSpPr>
+          <p:nvPr>
+            <p:ph type="sldImg" idx="2"/>
+          </p:nvPr>
+        </p:nvSpPr>
+        <p:spPr/>
+      </p:sp>
+      <p:sp>
+        <p:nvSpPr>
+          <p:cNvPr id="3" name="Notes Placeholder 2"/>
+          <p:cNvSpPr>
+            <a:spLocks noGrp="1"/>
+          </p:cNvSpPr>
+          <p:nvPr>
+            <p:ph type="body" idx="3" sz="quarter"/>
+          </p:nvPr>
+        </p:nvSpPr>
+        <p:spPr/>
+        <p:txBody>
+          <a:bodyPr/>
+          <a:lstStyle/>
+          <a:p>
+            <a:r>
+              <a:t>Donations. September · Donations: 19¢; Year to date (Jul to Sep 2026): 16¢. Donations cost 16¢ to raise each dollar this financial year to date ($9,800 of donor campaigns for $60,600), against 14¢ in the same period last year. Steady and cheap, and untied: the money that builds reserves.</a:t>
+            </a:r>
+          </a:p>
+        </p:txBody>
+      </p:sp>
+      <p:sp>
+        <p:nvSpPr>
+          <p:cNvPr id="4" name="Slide Number Placeholder 3"/>
+          <p:cNvSpPr>
+            <a:spLocks noGrp="1"/>
+          </p:cNvSpPr>
+          <p:nvPr>
+            <p:ph type="sldNum" idx="5" sz="quarter"/>
+          </p:nvPr>
+        </p:nvSpPr>
+        <p:spPr/>
+      </p:sp>
+    </p:spTree>
+  </p:cSld>
+  <p:clrMapOvr>
+    <a:masterClrMapping/>
+  </p:clrMapOvr>
+</p:notes>
+</file>
+
+<file path=ppt/notesSlides/notesSlide5.xml><?xml version="1.0" encoding="utf-8"?>
+<p:notes xmlns:a="http://schemas.openxmlformats.org/drawingml/2006/main" xmlns:p="http://schemas.openxmlformats.org/presentationml/2006/main" xmlns:r="http://schemas.openxmlformats.org/officeDocument/2006/relationships">
+  <p:cSld>
+    <p:spTree>
+      <p:nvGrpSpPr>
+        <p:cNvPr id="1" name=""/>
+        <p:cNvGrpSpPr/>
+        <p:nvPr/>
+      </p:nvGrpSpPr>
+      <p:grpSpPr>
+        <a:xfrm>
+          <a:off x="0" y="0"/>
+          <a:ext cx="0" cy="0"/>
+          <a:chOff x="0" y="0"/>
+          <a:chExt cx="0" cy="0"/>
+        </a:xfrm>
+      </p:grpSpPr>
+      <p:sp>
+        <p:nvSpPr>
+          <p:cNvPr id="2" name="Slide Image Placeholder 1"/>
+          <p:cNvSpPr>
+            <a:spLocks noGrp="1"/>
+          </p:cNvSpPr>
+          <p:nvPr>
+            <p:ph type="sldImg" idx="2"/>
+          </p:nvPr>
+        </p:nvSpPr>
+        <p:spPr/>
+      </p:sp>
+      <p:sp>
+        <p:nvSpPr>
+          <p:cNvPr id="3" name="Notes Placeholder 2"/>
+          <p:cNvSpPr>
+            <a:spLocks noGrp="1"/>
+          </p:cNvSpPr>
+          <p:nvPr>
+            <p:ph type="body" idx="3" sz="quarter"/>
+          </p:nvPr>
+        </p:nvSpPr>
+        <p:spPr/>
+        <p:txBody>
+          <a:bodyPr/>
+          <a:lstStyle/>
+          <a:p>
+            <a:r>
+              <a:t>Fundraising events. September · Fundraising events: 41¢; Year to date (Jul to Sep 2026): 46¢. Fundraising events cost 46¢ to raise each dollar this financial year to date ($19,300 of event costs for $41,600), against 41¢ in the same period last year. Usually the dearest money to raise: events are worth counting for what else they bring too (new donors, profile).</a:t>
+            </a:r>
+          </a:p>
+        </p:txBody>
+      </p:sp>
+      <p:sp>
+        <p:nvSpPr>
+          <p:cNvPr id="4" name="Slide Number Placeholder 3"/>
+          <p:cNvSpPr>
+            <a:spLocks noGrp="1"/>
+          </p:cNvSpPr>
+          <p:nvPr>
+            <p:ph type="sldNum" idx="5" sz="quarter"/>
+          </p:nvPr>
+        </p:nvSpPr>
+        <p:spPr/>
+      </p:sp>
+    </p:spTree>
+  </p:cSld>
+  <p:clrMapOvr>
+    <a:masterClrMapping/>
+  </p:clrMapOvr>
+</p:notes>
 </file>
 
 <file path=ppt/slideLayouts/slideLayout1.xml><?xml version="1.0" encoding="utf-8"?>
@@ -3568,7 +4794,44 @@
       <p:grpSpPr/>
       <p:sp>
         <p:nvSpPr>
-          <p:cNvPr id="2" name="Rectangle 1"/>
+          <p:cNvPr id="2" name="Title 1"/>
+          <p:cNvSpPr>
+            <a:spLocks noGrp="1"/>
+          </p:cNvSpPr>
+          <p:nvPr>
+            <p:ph type="ctrTitle"/>
+          </p:nvPr>
+        </p:nvSpPr>
+        <p:spPr>
+          <a:xfrm>
+            <a:off x="457200" y="1965960"/>
+            <a:ext cx="11277295" cy="1097280"/>
+          </a:xfrm>
+        </p:spPr>
+        <p:txBody>
+          <a:bodyPr wrap="square"/>
+          <a:lstStyle/>
+          <a:p>
+            <a:pPr algn="l">
+              <a:defRPr>
+                <a:latin typeface="Roboto"/>
+              </a:defRPr>
+            </a:pPr>
+            <a:r>
+              <a:rPr sz="3400" b="1">
+                <a:solidFill>
+                  <a:srgbClr val="25342A"/>
+                </a:solidFill>
+                <a:latin typeface="Roboto"/>
+              </a:rPr>
+              <a:t>What does it cost to raise a dollar?</a:t>
+            </a:r>
+          </a:p>
+        </p:txBody>
+      </p:sp>
+      <p:sp>
+        <p:nvSpPr>
+          <p:cNvPr id="3" name="Rectangle 2"/>
           <p:cNvSpPr/>
           <p:nvPr/>
         </p:nvSpPr>
@@ -3624,53 +4887,14 @@
       </p:sp>
       <p:sp>
         <p:nvSpPr>
-          <p:cNvPr id="3" name="TextBox 2"/>
-          <p:cNvSpPr txBox="1"/>
-          <p:nvPr/>
-        </p:nvSpPr>
-        <p:spPr>
-          <a:xfrm>
-            <a:off x="1234440" y="658368"/>
-            <a:ext cx="5486400" cy="457200"/>
-          </a:xfrm>
-          <a:prstGeom prst="rect">
-            <a:avLst/>
-          </a:prstGeom>
-          <a:noFill/>
-        </p:spPr>
-        <p:txBody>
-          <a:bodyPr wrap="square">
-            <a:spAutoFit/>
-          </a:bodyPr>
-          <a:lstStyle/>
-          <a:p>
-            <a:pPr>
-              <a:defRPr>
-                <a:latin typeface="Roboto"/>
-              </a:defRPr>
-            </a:pPr>
-            <a:r>
-              <a:rPr sz="1800" b="1">
-                <a:solidFill>
-                  <a:srgbClr val="25342A"/>
-                </a:solidFill>
-                <a:latin typeface="Roboto"/>
-              </a:rPr>
-              <a:t>The Fourth Sheet</a:t>
-            </a:r>
-          </a:p>
-        </p:txBody>
-      </p:sp>
-      <p:sp>
-        <p:nvSpPr>
           <p:cNvPr id="4" name="TextBox 3"/>
           <p:cNvSpPr txBox="1"/>
           <p:nvPr/>
         </p:nvSpPr>
         <p:spPr>
           <a:xfrm>
-            <a:off x="457200" y="1554480"/>
-            <a:ext cx="10972800" cy="365760"/>
+            <a:off x="1234440" y="658368"/>
+            <a:ext cx="5486400" cy="457200"/>
           </a:xfrm>
           <a:prstGeom prst="rect">
             <a:avLst/>
@@ -3678,7 +4902,7 @@
           <a:noFill/>
         </p:spPr>
         <p:txBody>
-          <a:bodyPr wrap="square">
+          <a:bodyPr wrap="square" lIns="45720" rIns="45720">
             <a:spAutoFit/>
           </a:bodyPr>
           <a:lstStyle/>
@@ -3689,13 +4913,13 @@
               </a:defRPr>
             </a:pPr>
             <a:r>
-              <a:rPr sz="1100" b="1">
-                <a:solidFill>
-                  <a:srgbClr val="8A7A52"/>
+              <a:rPr sz="1800" b="1">
+                <a:solidFill>
+                  <a:srgbClr val="25342A"/>
                 </a:solidFill>
                 <a:latin typeface="Roboto"/>
               </a:rPr>
-              <a:t>SAMPLE DATA · invented figures for demonstration</a:t>
+              <a:t>The Fourth Sheet</a:t>
             </a:r>
           </a:p>
         </p:txBody>
@@ -3708,8 +4932,8 @@
         </p:nvSpPr>
         <p:spPr>
           <a:xfrm>
-            <a:off x="457200" y="2011680"/>
-            <a:ext cx="11247120" cy="1097280"/>
+            <a:off x="457200" y="1554480"/>
+            <a:ext cx="10972800" cy="365760"/>
           </a:xfrm>
           <a:prstGeom prst="rect">
             <a:avLst/>
@@ -3717,7 +4941,7 @@
           <a:noFill/>
         </p:spPr>
         <p:txBody>
-          <a:bodyPr wrap="square">
+          <a:bodyPr wrap="square" lIns="45720" rIns="45720">
             <a:spAutoFit/>
           </a:bodyPr>
           <a:lstStyle/>
@@ -3728,13 +4952,13 @@
               </a:defRPr>
             </a:pPr>
             <a:r>
-              <a:rPr sz="3400" b="1">
-                <a:solidFill>
-                  <a:srgbClr val="25342A"/>
+              <a:rPr sz="1100" b="1">
+                <a:solidFill>
+                  <a:srgbClr val="8A7A52"/>
                 </a:solidFill>
                 <a:latin typeface="Roboto"/>
               </a:rPr>
-              <a:t>What does it cost to raise a dollar?</a:t>
+              <a:t>SAMPLE DATA · invented figures for demonstration</a:t>
             </a:r>
           </a:p>
         </p:txBody>
@@ -3748,7 +4972,7 @@
         <p:spPr>
           <a:xfrm>
             <a:off x="457200" y="3154680"/>
-            <a:ext cx="11247120" cy="457200"/>
+            <a:ext cx="11277295" cy="457200"/>
           </a:xfrm>
           <a:prstGeom prst="rect">
             <a:avLst/>
@@ -3756,7 +4980,7 @@
           <a:noFill/>
         </p:spPr>
         <p:txBody>
-          <a:bodyPr wrap="square">
+          <a:bodyPr wrap="square" lIns="45720" rIns="45720">
             <a:spAutoFit/>
           </a:bodyPr>
           <a:lstStyle/>
@@ -3787,7 +5011,7 @@
         <p:spPr>
           <a:xfrm>
             <a:off x="457200" y="3703320"/>
-            <a:ext cx="11247120" cy="1097280"/>
+            <a:ext cx="11277295" cy="535940"/>
           </a:xfrm>
           <a:prstGeom prst="rect">
             <a:avLst/>
@@ -3795,7 +5019,7 @@
           <a:noFill/>
         </p:spPr>
         <p:txBody>
-          <a:bodyPr wrap="square">
+          <a:bodyPr wrap="square" lIns="45720" rIns="45720">
             <a:spAutoFit/>
           </a:bodyPr>
           <a:lstStyle/>
@@ -3825,8 +5049,8 @@
         </p:nvSpPr>
         <p:spPr>
           <a:xfrm>
-            <a:off x="457200" y="4937760"/>
-            <a:ext cx="11247120" cy="1097280"/>
+            <a:off x="457200" y="4330700"/>
+            <a:ext cx="11277295" cy="1097280"/>
           </a:xfrm>
           <a:prstGeom prst="rect">
             <a:avLst/>
@@ -3834,7 +5058,7 @@
           <a:noFill/>
         </p:spPr>
         <p:txBody>
-          <a:bodyPr wrap="square">
+          <a:bodyPr wrap="square" lIns="45720" rIns="45720">
             <a:spAutoFit/>
           </a:bodyPr>
           <a:lstStyle/>
@@ -3913,7 +5137,7 @@
         <p:spPr>
           <a:xfrm>
             <a:off x="457200" y="6492240"/>
-            <a:ext cx="3657600" cy="274320"/>
+            <a:ext cx="2926080" cy="274320"/>
           </a:xfrm>
           <a:prstGeom prst="rect">
             <a:avLst/>
@@ -3921,7 +5145,7 @@
           <a:noFill/>
         </p:spPr>
         <p:txBody>
-          <a:bodyPr wrap="square">
+          <a:bodyPr wrap="square" lIns="45720" rIns="45720">
             <a:spAutoFit/>
           </a:bodyPr>
           <a:lstStyle/>
@@ -3951,8 +5175,8 @@
         </p:nvSpPr>
         <p:spPr>
           <a:xfrm>
-            <a:off x="4297680" y="6492240"/>
-            <a:ext cx="3657600" cy="274320"/>
+            <a:off x="3108960" y="6492240"/>
+            <a:ext cx="5943600" cy="274320"/>
           </a:xfrm>
           <a:prstGeom prst="rect">
             <a:avLst/>
@@ -3960,7 +5184,7 @@
           <a:noFill/>
         </p:spPr>
         <p:txBody>
-          <a:bodyPr wrap="square">
+          <a:bodyPr wrap="square" lIns="45720" rIns="45720">
             <a:spAutoFit/>
           </a:bodyPr>
           <a:lstStyle/>
@@ -3977,7 +5201,7 @@
                 </a:solidFill>
                 <a:latin typeface="Roboto"/>
               </a:rPr>
-              <a:t>Data retrieved 2pm, Tue 6 Oct 2026 · Sample data</a:t>
+              <a:t>Data retrieved 2pm, Tue 6 Oct 2026 · Generated 8 Oct 2026, 9:35am · Sample data · Made with Python (python-pptx)</a:t>
             </a:r>
           </a:p>
         </p:txBody>
@@ -3999,7 +5223,7 @@
           <a:noFill/>
         </p:spPr>
         <p:txBody>
-          <a:bodyPr wrap="square">
+          <a:bodyPr wrap="square" lIns="45720" rIns="45720">
             <a:spAutoFit/>
           </a:bodyPr>
           <a:lstStyle/>
@@ -4016,838 +5240,7 @@
                 </a:solidFill>
                 <a:latin typeface="Roboto"/>
               </a:rPr>
-              <a:t>Slide 1 of 11</a:t>
-            </a:r>
-          </a:p>
-        </p:txBody>
-      </p:sp>
-    </p:spTree>
-  </p:cSld>
-  <p:clrMapOvr>
-    <a:masterClrMapping/>
-  </p:clrMapOvr>
-</p:sld>
-</file>
-
-<file path=ppt/slides/slide10.xml><?xml version="1.0" encoding="utf-8"?>
-<p:sld xmlns:a="http://schemas.openxmlformats.org/drawingml/2006/main" xmlns:p="http://schemas.openxmlformats.org/presentationml/2006/main" xmlns:r="http://schemas.openxmlformats.org/officeDocument/2006/relationships">
-  <p:cSld>
-    <p:spTree>
-      <p:nvGrpSpPr>
-        <p:cNvPr id="1" name=""/>
-        <p:cNvGrpSpPr/>
-        <p:nvPr/>
-      </p:nvGrpSpPr>
-      <p:grpSpPr/>
-      <p:sp>
-        <p:nvSpPr>
-          <p:cNvPr id="2" name="Rectangle 1"/>
-          <p:cNvSpPr/>
-          <p:nvPr/>
-        </p:nvSpPr>
-        <p:spPr>
-          <a:xfrm>
-            <a:off x="0" y="0"/>
-            <a:ext cx="12191695" cy="73152"/>
-          </a:xfrm>
-          <a:prstGeom prst="rect">
-            <a:avLst/>
-          </a:prstGeom>
-          <a:solidFill>
-            <a:srgbClr val="2F7A5D"/>
-          </a:solidFill>
-          <a:ln>
-            <a:noFill/>
-          </a:ln>
-        </p:spPr>
-        <p:style>
-          <a:lnRef idx="1">
-            <a:schemeClr val="accent1"/>
-          </a:lnRef>
-          <a:fillRef idx="3">
-            <a:schemeClr val="accent1"/>
-          </a:fillRef>
-          <a:effectRef idx="2">
-            <a:schemeClr val="accent1"/>
-          </a:effectRef>
-          <a:fontRef idx="minor">
-            <a:schemeClr val="lt1"/>
-          </a:fontRef>
-        </p:style>
-        <p:txBody>
-          <a:bodyPr rtlCol="0" anchor="ctr"/>
-          <a:lstStyle/>
-          <a:p>
-            <a:pPr algn="ctr">
-              <a:defRPr>
-                <a:latin typeface="Roboto"/>
-              </a:defRPr>
-            </a:pPr>
-          </a:p>
-        </p:txBody>
-      </p:sp>
-      <p:sp>
-        <p:nvSpPr>
-          <p:cNvPr id="3" name="TextBox 2"/>
-          <p:cNvSpPr txBox="1"/>
-          <p:nvPr/>
-        </p:nvSpPr>
-        <p:spPr>
-          <a:xfrm>
-            <a:off x="457200" y="164592"/>
-            <a:ext cx="7315200" cy="274320"/>
-          </a:xfrm>
-          <a:prstGeom prst="rect">
-            <a:avLst/>
-          </a:prstGeom>
-          <a:noFill/>
-        </p:spPr>
-        <p:txBody>
-          <a:bodyPr wrap="square">
-            <a:spAutoFit/>
-          </a:bodyPr>
-          <a:lstStyle/>
-          <a:p>
-            <a:pPr>
-              <a:defRPr>
-                <a:latin typeface="Roboto"/>
-              </a:defRPr>
-            </a:pPr>
-            <a:r>
-              <a:rPr sz="1000" b="0">
-                <a:solidFill>
-                  <a:srgbClr val="5F6F63"/>
-                </a:solidFill>
-                <a:latin typeface="Roboto"/>
-              </a:rPr>
-              <a:t>Sample Community Services Ltd · What does it cost to raise a dollar?</a:t>
-            </a:r>
-          </a:p>
-        </p:txBody>
-      </p:sp>
-      <p:sp>
-        <p:nvSpPr>
-          <p:cNvPr id="4" name="TextBox 3"/>
-          <p:cNvSpPr txBox="1"/>
-          <p:nvPr/>
-        </p:nvSpPr>
-        <p:spPr>
-          <a:xfrm>
-            <a:off x="457200" y="411480"/>
-            <a:ext cx="11247120" cy="548640"/>
-          </a:xfrm>
-          <a:prstGeom prst="rect">
-            <a:avLst/>
-          </a:prstGeom>
-          <a:noFill/>
-        </p:spPr>
-        <p:txBody>
-          <a:bodyPr wrap="square">
-            <a:spAutoFit/>
-          </a:bodyPr>
-          <a:lstStyle/>
-          <a:p>
-            <a:pPr>
-              <a:defRPr>
-                <a:latin typeface="Roboto"/>
-              </a:defRPr>
-            </a:pPr>
-            <a:r>
-              <a:rPr sz="2400" b="1">
-                <a:solidFill>
-                  <a:srgbClr val="25342A"/>
-                </a:solidFill>
-                <a:latin typeface="Roboto"/>
-              </a:rPr>
-              <a:t>What it shows · Source: Fundraising events</a:t>
-            </a:r>
-          </a:p>
-        </p:txBody>
-      </p:sp>
-      <p:sp>
-        <p:nvSpPr>
-          <p:cNvPr id="5" name="Rectangle 4"/>
-          <p:cNvSpPr/>
-          <p:nvPr/>
-        </p:nvSpPr>
-        <p:spPr>
-          <a:xfrm>
-            <a:off x="457200" y="1554480"/>
-            <a:ext cx="5501487" cy="4389120"/>
-          </a:xfrm>
-          <a:prstGeom prst="rect">
-            <a:avLst/>
-          </a:prstGeom>
-          <a:solidFill>
-            <a:srgbClr val="FFFFFF"/>
-          </a:solidFill>
-          <a:ln>
-            <a:solidFill>
-              <a:srgbClr val="DCE8DC"/>
-            </a:solidFill>
-          </a:ln>
-        </p:spPr>
-        <p:style>
-          <a:lnRef idx="1">
-            <a:schemeClr val="accent1"/>
-          </a:lnRef>
-          <a:fillRef idx="3">
-            <a:schemeClr val="accent1"/>
-          </a:fillRef>
-          <a:effectRef idx="2">
-            <a:schemeClr val="accent1"/>
-          </a:effectRef>
-          <a:fontRef idx="minor">
-            <a:schemeClr val="lt1"/>
-          </a:fontRef>
-        </p:style>
-        <p:txBody>
-          <a:bodyPr rtlCol="0" anchor="ctr"/>
-          <a:lstStyle/>
-          <a:p>
-            <a:pPr algn="ctr">
-              <a:defRPr>
-                <a:latin typeface="Roboto"/>
-              </a:defRPr>
-            </a:pPr>
-          </a:p>
-        </p:txBody>
-      </p:sp>
-      <p:sp>
-        <p:nvSpPr>
-          <p:cNvPr id="6" name="TextBox 5"/>
-          <p:cNvSpPr txBox="1"/>
-          <p:nvPr/>
-        </p:nvSpPr>
-        <p:spPr>
-          <a:xfrm>
-            <a:off x="685800" y="1691640"/>
-            <a:ext cx="5044287" cy="365760"/>
-          </a:xfrm>
-          <a:prstGeom prst="rect">
-            <a:avLst/>
-          </a:prstGeom>
-          <a:noFill/>
-        </p:spPr>
-        <p:txBody>
-          <a:bodyPr wrap="square">
-            <a:spAutoFit/>
-          </a:bodyPr>
-          <a:lstStyle/>
-          <a:p>
-            <a:pPr>
-              <a:defRPr>
-                <a:latin typeface="Roboto"/>
-              </a:defRPr>
-            </a:pPr>
-            <a:r>
-              <a:rPr sz="1100" b="1">
-                <a:solidFill>
-                  <a:srgbClr val="5F6F63"/>
-                </a:solidFill>
-                <a:latin typeface="Roboto"/>
-              </a:rPr>
-              <a:t>WHAT IT SHOWS</a:t>
-            </a:r>
-          </a:p>
-        </p:txBody>
-      </p:sp>
-      <p:sp>
-        <p:nvSpPr>
-          <p:cNvPr id="7" name="TextBox 6"/>
-          <p:cNvSpPr txBox="1"/>
-          <p:nvPr/>
-        </p:nvSpPr>
-        <p:spPr>
-          <a:xfrm>
-            <a:off x="685800" y="2103120"/>
-            <a:ext cx="5044287" cy="3749039"/>
-          </a:xfrm>
-          <a:prstGeom prst="rect">
-            <a:avLst/>
-          </a:prstGeom>
-          <a:noFill/>
-        </p:spPr>
-        <p:txBody>
-          <a:bodyPr wrap="square">
-            <a:spAutoFit/>
-          </a:bodyPr>
-          <a:lstStyle/>
-          <a:p>
-            <a:pPr>
-              <a:defRPr>
-                <a:latin typeface="Roboto"/>
-              </a:defRPr>
-            </a:pPr>
-            <a:r>
-              <a:rPr sz="1600" b="0">
-                <a:solidFill>
-                  <a:srgbClr val="25342A"/>
-                </a:solidFill>
-                <a:latin typeface="Roboto"/>
-              </a:rPr>
-              <a:t>Fundraising events cost 46¢ to raise each dollar this financial year to date ($19,300 of event costs for $41,600), against 41¢ in the same period last year.</a:t>
-            </a:r>
-          </a:p>
-        </p:txBody>
-      </p:sp>
-      <p:sp>
-        <p:nvSpPr>
-          <p:cNvPr id="8" name="Rectangle 7"/>
-          <p:cNvSpPr/>
-          <p:nvPr/>
-        </p:nvSpPr>
-        <p:spPr>
-          <a:xfrm>
-            <a:off x="6233007" y="1554480"/>
-            <a:ext cx="5501487" cy="4389120"/>
-          </a:xfrm>
-          <a:prstGeom prst="rect">
-            <a:avLst/>
-          </a:prstGeom>
-          <a:solidFill>
-            <a:srgbClr val="EEF5F0"/>
-          </a:solidFill>
-          <a:ln>
-            <a:solidFill>
-              <a:srgbClr val="DCE8DC"/>
-            </a:solidFill>
-          </a:ln>
-        </p:spPr>
-        <p:style>
-          <a:lnRef idx="1">
-            <a:schemeClr val="accent1"/>
-          </a:lnRef>
-          <a:fillRef idx="3">
-            <a:schemeClr val="accent1"/>
-          </a:fillRef>
-          <a:effectRef idx="2">
-            <a:schemeClr val="accent1"/>
-          </a:effectRef>
-          <a:fontRef idx="minor">
-            <a:schemeClr val="lt1"/>
-          </a:fontRef>
-        </p:style>
-        <p:txBody>
-          <a:bodyPr rtlCol="0" anchor="ctr"/>
-          <a:lstStyle/>
-          <a:p>
-            <a:pPr algn="ctr">
-              <a:defRPr>
-                <a:latin typeface="Roboto"/>
-              </a:defRPr>
-            </a:pPr>
-          </a:p>
-        </p:txBody>
-      </p:sp>
-      <p:sp>
-        <p:nvSpPr>
-          <p:cNvPr id="9" name="TextBox 8"/>
-          <p:cNvSpPr txBox="1"/>
-          <p:nvPr/>
-        </p:nvSpPr>
-        <p:spPr>
-          <a:xfrm>
-            <a:off x="6461607" y="1691640"/>
-            <a:ext cx="5044287" cy="365760"/>
-          </a:xfrm>
-          <a:prstGeom prst="rect">
-            <a:avLst/>
-          </a:prstGeom>
-          <a:noFill/>
-        </p:spPr>
-        <p:txBody>
-          <a:bodyPr wrap="square">
-            <a:spAutoFit/>
-          </a:bodyPr>
-          <a:lstStyle/>
-          <a:p>
-            <a:pPr>
-              <a:defRPr>
-                <a:latin typeface="Roboto"/>
-              </a:defRPr>
-            </a:pPr>
-            <a:r>
-              <a:rPr sz="1100" b="1">
-                <a:solidFill>
-                  <a:srgbClr val="5F6F63"/>
-                </a:solidFill>
-                <a:latin typeface="Roboto"/>
-              </a:rPr>
-              <a:t>WHAT YOU'D DO ABOUT IT</a:t>
-            </a:r>
-          </a:p>
-        </p:txBody>
-      </p:sp>
-      <p:sp>
-        <p:nvSpPr>
-          <p:cNvPr id="10" name="TextBox 9"/>
-          <p:cNvSpPr txBox="1"/>
-          <p:nvPr/>
-        </p:nvSpPr>
-        <p:spPr>
-          <a:xfrm>
-            <a:off x="6461607" y="2103120"/>
-            <a:ext cx="5044287" cy="3749039"/>
-          </a:xfrm>
-          <a:prstGeom prst="rect">
-            <a:avLst/>
-          </a:prstGeom>
-          <a:noFill/>
-        </p:spPr>
-        <p:txBody>
-          <a:bodyPr wrap="square">
-            <a:spAutoFit/>
-          </a:bodyPr>
-          <a:lstStyle/>
-          <a:p>
-            <a:pPr>
-              <a:defRPr>
-                <a:latin typeface="Roboto"/>
-              </a:defRPr>
-            </a:pPr>
-            <a:r>
-              <a:rPr sz="1600" b="0">
-                <a:solidFill>
-                  <a:srgbClr val="25342A"/>
-                </a:solidFill>
-                <a:latin typeface="Roboto"/>
-              </a:rPr>
-              <a:t>Usually the dearest money to raise: events are worth counting for what else they bring too (new donors, profile).</a:t>
-            </a:r>
-          </a:p>
-        </p:txBody>
-      </p:sp>
-      <p:sp>
-        <p:nvSpPr>
-          <p:cNvPr id="11" name="TextBox 10"/>
-          <p:cNvSpPr txBox="1"/>
-          <p:nvPr/>
-        </p:nvSpPr>
-        <p:spPr>
-          <a:xfrm>
-            <a:off x="457200" y="6492240"/>
-            <a:ext cx="3657600" cy="274320"/>
-          </a:xfrm>
-          <a:prstGeom prst="rect">
-            <a:avLst/>
-          </a:prstGeom>
-          <a:noFill/>
-        </p:spPr>
-        <p:txBody>
-          <a:bodyPr wrap="square">
-            <a:spAutoFit/>
-          </a:bodyPr>
-          <a:lstStyle/>
-          <a:p>
-            <a:pPr>
-              <a:defRPr>
-                <a:latin typeface="Roboto"/>
-              </a:defRPr>
-            </a:pPr>
-            <a:r>
-              <a:rPr sz="900" b="0">
-                <a:solidFill>
-                  <a:srgbClr val="5F6F63"/>
-                </a:solidFill>
-                <a:latin typeface="Roboto"/>
-              </a:rPr>
-              <a:t>cost-to-raise.pptx</a:t>
-            </a:r>
-          </a:p>
-        </p:txBody>
-      </p:sp>
-      <p:sp>
-        <p:nvSpPr>
-          <p:cNvPr id="12" name="TextBox 11"/>
-          <p:cNvSpPr txBox="1"/>
-          <p:nvPr/>
-        </p:nvSpPr>
-        <p:spPr>
-          <a:xfrm>
-            <a:off x="4297680" y="6492240"/>
-            <a:ext cx="3657600" cy="274320"/>
-          </a:xfrm>
-          <a:prstGeom prst="rect">
-            <a:avLst/>
-          </a:prstGeom>
-          <a:noFill/>
-        </p:spPr>
-        <p:txBody>
-          <a:bodyPr wrap="square">
-            <a:spAutoFit/>
-          </a:bodyPr>
-          <a:lstStyle/>
-          <a:p>
-            <a:pPr algn="ctr">
-              <a:defRPr>
-                <a:latin typeface="Roboto"/>
-              </a:defRPr>
-            </a:pPr>
-            <a:r>
-              <a:rPr sz="900" b="0">
-                <a:solidFill>
-                  <a:srgbClr val="5F6F63"/>
-                </a:solidFill>
-                <a:latin typeface="Roboto"/>
-              </a:rPr>
-              <a:t>Data retrieved 2pm, Tue 6 Oct 2026 · Sample data</a:t>
-            </a:r>
-          </a:p>
-        </p:txBody>
-      </p:sp>
-      <p:sp>
-        <p:nvSpPr>
-          <p:cNvPr id="13" name="TextBox 12"/>
-          <p:cNvSpPr txBox="1"/>
-          <p:nvPr/>
-        </p:nvSpPr>
-        <p:spPr>
-          <a:xfrm>
-            <a:off x="8503920" y="6492240"/>
-            <a:ext cx="3200400" cy="274320"/>
-          </a:xfrm>
-          <a:prstGeom prst="rect">
-            <a:avLst/>
-          </a:prstGeom>
-          <a:noFill/>
-        </p:spPr>
-        <p:txBody>
-          <a:bodyPr wrap="square">
-            <a:spAutoFit/>
-          </a:bodyPr>
-          <a:lstStyle/>
-          <a:p>
-            <a:pPr algn="r">
-              <a:defRPr>
-                <a:latin typeface="Roboto"/>
-              </a:defRPr>
-            </a:pPr>
-            <a:r>
-              <a:rPr sz="900" b="0">
-                <a:solidFill>
-                  <a:srgbClr val="5F6F63"/>
-                </a:solidFill>
-                <a:latin typeface="Roboto"/>
-              </a:rPr>
-              <a:t>Slide 10 of 11</a:t>
-            </a:r>
-          </a:p>
-        </p:txBody>
-      </p:sp>
-    </p:spTree>
-  </p:cSld>
-  <p:clrMapOvr>
-    <a:masterClrMapping/>
-  </p:clrMapOvr>
-</p:sld>
-</file>
-
-<file path=ppt/slides/slide11.xml><?xml version="1.0" encoding="utf-8"?>
-<p:sld xmlns:a="http://schemas.openxmlformats.org/drawingml/2006/main" xmlns:p="http://schemas.openxmlformats.org/presentationml/2006/main" xmlns:r="http://schemas.openxmlformats.org/officeDocument/2006/relationships">
-  <p:cSld>
-    <p:spTree>
-      <p:nvGrpSpPr>
-        <p:cNvPr id="1" name=""/>
-        <p:cNvGrpSpPr/>
-        <p:nvPr/>
-      </p:nvGrpSpPr>
-      <p:grpSpPr/>
-      <p:sp>
-        <p:nvSpPr>
-          <p:cNvPr id="2" name="Rectangle 1"/>
-          <p:cNvSpPr/>
-          <p:nvPr/>
-        </p:nvSpPr>
-        <p:spPr>
-          <a:xfrm>
-            <a:off x="0" y="0"/>
-            <a:ext cx="12191695" cy="73152"/>
-          </a:xfrm>
-          <a:prstGeom prst="rect">
-            <a:avLst/>
-          </a:prstGeom>
-          <a:solidFill>
-            <a:srgbClr val="2F7A5D"/>
-          </a:solidFill>
-          <a:ln>
-            <a:noFill/>
-          </a:ln>
-        </p:spPr>
-        <p:style>
-          <a:lnRef idx="1">
-            <a:schemeClr val="accent1"/>
-          </a:lnRef>
-          <a:fillRef idx="3">
-            <a:schemeClr val="accent1"/>
-          </a:fillRef>
-          <a:effectRef idx="2">
-            <a:schemeClr val="accent1"/>
-          </a:effectRef>
-          <a:fontRef idx="minor">
-            <a:schemeClr val="lt1"/>
-          </a:fontRef>
-        </p:style>
-        <p:txBody>
-          <a:bodyPr rtlCol="0" anchor="ctr"/>
-          <a:lstStyle/>
-          <a:p>
-            <a:pPr algn="ctr">
-              <a:defRPr>
-                <a:latin typeface="Roboto"/>
-              </a:defRPr>
-            </a:pPr>
-          </a:p>
-        </p:txBody>
-      </p:sp>
-      <p:sp>
-        <p:nvSpPr>
-          <p:cNvPr id="3" name="TextBox 2"/>
-          <p:cNvSpPr txBox="1"/>
-          <p:nvPr/>
-        </p:nvSpPr>
-        <p:spPr>
-          <a:xfrm>
-            <a:off x="457200" y="164592"/>
-            <a:ext cx="7315200" cy="274320"/>
-          </a:xfrm>
-          <a:prstGeom prst="rect">
-            <a:avLst/>
-          </a:prstGeom>
-          <a:noFill/>
-        </p:spPr>
-        <p:txBody>
-          <a:bodyPr wrap="square">
-            <a:spAutoFit/>
-          </a:bodyPr>
-          <a:lstStyle/>
-          <a:p>
-            <a:pPr>
-              <a:defRPr>
-                <a:latin typeface="Roboto"/>
-              </a:defRPr>
-            </a:pPr>
-            <a:r>
-              <a:rPr sz="1000" b="0">
-                <a:solidFill>
-                  <a:srgbClr val="5F6F63"/>
-                </a:solidFill>
-                <a:latin typeface="Roboto"/>
-              </a:rPr>
-              <a:t>Sample Community Services Ltd · What does it cost to raise a dollar?</a:t>
-            </a:r>
-          </a:p>
-        </p:txBody>
-      </p:sp>
-      <p:sp>
-        <p:nvSpPr>
-          <p:cNvPr id="4" name="TextBox 3"/>
-          <p:cNvSpPr txBox="1"/>
-          <p:nvPr/>
-        </p:nvSpPr>
-        <p:spPr>
-          <a:xfrm>
-            <a:off x="457200" y="411480"/>
-            <a:ext cx="11247120" cy="548640"/>
-          </a:xfrm>
-          <a:prstGeom prst="rect">
-            <a:avLst/>
-          </a:prstGeom>
-          <a:noFill/>
-        </p:spPr>
-        <p:txBody>
-          <a:bodyPr wrap="square">
-            <a:spAutoFit/>
-          </a:bodyPr>
-          <a:lstStyle/>
-          <a:p>
-            <a:pPr>
-              <a:defRPr>
-                <a:latin typeface="Roboto"/>
-              </a:defRPr>
-            </a:pPr>
-            <a:r>
-              <a:rPr sz="2400" b="1">
-                <a:solidFill>
-                  <a:srgbClr val="25342A"/>
-                </a:solidFill>
-                <a:latin typeface="Roboto"/>
-              </a:rPr>
-              <a:t>Cost to raise a dollar, by month (cents) · Cents per $1 · Every source at once</a:t>
-            </a:r>
-          </a:p>
-        </p:txBody>
-      </p:sp>
-      <p:sp>
-        <p:nvSpPr>
-          <p:cNvPr id="5" name="TextBox 4"/>
-          <p:cNvSpPr txBox="1"/>
-          <p:nvPr/>
-        </p:nvSpPr>
-        <p:spPr>
-          <a:xfrm>
-            <a:off x="457200" y="960120"/>
-            <a:ext cx="11247120" cy="457200"/>
-          </a:xfrm>
-          <a:prstGeom prst="rect">
-            <a:avLst/>
-          </a:prstGeom>
-          <a:noFill/>
-        </p:spPr>
-        <p:txBody>
-          <a:bodyPr wrap="square">
-            <a:spAutoFit/>
-          </a:bodyPr>
-          <a:lstStyle/>
-          <a:p>
-            <a:pPr>
-              <a:defRPr>
-                <a:latin typeface="Roboto"/>
-              </a:defRPr>
-            </a:pPr>
-            <a:r>
-              <a:rPr sz="1200" b="0">
-                <a:solidFill>
-                  <a:srgbClr val="5F6F63"/>
-                </a:solidFill>
-                <a:latin typeface="Roboto"/>
-              </a:rPr>
-              <a:t>Months with an event (the gala, the Christmas appeal) jump. A gap means nothing was raised that month.</a:t>
-            </a:r>
-          </a:p>
-        </p:txBody>
-      </p:sp>
-      <p:graphicFrame>
-        <p:nvGraphicFramePr>
-          <p:cNvPr id="6" name="Chart 5"/>
-          <p:cNvGraphicFramePr>
-            <a:graphicFrameLocks noGrp="1"/>
-          </p:cNvGraphicFramePr>
-          <p:nvPr/>
-        </p:nvGraphicFramePr>
-        <p:xfrm>
-          <a:off x="457200" y="1463040"/>
-          <a:ext cx="11247120" cy="4754880"/>
-        </p:xfrm>
-        <a:graphic>
-          <a:graphicData uri="http://schemas.openxmlformats.org/drawingml/2006/chart">
-            <c:chart xmlns:c="http://schemas.openxmlformats.org/drawingml/2006/chart" r:id="rId2"/>
-          </a:graphicData>
-        </a:graphic>
-      </p:graphicFrame>
-      <p:sp>
-        <p:nvSpPr>
-          <p:cNvPr id="7" name="TextBox 6"/>
-          <p:cNvSpPr txBox="1"/>
-          <p:nvPr/>
-        </p:nvSpPr>
-        <p:spPr>
-          <a:xfrm>
-            <a:off x="457200" y="6492240"/>
-            <a:ext cx="3657600" cy="274320"/>
-          </a:xfrm>
-          <a:prstGeom prst="rect">
-            <a:avLst/>
-          </a:prstGeom>
-          <a:noFill/>
-        </p:spPr>
-        <p:txBody>
-          <a:bodyPr wrap="square">
-            <a:spAutoFit/>
-          </a:bodyPr>
-          <a:lstStyle/>
-          <a:p>
-            <a:pPr>
-              <a:defRPr>
-                <a:latin typeface="Roboto"/>
-              </a:defRPr>
-            </a:pPr>
-            <a:r>
-              <a:rPr sz="900" b="0">
-                <a:solidFill>
-                  <a:srgbClr val="5F6F63"/>
-                </a:solidFill>
-                <a:latin typeface="Roboto"/>
-              </a:rPr>
-              <a:t>cost-to-raise.pptx</a:t>
-            </a:r>
-          </a:p>
-        </p:txBody>
-      </p:sp>
-      <p:sp>
-        <p:nvSpPr>
-          <p:cNvPr id="8" name="TextBox 7"/>
-          <p:cNvSpPr txBox="1"/>
-          <p:nvPr/>
-        </p:nvSpPr>
-        <p:spPr>
-          <a:xfrm>
-            <a:off x="4297680" y="6492240"/>
-            <a:ext cx="3657600" cy="274320"/>
-          </a:xfrm>
-          <a:prstGeom prst="rect">
-            <a:avLst/>
-          </a:prstGeom>
-          <a:noFill/>
-        </p:spPr>
-        <p:txBody>
-          <a:bodyPr wrap="square">
-            <a:spAutoFit/>
-          </a:bodyPr>
-          <a:lstStyle/>
-          <a:p>
-            <a:pPr algn="ctr">
-              <a:defRPr>
-                <a:latin typeface="Roboto"/>
-              </a:defRPr>
-            </a:pPr>
-            <a:r>
-              <a:rPr sz="900" b="0">
-                <a:solidFill>
-                  <a:srgbClr val="5F6F63"/>
-                </a:solidFill>
-                <a:latin typeface="Roboto"/>
-              </a:rPr>
-              <a:t>Data retrieved 2pm, Tue 6 Oct 2026 · Sample data</a:t>
-            </a:r>
-          </a:p>
-        </p:txBody>
-      </p:sp>
-      <p:sp>
-        <p:nvSpPr>
-          <p:cNvPr id="9" name="TextBox 8"/>
-          <p:cNvSpPr txBox="1"/>
-          <p:nvPr/>
-        </p:nvSpPr>
-        <p:spPr>
-          <a:xfrm>
-            <a:off x="8503920" y="6492240"/>
-            <a:ext cx="3200400" cy="274320"/>
-          </a:xfrm>
-          <a:prstGeom prst="rect">
-            <a:avLst/>
-          </a:prstGeom>
-          <a:noFill/>
-        </p:spPr>
-        <p:txBody>
-          <a:bodyPr wrap="square">
-            <a:spAutoFit/>
-          </a:bodyPr>
-          <a:lstStyle/>
-          <a:p>
-            <a:pPr algn="r">
-              <a:defRPr>
-                <a:latin typeface="Roboto"/>
-              </a:defRPr>
-            </a:pPr>
-            <a:r>
-              <a:rPr sz="900" b="0">
-                <a:solidFill>
-                  <a:srgbClr val="5F6F63"/>
-                </a:solidFill>
-                <a:latin typeface="Roboto"/>
-              </a:rPr>
-              <a:t>Slide 11 of 11</a:t>
+              <a:t>Slide 1 of 5</a:t>
             </a:r>
           </a:p>
         </p:txBody>
@@ -4872,7 +5265,44 @@
       <p:grpSpPr/>
       <p:sp>
         <p:nvSpPr>
-          <p:cNvPr id="2" name="Rectangle 1"/>
+          <p:cNvPr id="2" name="Title 1"/>
+          <p:cNvSpPr>
+            <a:spLocks noGrp="1"/>
+          </p:cNvSpPr>
+          <p:nvPr>
+            <p:ph type="title"/>
+          </p:nvPr>
+        </p:nvSpPr>
+        <p:spPr>
+          <a:xfrm>
+            <a:off x="457200" y="384048"/>
+            <a:ext cx="11277295" cy="475488"/>
+          </a:xfrm>
+        </p:spPr>
+        <p:txBody>
+          <a:bodyPr wrap="square" lIns="45720" rIns="45720" tIns="0" bIns="0" anchor="t"/>
+          <a:lstStyle/>
+          <a:p>
+            <a:pPr algn="l">
+              <a:defRPr>
+                <a:latin typeface="Roboto"/>
+              </a:defRPr>
+            </a:pPr>
+            <a:r>
+              <a:rPr sz="2400" b="1">
+                <a:solidFill>
+                  <a:srgbClr val="25342A"/>
+                </a:solidFill>
+                <a:latin typeface="Roboto"/>
+              </a:rPr>
+              <a:t>All fundraising</a:t>
+            </a:r>
+          </a:p>
+        </p:txBody>
+      </p:sp>
+      <p:sp>
+        <p:nvSpPr>
+          <p:cNvPr id="3" name="Rectangle 2"/>
           <p:cNvSpPr/>
           <p:nvPr/>
         </p:nvSpPr>
@@ -4919,53 +5349,14 @@
       </p:sp>
       <p:sp>
         <p:nvSpPr>
-          <p:cNvPr id="3" name="TextBox 2"/>
-          <p:cNvSpPr txBox="1"/>
-          <p:nvPr/>
-        </p:nvSpPr>
-        <p:spPr>
-          <a:xfrm>
-            <a:off x="457200" y="164592"/>
-            <a:ext cx="7315200" cy="274320"/>
-          </a:xfrm>
-          <a:prstGeom prst="rect">
-            <a:avLst/>
-          </a:prstGeom>
-          <a:noFill/>
-        </p:spPr>
-        <p:txBody>
-          <a:bodyPr wrap="square">
-            <a:spAutoFit/>
-          </a:bodyPr>
-          <a:lstStyle/>
-          <a:p>
-            <a:pPr>
-              <a:defRPr>
-                <a:latin typeface="Roboto"/>
-              </a:defRPr>
-            </a:pPr>
-            <a:r>
-              <a:rPr sz="1000" b="0">
-                <a:solidFill>
-                  <a:srgbClr val="5F6F63"/>
-                </a:solidFill>
-                <a:latin typeface="Roboto"/>
-              </a:rPr>
-              <a:t>Sample Community Services Ltd · What does it cost to raise a dollar?</a:t>
-            </a:r>
-          </a:p>
-        </p:txBody>
-      </p:sp>
-      <p:sp>
-        <p:nvSpPr>
           <p:cNvPr id="4" name="TextBox 3"/>
           <p:cNvSpPr txBox="1"/>
           <p:nvPr/>
         </p:nvSpPr>
         <p:spPr>
           <a:xfrm>
-            <a:off x="457200" y="411480"/>
-            <a:ext cx="11247120" cy="548640"/>
+            <a:off x="457200" y="146304"/>
+            <a:ext cx="8229600" cy="256032"/>
           </a:xfrm>
           <a:prstGeom prst="rect">
             <a:avLst/>
@@ -4973,7 +5364,7 @@
           <a:noFill/>
         </p:spPr>
         <p:txBody>
-          <a:bodyPr wrap="square">
+          <a:bodyPr wrap="square" lIns="45720" rIns="45720">
             <a:spAutoFit/>
           </a:bodyPr>
           <a:lstStyle/>
@@ -4984,27 +5375,66 @@
               </a:defRPr>
             </a:pPr>
             <a:r>
-              <a:rPr sz="2400" b="1">
-                <a:solidFill>
-                  <a:srgbClr val="25342A"/>
+              <a:rPr sz="1000" b="0">
+                <a:solidFill>
+                  <a:srgbClr val="5F6F63"/>
                 </a:solidFill>
                 <a:latin typeface="Roboto"/>
               </a:rPr>
-              <a:t>Headline numbers · Source: All fundraising</a:t>
-            </a:r>
-          </a:p>
-        </p:txBody>
-      </p:sp>
-      <p:sp>
-        <p:nvSpPr>
-          <p:cNvPr id="5" name="Rectangle 4"/>
+              <a:t>Sample Community Services Ltd · What does it cost to raise a dollar?</a:t>
+            </a:r>
+          </a:p>
+        </p:txBody>
+      </p:sp>
+      <p:sp>
+        <p:nvSpPr>
+          <p:cNvPr id="5" name="TextBox 4"/>
+          <p:cNvSpPr txBox="1"/>
+          <p:nvPr/>
+        </p:nvSpPr>
+        <p:spPr>
+          <a:xfrm>
+            <a:off x="457200" y="914400"/>
+            <a:ext cx="11277295" cy="263652"/>
+          </a:xfrm>
+          <a:prstGeom prst="rect">
+            <a:avLst/>
+          </a:prstGeom>
+          <a:noFill/>
+        </p:spPr>
+        <p:txBody>
+          <a:bodyPr wrap="square" lIns="45720" rIns="45720">
+            <a:spAutoFit/>
+          </a:bodyPr>
+          <a:lstStyle/>
+          <a:p>
+            <a:pPr>
+              <a:defRPr>
+                <a:latin typeface="Roboto"/>
+              </a:defRPr>
+            </a:pPr>
+            <a:r>
+              <a:rPr sz="1200" b="0">
+                <a:solidFill>
+                  <a:srgbClr val="5F6F63"/>
+                </a:solidFill>
+                <a:latin typeface="Roboto"/>
+              </a:rPr>
+              <a:t>Cost to raise a dollar, by source, September 2026 (cents)</a:t>
+            </a:r>
+          </a:p>
+        </p:txBody>
+      </p:sp>
+      <p:sp>
+        <p:nvSpPr>
+          <p:cNvPr id="6" name="Rectangle 5"/>
           <p:cNvSpPr/>
           <p:nvPr/>
         </p:nvSpPr>
         <p:spPr>
           <a:xfrm>
-            <a:off x="457200" y="1645920"/>
-            <a:ext cx="5501487" cy="2011680"/>
+            <a:off x="457200" y="1278636"/>
+            <a:ext cx="5524347" cy="1188720"/>
           </a:xfrm>
           <a:prstGeom prst="rect">
             <a:avLst/>
@@ -5046,53 +5476,14 @@
       </p:sp>
       <p:sp>
         <p:nvSpPr>
-          <p:cNvPr id="6" name="TextBox 5"/>
-          <p:cNvSpPr txBox="1"/>
-          <p:nvPr/>
-        </p:nvSpPr>
-        <p:spPr>
-          <a:xfrm>
-            <a:off x="640080" y="1783080"/>
-            <a:ext cx="5135727" cy="457200"/>
-          </a:xfrm>
-          <a:prstGeom prst="rect">
-            <a:avLst/>
-          </a:prstGeom>
-          <a:noFill/>
-        </p:spPr>
-        <p:txBody>
-          <a:bodyPr wrap="square">
-            <a:spAutoFit/>
-          </a:bodyPr>
-          <a:lstStyle/>
-          <a:p>
-            <a:pPr>
-              <a:defRPr>
-                <a:latin typeface="Roboto"/>
-              </a:defRPr>
-            </a:pPr>
-            <a:r>
-              <a:rPr sz="1200" b="0">
-                <a:solidFill>
-                  <a:srgbClr val="5F6F63"/>
-                </a:solidFill>
-                <a:latin typeface="Roboto"/>
-              </a:rPr>
-              <a:t>September · all fundraising</a:t>
-            </a:r>
-          </a:p>
-        </p:txBody>
-      </p:sp>
-      <p:sp>
-        <p:nvSpPr>
           <p:cNvPr id="7" name="TextBox 6"/>
           <p:cNvSpPr txBox="1"/>
           <p:nvPr/>
         </p:nvSpPr>
         <p:spPr>
           <a:xfrm>
-            <a:off x="640080" y="2240280"/>
-            <a:ext cx="5135727" cy="731520"/>
+            <a:off x="594360" y="1351788"/>
+            <a:ext cx="5250027" cy="384048"/>
           </a:xfrm>
           <a:prstGeom prst="rect">
             <a:avLst/>
@@ -5100,7 +5491,7 @@
           <a:noFill/>
         </p:spPr>
         <p:txBody>
-          <a:bodyPr wrap="square">
+          <a:bodyPr wrap="square" lIns="45720" rIns="45720">
             <a:spAutoFit/>
           </a:bodyPr>
           <a:lstStyle/>
@@ -5111,13 +5502,13 @@
               </a:defRPr>
             </a:pPr>
             <a:r>
-              <a:rPr sz="3000" b="1">
-                <a:solidFill>
-                  <a:srgbClr val="2F7A5D"/>
+              <a:rPr sz="1100" b="0">
+                <a:solidFill>
+                  <a:srgbClr val="5F6F63"/>
                 </a:solidFill>
                 <a:latin typeface="Roboto"/>
               </a:rPr>
-              <a:t>20¢</a:t>
+              <a:t>September · all fundraising</a:t>
             </a:r>
           </a:p>
         </p:txBody>
@@ -5130,8 +5521,8 @@
         </p:nvSpPr>
         <p:spPr>
           <a:xfrm>
-            <a:off x="640080" y="3017520"/>
-            <a:ext cx="5135727" cy="548640"/>
+            <a:off x="594360" y="1717548"/>
+            <a:ext cx="5250027" cy="502920"/>
           </a:xfrm>
           <a:prstGeom prst="rect">
             <a:avLst/>
@@ -5139,7 +5530,7 @@
           <a:noFill/>
         </p:spPr>
         <p:txBody>
-          <a:bodyPr wrap="square">
+          <a:bodyPr wrap="square" lIns="45720" rIns="45720">
             <a:spAutoFit/>
           </a:bodyPr>
           <a:lstStyle/>
@@ -5150,7 +5541,46 @@
               </a:defRPr>
             </a:pPr>
             <a:r>
-              <a:rPr sz="1100" b="0">
+              <a:rPr sz="2200" b="1">
+                <a:solidFill>
+                  <a:srgbClr val="2F7A5D"/>
+                </a:solidFill>
+                <a:latin typeface="Roboto"/>
+              </a:rPr>
+              <a:t>20¢</a:t>
+            </a:r>
+          </a:p>
+        </p:txBody>
+      </p:sp>
+      <p:sp>
+        <p:nvSpPr>
+          <p:cNvPr id="9" name="TextBox 8"/>
+          <p:cNvSpPr txBox="1"/>
+          <p:nvPr/>
+        </p:nvSpPr>
+        <p:spPr>
+          <a:xfrm>
+            <a:off x="594360" y="2083308"/>
+            <a:ext cx="5250027" cy="329184"/>
+          </a:xfrm>
+          <a:prstGeom prst="rect">
+            <a:avLst/>
+          </a:prstGeom>
+          <a:noFill/>
+        </p:spPr>
+        <p:txBody>
+          <a:bodyPr wrap="square" lIns="45720" rIns="45720">
+            <a:spAutoFit/>
+          </a:bodyPr>
+          <a:lstStyle/>
+          <a:p>
+            <a:pPr>
+              <a:defRPr>
+                <a:latin typeface="Roboto"/>
+              </a:defRPr>
+            </a:pPr>
+            <a:r>
+              <a:rPr sz="1000" b="0">
                 <a:solidFill>
                   <a:srgbClr val="5F6F63"/>
                 </a:solidFill>
@@ -5163,14 +5593,14 @@
       </p:sp>
       <p:sp>
         <p:nvSpPr>
-          <p:cNvPr id="9" name="Rectangle 8"/>
+          <p:cNvPr id="10" name="Rectangle 9"/>
           <p:cNvSpPr/>
           <p:nvPr/>
         </p:nvSpPr>
         <p:spPr>
           <a:xfrm>
-            <a:off x="6233007" y="1645920"/>
-            <a:ext cx="5501487" cy="2011680"/>
+            <a:off x="6210147" y="1278636"/>
+            <a:ext cx="5524347" cy="1188720"/>
           </a:xfrm>
           <a:prstGeom prst="rect">
             <a:avLst/>
@@ -5212,53 +5642,14 @@
       </p:sp>
       <p:sp>
         <p:nvSpPr>
-          <p:cNvPr id="10" name="TextBox 9"/>
-          <p:cNvSpPr txBox="1"/>
-          <p:nvPr/>
-        </p:nvSpPr>
-        <p:spPr>
-          <a:xfrm>
-            <a:off x="6415887" y="1783080"/>
-            <a:ext cx="5135727" cy="457200"/>
-          </a:xfrm>
-          <a:prstGeom prst="rect">
-            <a:avLst/>
-          </a:prstGeom>
-          <a:noFill/>
-        </p:spPr>
-        <p:txBody>
-          <a:bodyPr wrap="square">
-            <a:spAutoFit/>
-          </a:bodyPr>
-          <a:lstStyle/>
-          <a:p>
-            <a:pPr>
-              <a:defRPr>
-                <a:latin typeface="Roboto"/>
-              </a:defRPr>
-            </a:pPr>
-            <a:r>
-              <a:rPr sz="1200" b="0">
-                <a:solidFill>
-                  <a:srgbClr val="5F6F63"/>
-                </a:solidFill>
-                <a:latin typeface="Roboto"/>
-              </a:rPr>
-              <a:t>Year to date (Jul to Sep 2026)</a:t>
-            </a:r>
-          </a:p>
-        </p:txBody>
-      </p:sp>
-      <p:sp>
-        <p:nvSpPr>
           <p:cNvPr id="11" name="TextBox 10"/>
           <p:cNvSpPr txBox="1"/>
           <p:nvPr/>
         </p:nvSpPr>
         <p:spPr>
           <a:xfrm>
-            <a:off x="6415887" y="2240280"/>
-            <a:ext cx="5135727" cy="731520"/>
+            <a:off x="6347307" y="1351788"/>
+            <a:ext cx="5250027" cy="384048"/>
           </a:xfrm>
           <a:prstGeom prst="rect">
             <a:avLst/>
@@ -5266,7 +5657,7 @@
           <a:noFill/>
         </p:spPr>
         <p:txBody>
-          <a:bodyPr wrap="square">
+          <a:bodyPr wrap="square" lIns="45720" rIns="45720">
             <a:spAutoFit/>
           </a:bodyPr>
           <a:lstStyle/>
@@ -5277,13 +5668,13 @@
               </a:defRPr>
             </a:pPr>
             <a:r>
-              <a:rPr sz="3000" b="1">
-                <a:solidFill>
-                  <a:srgbClr val="2F7A5D"/>
+              <a:rPr sz="1100" b="0">
+                <a:solidFill>
+                  <a:srgbClr val="5F6F63"/>
                 </a:solidFill>
                 <a:latin typeface="Roboto"/>
               </a:rPr>
-              <a:t>15¢</a:t>
+              <a:t>Year to date (Jul to Sep 2026)</a:t>
             </a:r>
           </a:p>
         </p:txBody>
@@ -5296,8 +5687,8 @@
         </p:nvSpPr>
         <p:spPr>
           <a:xfrm>
-            <a:off x="6415887" y="3017520"/>
-            <a:ext cx="5135727" cy="548640"/>
+            <a:off x="6347307" y="1717548"/>
+            <a:ext cx="5250027" cy="502920"/>
           </a:xfrm>
           <a:prstGeom prst="rect">
             <a:avLst/>
@@ -5305,7 +5696,7 @@
           <a:noFill/>
         </p:spPr>
         <p:txBody>
-          <a:bodyPr wrap="square">
+          <a:bodyPr wrap="square" lIns="45720" rIns="45720">
             <a:spAutoFit/>
           </a:bodyPr>
           <a:lstStyle/>
@@ -5316,13 +5707,13 @@
               </a:defRPr>
             </a:pPr>
             <a:r>
-              <a:rPr sz="1100" b="0">
-                <a:solidFill>
-                  <a:srgbClr val="5F6F63"/>
+              <a:rPr sz="2200" b="1">
+                <a:solidFill>
+                  <a:srgbClr val="2F7A5D"/>
                 </a:solidFill>
                 <a:latin typeface="Roboto"/>
               </a:rPr>
-              <a:t>same period last year: 16¢</a:t>
+              <a:t>15¢</a:t>
             </a:r>
           </a:p>
         </p:txBody>
@@ -5335,8 +5726,8 @@
         </p:nvSpPr>
         <p:spPr>
           <a:xfrm>
-            <a:off x="457200" y="6492240"/>
-            <a:ext cx="3657600" cy="274320"/>
+            <a:off x="6347307" y="2083308"/>
+            <a:ext cx="5250027" cy="329184"/>
           </a:xfrm>
           <a:prstGeom prst="rect">
             <a:avLst/>
@@ -5344,7 +5735,7 @@
           <a:noFill/>
         </p:spPr>
         <p:txBody>
-          <a:bodyPr wrap="square">
+          <a:bodyPr wrap="square" lIns="45720" rIns="45720">
             <a:spAutoFit/>
           </a:bodyPr>
           <a:lstStyle/>
@@ -5355,6 +5746,317 @@
               </a:defRPr>
             </a:pPr>
             <a:r>
+              <a:rPr sz="1000" b="0">
+                <a:solidFill>
+                  <a:srgbClr val="5F6F63"/>
+                </a:solidFill>
+                <a:latin typeface="Roboto"/>
+              </a:rPr>
+              <a:t>same period last year: 16¢</a:t>
+            </a:r>
+          </a:p>
+        </p:txBody>
+      </p:sp>
+      <p:graphicFrame>
+        <p:nvGraphicFramePr>
+          <p:cNvPr id="14" name="Chart 13"/>
+          <p:cNvGraphicFramePr>
+            <a:graphicFrameLocks noGrp="1"/>
+          </p:cNvGraphicFramePr>
+          <p:nvPr/>
+        </p:nvGraphicFramePr>
+        <p:xfrm>
+          <a:off x="457200" y="2604516"/>
+          <a:ext cx="11277295" cy="1883664"/>
+        </p:xfrm>
+        <a:graphic>
+          <a:graphicData uri="http://schemas.openxmlformats.org/drawingml/2006/chart">
+            <c:chart xmlns:c="http://schemas.openxmlformats.org/drawingml/2006/chart" r:id="rId3"/>
+          </a:graphicData>
+        </a:graphic>
+      </p:graphicFrame>
+      <p:sp>
+        <p:nvSpPr>
+          <p:cNvPr id="15" name="Rectangle 14"/>
+          <p:cNvSpPr/>
+          <p:nvPr/>
+        </p:nvSpPr>
+        <p:spPr>
+          <a:xfrm>
+            <a:off x="457200" y="4579620"/>
+            <a:ext cx="5501487" cy="1295400"/>
+          </a:xfrm>
+          <a:prstGeom prst="rect">
+            <a:avLst/>
+          </a:prstGeom>
+          <a:solidFill>
+            <a:srgbClr val="FFFFFF"/>
+          </a:solidFill>
+          <a:ln>
+            <a:solidFill>
+              <a:srgbClr val="DCE8DC"/>
+            </a:solidFill>
+          </a:ln>
+        </p:spPr>
+        <p:style>
+          <a:lnRef idx="1">
+            <a:schemeClr val="accent1"/>
+          </a:lnRef>
+          <a:fillRef idx="3">
+            <a:schemeClr val="accent1"/>
+          </a:fillRef>
+          <a:effectRef idx="2">
+            <a:schemeClr val="accent1"/>
+          </a:effectRef>
+          <a:fontRef idx="minor">
+            <a:schemeClr val="lt1"/>
+          </a:fontRef>
+        </p:style>
+        <p:txBody>
+          <a:bodyPr rtlCol="0" anchor="ctr"/>
+          <a:lstStyle/>
+          <a:p>
+            <a:pPr algn="ctr">
+              <a:defRPr>
+                <a:latin typeface="Roboto"/>
+              </a:defRPr>
+            </a:pPr>
+          </a:p>
+        </p:txBody>
+      </p:sp>
+      <p:sp>
+        <p:nvSpPr>
+          <p:cNvPr id="16" name="TextBox 15"/>
+          <p:cNvSpPr txBox="1"/>
+          <p:nvPr/>
+        </p:nvSpPr>
+        <p:spPr>
+          <a:xfrm>
+            <a:off x="594360" y="4634484"/>
+            <a:ext cx="5227167" cy="274320"/>
+          </a:xfrm>
+          <a:prstGeom prst="rect">
+            <a:avLst/>
+          </a:prstGeom>
+          <a:noFill/>
+        </p:spPr>
+        <p:txBody>
+          <a:bodyPr wrap="square" lIns="45720" rIns="45720">
+            <a:spAutoFit/>
+          </a:bodyPr>
+          <a:lstStyle/>
+          <a:p>
+            <a:pPr>
+              <a:defRPr>
+                <a:latin typeface="Roboto"/>
+              </a:defRPr>
+            </a:pPr>
+            <a:r>
+              <a:rPr sz="1000" b="1">
+                <a:solidFill>
+                  <a:srgbClr val="5F6F63"/>
+                </a:solidFill>
+                <a:latin typeface="Roboto"/>
+              </a:rPr>
+              <a:t>WHAT IT SHOWS</a:t>
+            </a:r>
+          </a:p>
+        </p:txBody>
+      </p:sp>
+      <p:sp>
+        <p:nvSpPr>
+          <p:cNvPr id="17" name="TextBox 16"/>
+          <p:cNvSpPr txBox="1"/>
+          <p:nvPr/>
+        </p:nvSpPr>
+        <p:spPr>
+          <a:xfrm>
+            <a:off x="594360" y="4908804"/>
+            <a:ext cx="5227167" cy="929640"/>
+          </a:xfrm>
+          <a:prstGeom prst="rect">
+            <a:avLst/>
+          </a:prstGeom>
+          <a:noFill/>
+        </p:spPr>
+        <p:txBody>
+          <a:bodyPr wrap="square" lIns="45720" rIns="45720">
+            <a:spAutoFit/>
+          </a:bodyPr>
+          <a:lstStyle/>
+          <a:p>
+            <a:pPr>
+              <a:defRPr>
+                <a:latin typeface="Roboto"/>
+              </a:defRPr>
+            </a:pPr>
+            <a:r>
+              <a:rPr sz="1200" b="0">
+                <a:solidFill>
+                  <a:srgbClr val="25342A"/>
+                </a:solidFill>
+                <a:latin typeface="Roboto"/>
+              </a:rPr>
+              <a:t>September cost 20¢ to raise each dollar, against 13¢ in August. Fundraising events raised $41,600 and cost $16,900. This financial year to date it has cost 15¢ a dollar, against 16¢ in the same period last year.</a:t>
+            </a:r>
+          </a:p>
+        </p:txBody>
+      </p:sp>
+      <p:sp>
+        <p:nvSpPr>
+          <p:cNvPr id="18" name="Rectangle 17"/>
+          <p:cNvSpPr/>
+          <p:nvPr/>
+        </p:nvSpPr>
+        <p:spPr>
+          <a:xfrm>
+            <a:off x="6233007" y="4579620"/>
+            <a:ext cx="5501487" cy="1295400"/>
+          </a:xfrm>
+          <a:prstGeom prst="rect">
+            <a:avLst/>
+          </a:prstGeom>
+          <a:solidFill>
+            <a:srgbClr val="EEF5F0"/>
+          </a:solidFill>
+          <a:ln>
+            <a:solidFill>
+              <a:srgbClr val="DCE8DC"/>
+            </a:solidFill>
+          </a:ln>
+        </p:spPr>
+        <p:style>
+          <a:lnRef idx="1">
+            <a:schemeClr val="accent1"/>
+          </a:lnRef>
+          <a:fillRef idx="3">
+            <a:schemeClr val="accent1"/>
+          </a:fillRef>
+          <a:effectRef idx="2">
+            <a:schemeClr val="accent1"/>
+          </a:effectRef>
+          <a:fontRef idx="minor">
+            <a:schemeClr val="lt1"/>
+          </a:fontRef>
+        </p:style>
+        <p:txBody>
+          <a:bodyPr rtlCol="0" anchor="ctr"/>
+          <a:lstStyle/>
+          <a:p>
+            <a:pPr algn="ctr">
+              <a:defRPr>
+                <a:latin typeface="Roboto"/>
+              </a:defRPr>
+            </a:pPr>
+          </a:p>
+        </p:txBody>
+      </p:sp>
+      <p:sp>
+        <p:nvSpPr>
+          <p:cNvPr id="19" name="TextBox 18"/>
+          <p:cNvSpPr txBox="1"/>
+          <p:nvPr/>
+        </p:nvSpPr>
+        <p:spPr>
+          <a:xfrm>
+            <a:off x="6370167" y="4634484"/>
+            <a:ext cx="5227167" cy="274320"/>
+          </a:xfrm>
+          <a:prstGeom prst="rect">
+            <a:avLst/>
+          </a:prstGeom>
+          <a:noFill/>
+        </p:spPr>
+        <p:txBody>
+          <a:bodyPr wrap="square" lIns="45720" rIns="45720">
+            <a:spAutoFit/>
+          </a:bodyPr>
+          <a:lstStyle/>
+          <a:p>
+            <a:pPr>
+              <a:defRPr>
+                <a:latin typeface="Roboto"/>
+              </a:defRPr>
+            </a:pPr>
+            <a:r>
+              <a:rPr sz="1000" b="1">
+                <a:solidFill>
+                  <a:srgbClr val="5F6F63"/>
+                </a:solidFill>
+                <a:latin typeface="Roboto"/>
+              </a:rPr>
+              <a:t>WHAT YOU'D DO ABOUT IT</a:t>
+            </a:r>
+          </a:p>
+        </p:txBody>
+      </p:sp>
+      <p:sp>
+        <p:nvSpPr>
+          <p:cNvPr id="20" name="TextBox 19"/>
+          <p:cNvSpPr txBox="1"/>
+          <p:nvPr/>
+        </p:nvSpPr>
+        <p:spPr>
+          <a:xfrm>
+            <a:off x="6370167" y="4908804"/>
+            <a:ext cx="5227167" cy="929640"/>
+          </a:xfrm>
+          <a:prstGeom prst="rect">
+            <a:avLst/>
+          </a:prstGeom>
+          <a:noFill/>
+        </p:spPr>
+        <p:txBody>
+          <a:bodyPr wrap="square" lIns="45720" rIns="45720">
+            <a:spAutoFit/>
+          </a:bodyPr>
+          <a:lstStyle/>
+          <a:p>
+            <a:pPr>
+              <a:defRPr>
+                <a:latin typeface="Roboto"/>
+              </a:defRPr>
+            </a:pPr>
+            <a:r>
+              <a:rPr sz="1200" b="0">
+                <a:solidFill>
+                  <a:srgbClr val="25342A"/>
+                </a:solidFill>
+                <a:latin typeface="Roboto"/>
+              </a:rPr>
+              <a:t>The year-to-date figure is steadier than single months: events make some months jump. Pick a source above to see which one moves it.</a:t>
+            </a:r>
+          </a:p>
+        </p:txBody>
+      </p:sp>
+      <p:sp>
+        <p:nvSpPr>
+          <p:cNvPr id="21" name="TextBox 20"/>
+          <p:cNvSpPr txBox="1"/>
+          <p:nvPr/>
+        </p:nvSpPr>
+        <p:spPr>
+          <a:xfrm>
+            <a:off x="457200" y="6492240"/>
+            <a:ext cx="2926080" cy="274320"/>
+          </a:xfrm>
+          <a:prstGeom prst="rect">
+            <a:avLst/>
+          </a:prstGeom>
+          <a:noFill/>
+        </p:spPr>
+        <p:txBody>
+          <a:bodyPr wrap="square" lIns="45720" rIns="45720">
+            <a:spAutoFit/>
+          </a:bodyPr>
+          <a:lstStyle/>
+          <a:p>
+            <a:pPr>
+              <a:defRPr>
+                <a:latin typeface="Roboto"/>
+              </a:defRPr>
+            </a:pPr>
+            <a:r>
               <a:rPr sz="900" b="0">
                 <a:solidFill>
                   <a:srgbClr val="5F6F63"/>
@@ -5368,14 +6070,14 @@
       </p:sp>
       <p:sp>
         <p:nvSpPr>
-          <p:cNvPr id="14" name="TextBox 13"/>
+          <p:cNvPr id="22" name="TextBox 21"/>
           <p:cNvSpPr txBox="1"/>
           <p:nvPr/>
         </p:nvSpPr>
         <p:spPr>
           <a:xfrm>
-            <a:off x="4297680" y="6492240"/>
-            <a:ext cx="3657600" cy="274320"/>
+            <a:off x="3108960" y="6492240"/>
+            <a:ext cx="5943600" cy="274320"/>
           </a:xfrm>
           <a:prstGeom prst="rect">
             <a:avLst/>
@@ -5383,7 +6085,7 @@
           <a:noFill/>
         </p:spPr>
         <p:txBody>
-          <a:bodyPr wrap="square">
+          <a:bodyPr wrap="square" lIns="45720" rIns="45720">
             <a:spAutoFit/>
           </a:bodyPr>
           <a:lstStyle/>
@@ -5400,14 +6102,14 @@
                 </a:solidFill>
                 <a:latin typeface="Roboto"/>
               </a:rPr>
-              <a:t>Data retrieved 2pm, Tue 6 Oct 2026 · Sample data</a:t>
-            </a:r>
-          </a:p>
-        </p:txBody>
-      </p:sp>
-      <p:sp>
-        <p:nvSpPr>
-          <p:cNvPr id="15" name="TextBox 14"/>
+              <a:t>Data retrieved 2pm, Tue 6 Oct 2026 · Generated 8 Oct 2026, 9:35am · Sample data · Made with Python (python-pptx)</a:t>
+            </a:r>
+          </a:p>
+        </p:txBody>
+      </p:sp>
+      <p:sp>
+        <p:nvSpPr>
+          <p:cNvPr id="23" name="TextBox 22"/>
           <p:cNvSpPr txBox="1"/>
           <p:nvPr/>
         </p:nvSpPr>
@@ -5422,7 +6124,7 @@
           <a:noFill/>
         </p:spPr>
         <p:txBody>
-          <a:bodyPr wrap="square">
+          <a:bodyPr wrap="square" lIns="45720" rIns="45720">
             <a:spAutoFit/>
           </a:bodyPr>
           <a:lstStyle/>
@@ -5439,7 +6141,7 @@
                 </a:solidFill>
                 <a:latin typeface="Roboto"/>
               </a:rPr>
-              <a:t>Slide 2 of 11</a:t>
+              <a:t>Slide 2 of 5</a:t>
             </a:r>
           </a:p>
         </p:txBody>
@@ -5464,7 +6166,44 @@
       <p:grpSpPr/>
       <p:sp>
         <p:nvSpPr>
-          <p:cNvPr id="2" name="Rectangle 1"/>
+          <p:cNvPr id="2" name="Title 1"/>
+          <p:cNvSpPr>
+            <a:spLocks noGrp="1"/>
+          </p:cNvSpPr>
+          <p:nvPr>
+            <p:ph type="title"/>
+          </p:nvPr>
+        </p:nvSpPr>
+        <p:spPr>
+          <a:xfrm>
+            <a:off x="457200" y="384048"/>
+            <a:ext cx="11277295" cy="475488"/>
+          </a:xfrm>
+        </p:spPr>
+        <p:txBody>
+          <a:bodyPr wrap="square" lIns="45720" rIns="45720" tIns="0" bIns="0" anchor="t"/>
+          <a:lstStyle/>
+          <a:p>
+            <a:pPr algn="l">
+              <a:defRPr>
+                <a:latin typeface="Roboto"/>
+              </a:defRPr>
+            </a:pPr>
+            <a:r>
+              <a:rPr sz="2400" b="1">
+                <a:solidFill>
+                  <a:srgbClr val="25342A"/>
+                </a:solidFill>
+                <a:latin typeface="Roboto"/>
+              </a:rPr>
+              <a:t>Grants</a:t>
+            </a:r>
+          </a:p>
+        </p:txBody>
+      </p:sp>
+      <p:sp>
+        <p:nvSpPr>
+          <p:cNvPr id="3" name="Rectangle 2"/>
           <p:cNvSpPr/>
           <p:nvPr/>
         </p:nvSpPr>
@@ -5511,53 +6250,14 @@
       </p:sp>
       <p:sp>
         <p:nvSpPr>
-          <p:cNvPr id="3" name="TextBox 2"/>
-          <p:cNvSpPr txBox="1"/>
-          <p:nvPr/>
-        </p:nvSpPr>
-        <p:spPr>
-          <a:xfrm>
-            <a:off x="457200" y="164592"/>
-            <a:ext cx="7315200" cy="274320"/>
-          </a:xfrm>
-          <a:prstGeom prst="rect">
-            <a:avLst/>
-          </a:prstGeom>
-          <a:noFill/>
-        </p:spPr>
-        <p:txBody>
-          <a:bodyPr wrap="square">
-            <a:spAutoFit/>
-          </a:bodyPr>
-          <a:lstStyle/>
-          <a:p>
-            <a:pPr>
-              <a:defRPr>
-                <a:latin typeface="Roboto"/>
-              </a:defRPr>
-            </a:pPr>
-            <a:r>
-              <a:rPr sz="1000" b="0">
-                <a:solidFill>
-                  <a:srgbClr val="5F6F63"/>
-                </a:solidFill>
-                <a:latin typeface="Roboto"/>
-              </a:rPr>
-              <a:t>Sample Community Services Ltd · What does it cost to raise a dollar?</a:t>
-            </a:r>
-          </a:p>
-        </p:txBody>
-      </p:sp>
-      <p:sp>
-        <p:nvSpPr>
           <p:cNvPr id="4" name="TextBox 3"/>
           <p:cNvSpPr txBox="1"/>
           <p:nvPr/>
         </p:nvSpPr>
         <p:spPr>
           <a:xfrm>
-            <a:off x="457200" y="411480"/>
-            <a:ext cx="11247120" cy="548640"/>
+            <a:off x="457200" y="146304"/>
+            <a:ext cx="8229600" cy="256032"/>
           </a:xfrm>
           <a:prstGeom prst="rect">
             <a:avLst/>
@@ -5565,7 +6265,7 @@
           <a:noFill/>
         </p:spPr>
         <p:txBody>
-          <a:bodyPr wrap="square">
+          <a:bodyPr wrap="square" lIns="45720" rIns="45720">
             <a:spAutoFit/>
           </a:bodyPr>
           <a:lstStyle/>
@@ -5576,45 +6276,465 @@
               </a:defRPr>
             </a:pPr>
             <a:r>
-              <a:rPr sz="2400" b="1">
-                <a:solidFill>
-                  <a:srgbClr val="25342A"/>
+              <a:rPr sz="1000" b="0">
+                <a:solidFill>
+                  <a:srgbClr val="5F6F63"/>
                 </a:solidFill>
                 <a:latin typeface="Roboto"/>
               </a:rPr>
-              <a:t>Cost to raise a dollar, by source, September 2026 (cents) · Source: All fundraising</a:t>
+              <a:t>Sample Community Services Ltd · What does it cost to raise a dollar?</a:t>
+            </a:r>
+          </a:p>
+        </p:txBody>
+      </p:sp>
+      <p:sp>
+        <p:nvSpPr>
+          <p:cNvPr id="5" name="TextBox 4"/>
+          <p:cNvSpPr txBox="1"/>
+          <p:nvPr/>
+        </p:nvSpPr>
+        <p:spPr>
+          <a:xfrm>
+            <a:off x="457200" y="914400"/>
+            <a:ext cx="11277295" cy="263652"/>
+          </a:xfrm>
+          <a:prstGeom prst="rect">
+            <a:avLst/>
+          </a:prstGeom>
+          <a:noFill/>
+        </p:spPr>
+        <p:txBody>
+          <a:bodyPr wrap="square" lIns="45720" rIns="45720">
+            <a:spAutoFit/>
+          </a:bodyPr>
+          <a:lstStyle/>
+          <a:p>
+            <a:pPr>
+              <a:defRPr>
+                <a:latin typeface="Roboto"/>
+              </a:defRPr>
+            </a:pPr>
+            <a:r>
+              <a:rPr sz="1200" b="0">
+                <a:solidFill>
+                  <a:srgbClr val="5F6F63"/>
+                </a:solidFill>
+                <a:latin typeface="Roboto"/>
+              </a:rPr>
+              <a:t>Cost to raise a dollar, by month (cents) · Grants</a:t>
+            </a:r>
+          </a:p>
+        </p:txBody>
+      </p:sp>
+      <p:sp>
+        <p:nvSpPr>
+          <p:cNvPr id="6" name="Rectangle 5"/>
+          <p:cNvSpPr/>
+          <p:nvPr/>
+        </p:nvSpPr>
+        <p:spPr>
+          <a:xfrm>
+            <a:off x="457200" y="1278636"/>
+            <a:ext cx="5524347" cy="1188720"/>
+          </a:xfrm>
+          <a:prstGeom prst="rect">
+            <a:avLst/>
+          </a:prstGeom>
+          <a:solidFill>
+            <a:srgbClr val="F7FAF7"/>
+          </a:solidFill>
+          <a:ln>
+            <a:solidFill>
+              <a:srgbClr val="DCE8DC"/>
+            </a:solidFill>
+          </a:ln>
+        </p:spPr>
+        <p:style>
+          <a:lnRef idx="1">
+            <a:schemeClr val="accent1"/>
+          </a:lnRef>
+          <a:fillRef idx="3">
+            <a:schemeClr val="accent1"/>
+          </a:fillRef>
+          <a:effectRef idx="2">
+            <a:schemeClr val="accent1"/>
+          </a:effectRef>
+          <a:fontRef idx="minor">
+            <a:schemeClr val="lt1"/>
+          </a:fontRef>
+        </p:style>
+        <p:txBody>
+          <a:bodyPr rtlCol="0" anchor="ctr"/>
+          <a:lstStyle/>
+          <a:p>
+            <a:pPr algn="ctr">
+              <a:defRPr>
+                <a:latin typeface="Roboto"/>
+              </a:defRPr>
+            </a:pPr>
+          </a:p>
+        </p:txBody>
+      </p:sp>
+      <p:sp>
+        <p:nvSpPr>
+          <p:cNvPr id="7" name="TextBox 6"/>
+          <p:cNvSpPr txBox="1"/>
+          <p:nvPr/>
+        </p:nvSpPr>
+        <p:spPr>
+          <a:xfrm>
+            <a:off x="594360" y="1351788"/>
+            <a:ext cx="5250027" cy="384048"/>
+          </a:xfrm>
+          <a:prstGeom prst="rect">
+            <a:avLst/>
+          </a:prstGeom>
+          <a:noFill/>
+        </p:spPr>
+        <p:txBody>
+          <a:bodyPr wrap="square" lIns="45720" rIns="45720">
+            <a:spAutoFit/>
+          </a:bodyPr>
+          <a:lstStyle/>
+          <a:p>
+            <a:pPr>
+              <a:defRPr>
+                <a:latin typeface="Roboto"/>
+              </a:defRPr>
+            </a:pPr>
+            <a:r>
+              <a:rPr sz="1100" b="0">
+                <a:solidFill>
+                  <a:srgbClr val="5F6F63"/>
+                </a:solidFill>
+                <a:latin typeface="Roboto"/>
+              </a:rPr>
+              <a:t>September · Grants</a:t>
+            </a:r>
+          </a:p>
+        </p:txBody>
+      </p:sp>
+      <p:sp>
+        <p:nvSpPr>
+          <p:cNvPr id="8" name="TextBox 7"/>
+          <p:cNvSpPr txBox="1"/>
+          <p:nvPr/>
+        </p:nvSpPr>
+        <p:spPr>
+          <a:xfrm>
+            <a:off x="594360" y="1717548"/>
+            <a:ext cx="5250027" cy="502920"/>
+          </a:xfrm>
+          <a:prstGeom prst="rect">
+            <a:avLst/>
+          </a:prstGeom>
+          <a:noFill/>
+        </p:spPr>
+        <p:txBody>
+          <a:bodyPr wrap="square" lIns="45720" rIns="45720">
+            <a:spAutoFit/>
+          </a:bodyPr>
+          <a:lstStyle/>
+          <a:p>
+            <a:pPr>
+              <a:defRPr>
+                <a:latin typeface="Roboto"/>
+              </a:defRPr>
+            </a:pPr>
+            <a:r>
+              <a:rPr sz="2200" b="1">
+                <a:solidFill>
+                  <a:srgbClr val="2F7A5D"/>
+                </a:solidFill>
+                <a:latin typeface="Roboto"/>
+              </a:rPr>
+              <a:t>9¢</a:t>
+            </a:r>
+          </a:p>
+        </p:txBody>
+      </p:sp>
+      <p:sp>
+        <p:nvSpPr>
+          <p:cNvPr id="9" name="TextBox 8"/>
+          <p:cNvSpPr txBox="1"/>
+          <p:nvPr/>
+        </p:nvSpPr>
+        <p:spPr>
+          <a:xfrm>
+            <a:off x="594360" y="2083308"/>
+            <a:ext cx="5250027" cy="329184"/>
+          </a:xfrm>
+          <a:prstGeom prst="rect">
+            <a:avLst/>
+          </a:prstGeom>
+          <a:noFill/>
+        </p:spPr>
+        <p:txBody>
+          <a:bodyPr wrap="square" lIns="45720" rIns="45720">
+            <a:spAutoFit/>
+          </a:bodyPr>
+          <a:lstStyle/>
+          <a:p>
+            <a:pPr>
+              <a:defRPr>
+                <a:latin typeface="Roboto"/>
+              </a:defRPr>
+            </a:pPr>
+            <a:r>
+              <a:rPr sz="1000" b="0">
+                <a:solidFill>
+                  <a:srgbClr val="5F6F63"/>
+                </a:solidFill>
+                <a:latin typeface="Roboto"/>
+              </a:rPr>
+              <a:t>August 10¢</a:t>
+            </a:r>
+          </a:p>
+        </p:txBody>
+      </p:sp>
+      <p:sp>
+        <p:nvSpPr>
+          <p:cNvPr id="10" name="Rectangle 9"/>
+          <p:cNvSpPr/>
+          <p:nvPr/>
+        </p:nvSpPr>
+        <p:spPr>
+          <a:xfrm>
+            <a:off x="6210147" y="1278636"/>
+            <a:ext cx="5524347" cy="1188720"/>
+          </a:xfrm>
+          <a:prstGeom prst="rect">
+            <a:avLst/>
+          </a:prstGeom>
+          <a:solidFill>
+            <a:srgbClr val="F7FAF7"/>
+          </a:solidFill>
+          <a:ln>
+            <a:solidFill>
+              <a:srgbClr val="DCE8DC"/>
+            </a:solidFill>
+          </a:ln>
+        </p:spPr>
+        <p:style>
+          <a:lnRef idx="1">
+            <a:schemeClr val="accent1"/>
+          </a:lnRef>
+          <a:fillRef idx="3">
+            <a:schemeClr val="accent1"/>
+          </a:fillRef>
+          <a:effectRef idx="2">
+            <a:schemeClr val="accent1"/>
+          </a:effectRef>
+          <a:fontRef idx="minor">
+            <a:schemeClr val="lt1"/>
+          </a:fontRef>
+        </p:style>
+        <p:txBody>
+          <a:bodyPr rtlCol="0" anchor="ctr"/>
+          <a:lstStyle/>
+          <a:p>
+            <a:pPr algn="ctr">
+              <a:defRPr>
+                <a:latin typeface="Roboto"/>
+              </a:defRPr>
+            </a:pPr>
+          </a:p>
+        </p:txBody>
+      </p:sp>
+      <p:sp>
+        <p:nvSpPr>
+          <p:cNvPr id="11" name="TextBox 10"/>
+          <p:cNvSpPr txBox="1"/>
+          <p:nvPr/>
+        </p:nvSpPr>
+        <p:spPr>
+          <a:xfrm>
+            <a:off x="6347307" y="1351788"/>
+            <a:ext cx="5250027" cy="384048"/>
+          </a:xfrm>
+          <a:prstGeom prst="rect">
+            <a:avLst/>
+          </a:prstGeom>
+          <a:noFill/>
+        </p:spPr>
+        <p:txBody>
+          <a:bodyPr wrap="square" lIns="45720" rIns="45720">
+            <a:spAutoFit/>
+          </a:bodyPr>
+          <a:lstStyle/>
+          <a:p>
+            <a:pPr>
+              <a:defRPr>
+                <a:latin typeface="Roboto"/>
+              </a:defRPr>
+            </a:pPr>
+            <a:r>
+              <a:rPr sz="1100" b="0">
+                <a:solidFill>
+                  <a:srgbClr val="5F6F63"/>
+                </a:solidFill>
+                <a:latin typeface="Roboto"/>
+              </a:rPr>
+              <a:t>Year to date (Jul to Sep 2026)</a:t>
+            </a:r>
+          </a:p>
+        </p:txBody>
+      </p:sp>
+      <p:sp>
+        <p:nvSpPr>
+          <p:cNvPr id="12" name="TextBox 11"/>
+          <p:cNvSpPr txBox="1"/>
+          <p:nvPr/>
+        </p:nvSpPr>
+        <p:spPr>
+          <a:xfrm>
+            <a:off x="6347307" y="1717548"/>
+            <a:ext cx="5250027" cy="502920"/>
+          </a:xfrm>
+          <a:prstGeom prst="rect">
+            <a:avLst/>
+          </a:prstGeom>
+          <a:noFill/>
+        </p:spPr>
+        <p:txBody>
+          <a:bodyPr wrap="square" lIns="45720" rIns="45720">
+            <a:spAutoFit/>
+          </a:bodyPr>
+          <a:lstStyle/>
+          <a:p>
+            <a:pPr>
+              <a:defRPr>
+                <a:latin typeface="Roboto"/>
+              </a:defRPr>
+            </a:pPr>
+            <a:r>
+              <a:rPr sz="2200" b="1">
+                <a:solidFill>
+                  <a:srgbClr val="2F7A5D"/>
+                </a:solidFill>
+                <a:latin typeface="Roboto"/>
+              </a:rPr>
+              <a:t>10¢</a:t>
+            </a:r>
+          </a:p>
+        </p:txBody>
+      </p:sp>
+      <p:sp>
+        <p:nvSpPr>
+          <p:cNvPr id="13" name="TextBox 12"/>
+          <p:cNvSpPr txBox="1"/>
+          <p:nvPr/>
+        </p:nvSpPr>
+        <p:spPr>
+          <a:xfrm>
+            <a:off x="6347307" y="2083308"/>
+            <a:ext cx="5250027" cy="329184"/>
+          </a:xfrm>
+          <a:prstGeom prst="rect">
+            <a:avLst/>
+          </a:prstGeom>
+          <a:noFill/>
+        </p:spPr>
+        <p:txBody>
+          <a:bodyPr wrap="square" lIns="45720" rIns="45720">
+            <a:spAutoFit/>
+          </a:bodyPr>
+          <a:lstStyle/>
+          <a:p>
+            <a:pPr>
+              <a:defRPr>
+                <a:latin typeface="Roboto"/>
+              </a:defRPr>
+            </a:pPr>
+            <a:r>
+              <a:rPr sz="1000" b="0">
+                <a:solidFill>
+                  <a:srgbClr val="5F6F63"/>
+                </a:solidFill>
+                <a:latin typeface="Roboto"/>
+              </a:rPr>
+              <a:t>same period last year: 12¢</a:t>
             </a:r>
           </a:p>
         </p:txBody>
       </p:sp>
       <p:graphicFrame>
         <p:nvGraphicFramePr>
-          <p:cNvPr id="5" name="Chart 4"/>
+          <p:cNvPr id="14" name="Chart 13"/>
           <p:cNvGraphicFramePr>
             <a:graphicFrameLocks noGrp="1"/>
           </p:cNvGraphicFramePr>
           <p:nvPr/>
         </p:nvGraphicFramePr>
         <p:xfrm>
-          <a:off x="457200" y="1188720"/>
-          <a:ext cx="11247120" cy="5029200"/>
+          <a:off x="457200" y="2604516"/>
+          <a:ext cx="11277295" cy="2516124"/>
         </p:xfrm>
         <a:graphic>
           <a:graphicData uri="http://schemas.openxmlformats.org/drawingml/2006/chart">
-            <c:chart xmlns:c="http://schemas.openxmlformats.org/drawingml/2006/chart" r:id="rId2"/>
+            <c:chart xmlns:c="http://schemas.openxmlformats.org/drawingml/2006/chart" r:id="rId3"/>
           </a:graphicData>
         </a:graphic>
       </p:graphicFrame>
       <p:sp>
         <p:nvSpPr>
-          <p:cNvPr id="6" name="TextBox 5"/>
+          <p:cNvPr id="15" name="Rectangle 14"/>
+          <p:cNvSpPr/>
+          <p:nvPr/>
+        </p:nvSpPr>
+        <p:spPr>
+          <a:xfrm>
+            <a:off x="457200" y="5212080"/>
+            <a:ext cx="5501487" cy="1097280"/>
+          </a:xfrm>
+          <a:prstGeom prst="rect">
+            <a:avLst/>
+          </a:prstGeom>
+          <a:solidFill>
+            <a:srgbClr val="FFFFFF"/>
+          </a:solidFill>
+          <a:ln>
+            <a:solidFill>
+              <a:srgbClr val="DCE8DC"/>
+            </a:solidFill>
+          </a:ln>
+        </p:spPr>
+        <p:style>
+          <a:lnRef idx="1">
+            <a:schemeClr val="accent1"/>
+          </a:lnRef>
+          <a:fillRef idx="3">
+            <a:schemeClr val="accent1"/>
+          </a:fillRef>
+          <a:effectRef idx="2">
+            <a:schemeClr val="accent1"/>
+          </a:effectRef>
+          <a:fontRef idx="minor">
+            <a:schemeClr val="lt1"/>
+          </a:fontRef>
+        </p:style>
+        <p:txBody>
+          <a:bodyPr rtlCol="0" anchor="ctr"/>
+          <a:lstStyle/>
+          <a:p>
+            <a:pPr algn="ctr">
+              <a:defRPr>
+                <a:latin typeface="Roboto"/>
+              </a:defRPr>
+            </a:pPr>
+          </a:p>
+        </p:txBody>
+      </p:sp>
+      <p:sp>
+        <p:nvSpPr>
+          <p:cNvPr id="16" name="TextBox 15"/>
           <p:cNvSpPr txBox="1"/>
           <p:nvPr/>
         </p:nvSpPr>
         <p:spPr>
           <a:xfrm>
-            <a:off x="457200" y="6492240"/>
-            <a:ext cx="3657600" cy="274320"/>
+            <a:off x="594360" y="5266944"/>
+            <a:ext cx="5227167" cy="274320"/>
           </a:xfrm>
           <a:prstGeom prst="rect">
             <a:avLst/>
@@ -5622,7 +6742,7 @@
           <a:noFill/>
         </p:spPr>
         <p:txBody>
-          <a:bodyPr wrap="square">
+          <a:bodyPr wrap="square" lIns="45720" rIns="45720">
             <a:spAutoFit/>
           </a:bodyPr>
           <a:lstStyle/>
@@ -5633,6 +6753,211 @@
               </a:defRPr>
             </a:pPr>
             <a:r>
+              <a:rPr sz="1000" b="1">
+                <a:solidFill>
+                  <a:srgbClr val="5F6F63"/>
+                </a:solidFill>
+                <a:latin typeface="Roboto"/>
+              </a:rPr>
+              <a:t>WHAT IT SHOWS</a:t>
+            </a:r>
+          </a:p>
+        </p:txBody>
+      </p:sp>
+      <p:sp>
+        <p:nvSpPr>
+          <p:cNvPr id="17" name="TextBox 16"/>
+          <p:cNvSpPr txBox="1"/>
+          <p:nvPr/>
+        </p:nvSpPr>
+        <p:spPr>
+          <a:xfrm>
+            <a:off x="594360" y="5541264"/>
+            <a:ext cx="5227167" cy="731520"/>
+          </a:xfrm>
+          <a:prstGeom prst="rect">
+            <a:avLst/>
+          </a:prstGeom>
+          <a:noFill/>
+        </p:spPr>
+        <p:txBody>
+          <a:bodyPr wrap="square" lIns="45720" rIns="45720">
+            <a:spAutoFit/>
+          </a:bodyPr>
+          <a:lstStyle/>
+          <a:p>
+            <a:pPr>
+              <a:defRPr>
+                <a:latin typeface="Roboto"/>
+              </a:defRPr>
+            </a:pPr>
+            <a:r>
+              <a:rPr sz="1200" b="0">
+                <a:solidFill>
+                  <a:srgbClr val="25342A"/>
+                </a:solidFill>
+                <a:latin typeface="Roboto"/>
+              </a:rPr>
+              <a:t>Grants cost 10¢ to raise each dollar this financial year to date ($21,300 of grant writing and reporting for $223,318), against 12¢ in the same period last year.</a:t>
+            </a:r>
+          </a:p>
+        </p:txBody>
+      </p:sp>
+      <p:sp>
+        <p:nvSpPr>
+          <p:cNvPr id="18" name="Rectangle 17"/>
+          <p:cNvSpPr/>
+          <p:nvPr/>
+        </p:nvSpPr>
+        <p:spPr>
+          <a:xfrm>
+            <a:off x="6233007" y="5212080"/>
+            <a:ext cx="5501487" cy="1097280"/>
+          </a:xfrm>
+          <a:prstGeom prst="rect">
+            <a:avLst/>
+          </a:prstGeom>
+          <a:solidFill>
+            <a:srgbClr val="EEF5F0"/>
+          </a:solidFill>
+          <a:ln>
+            <a:solidFill>
+              <a:srgbClr val="DCE8DC"/>
+            </a:solidFill>
+          </a:ln>
+        </p:spPr>
+        <p:style>
+          <a:lnRef idx="1">
+            <a:schemeClr val="accent1"/>
+          </a:lnRef>
+          <a:fillRef idx="3">
+            <a:schemeClr val="accent1"/>
+          </a:fillRef>
+          <a:effectRef idx="2">
+            <a:schemeClr val="accent1"/>
+          </a:effectRef>
+          <a:fontRef idx="minor">
+            <a:schemeClr val="lt1"/>
+          </a:fontRef>
+        </p:style>
+        <p:txBody>
+          <a:bodyPr rtlCol="0" anchor="ctr"/>
+          <a:lstStyle/>
+          <a:p>
+            <a:pPr algn="ctr">
+              <a:defRPr>
+                <a:latin typeface="Roboto"/>
+              </a:defRPr>
+            </a:pPr>
+          </a:p>
+        </p:txBody>
+      </p:sp>
+      <p:sp>
+        <p:nvSpPr>
+          <p:cNvPr id="19" name="TextBox 18"/>
+          <p:cNvSpPr txBox="1"/>
+          <p:nvPr/>
+        </p:nvSpPr>
+        <p:spPr>
+          <a:xfrm>
+            <a:off x="6370167" y="5266944"/>
+            <a:ext cx="5227167" cy="274320"/>
+          </a:xfrm>
+          <a:prstGeom prst="rect">
+            <a:avLst/>
+          </a:prstGeom>
+          <a:noFill/>
+        </p:spPr>
+        <p:txBody>
+          <a:bodyPr wrap="square" lIns="45720" rIns="45720">
+            <a:spAutoFit/>
+          </a:bodyPr>
+          <a:lstStyle/>
+          <a:p>
+            <a:pPr>
+              <a:defRPr>
+                <a:latin typeface="Roboto"/>
+              </a:defRPr>
+            </a:pPr>
+            <a:r>
+              <a:rPr sz="1000" b="1">
+                <a:solidFill>
+                  <a:srgbClr val="5F6F63"/>
+                </a:solidFill>
+                <a:latin typeface="Roboto"/>
+              </a:rPr>
+              <a:t>WHAT YOU'D DO ABOUT IT</a:t>
+            </a:r>
+          </a:p>
+        </p:txBody>
+      </p:sp>
+      <p:sp>
+        <p:nvSpPr>
+          <p:cNvPr id="20" name="TextBox 19"/>
+          <p:cNvSpPr txBox="1"/>
+          <p:nvPr/>
+        </p:nvSpPr>
+        <p:spPr>
+          <a:xfrm>
+            <a:off x="6370167" y="5541264"/>
+            <a:ext cx="5227167" cy="731520"/>
+          </a:xfrm>
+          <a:prstGeom prst="rect">
+            <a:avLst/>
+          </a:prstGeom>
+          <a:noFill/>
+        </p:spPr>
+        <p:txBody>
+          <a:bodyPr wrap="square" lIns="45720" rIns="45720">
+            <a:spAutoFit/>
+          </a:bodyPr>
+          <a:lstStyle/>
+          <a:p>
+            <a:pPr>
+              <a:defRPr>
+                <a:latin typeface="Roboto"/>
+              </a:defRPr>
+            </a:pPr>
+            <a:r>
+              <a:rPr sz="1200" b="0">
+                <a:solidFill>
+                  <a:srgbClr val="25342A"/>
+                </a:solidFill>
+                <a:latin typeface="Roboto"/>
+              </a:rPr>
+              <a:t>Usually the cheapest money to raise, as long as the time that goes into applications and acquittals is protected.</a:t>
+            </a:r>
+          </a:p>
+        </p:txBody>
+      </p:sp>
+      <p:sp>
+        <p:nvSpPr>
+          <p:cNvPr id="21" name="TextBox 20"/>
+          <p:cNvSpPr txBox="1"/>
+          <p:nvPr/>
+        </p:nvSpPr>
+        <p:spPr>
+          <a:xfrm>
+            <a:off x="457200" y="6492240"/>
+            <a:ext cx="2926080" cy="274320"/>
+          </a:xfrm>
+          <a:prstGeom prst="rect">
+            <a:avLst/>
+          </a:prstGeom>
+          <a:noFill/>
+        </p:spPr>
+        <p:txBody>
+          <a:bodyPr wrap="square" lIns="45720" rIns="45720">
+            <a:spAutoFit/>
+          </a:bodyPr>
+          <a:lstStyle/>
+          <a:p>
+            <a:pPr>
+              <a:defRPr>
+                <a:latin typeface="Roboto"/>
+              </a:defRPr>
+            </a:pPr>
+            <a:r>
               <a:rPr sz="900" b="0">
                 <a:solidFill>
                   <a:srgbClr val="5F6F63"/>
@@ -5646,14 +6971,14 @@
       </p:sp>
       <p:sp>
         <p:nvSpPr>
-          <p:cNvPr id="7" name="TextBox 6"/>
+          <p:cNvPr id="22" name="TextBox 21"/>
           <p:cNvSpPr txBox="1"/>
           <p:nvPr/>
         </p:nvSpPr>
         <p:spPr>
           <a:xfrm>
-            <a:off x="4297680" y="6492240"/>
-            <a:ext cx="3657600" cy="274320"/>
+            <a:off x="3108960" y="6492240"/>
+            <a:ext cx="5943600" cy="274320"/>
           </a:xfrm>
           <a:prstGeom prst="rect">
             <a:avLst/>
@@ -5661,7 +6986,7 @@
           <a:noFill/>
         </p:spPr>
         <p:txBody>
-          <a:bodyPr wrap="square">
+          <a:bodyPr wrap="square" lIns="45720" rIns="45720">
             <a:spAutoFit/>
           </a:bodyPr>
           <a:lstStyle/>
@@ -5678,14 +7003,14 @@
                 </a:solidFill>
                 <a:latin typeface="Roboto"/>
               </a:rPr>
-              <a:t>Data retrieved 2pm, Tue 6 Oct 2026 · Sample data</a:t>
-            </a:r>
-          </a:p>
-        </p:txBody>
-      </p:sp>
-      <p:sp>
-        <p:nvSpPr>
-          <p:cNvPr id="8" name="TextBox 7"/>
+              <a:t>Data retrieved 2pm, Tue 6 Oct 2026 · Generated 8 Oct 2026, 9:35am · Sample data · Made with Python (python-pptx)</a:t>
+            </a:r>
+          </a:p>
+        </p:txBody>
+      </p:sp>
+      <p:sp>
+        <p:nvSpPr>
+          <p:cNvPr id="23" name="TextBox 22"/>
           <p:cNvSpPr txBox="1"/>
           <p:nvPr/>
         </p:nvSpPr>
@@ -5700,7 +7025,7 @@
           <a:noFill/>
         </p:spPr>
         <p:txBody>
-          <a:bodyPr wrap="square">
+          <a:bodyPr wrap="square" lIns="45720" rIns="45720">
             <a:spAutoFit/>
           </a:bodyPr>
           <a:lstStyle/>
@@ -5717,7 +7042,7 @@
                 </a:solidFill>
                 <a:latin typeface="Roboto"/>
               </a:rPr>
-              <a:t>Slide 3 of 11</a:t>
+              <a:t>Slide 3 of 5</a:t>
             </a:r>
           </a:p>
         </p:txBody>
@@ -5742,7 +7067,44 @@
       <p:grpSpPr/>
       <p:sp>
         <p:nvSpPr>
-          <p:cNvPr id="2" name="Rectangle 1"/>
+          <p:cNvPr id="2" name="Title 1"/>
+          <p:cNvSpPr>
+            <a:spLocks noGrp="1"/>
+          </p:cNvSpPr>
+          <p:nvPr>
+            <p:ph type="title"/>
+          </p:nvPr>
+        </p:nvSpPr>
+        <p:spPr>
+          <a:xfrm>
+            <a:off x="457200" y="384048"/>
+            <a:ext cx="11277295" cy="475488"/>
+          </a:xfrm>
+        </p:spPr>
+        <p:txBody>
+          <a:bodyPr wrap="square" lIns="45720" rIns="45720" tIns="0" bIns="0" anchor="t"/>
+          <a:lstStyle/>
+          <a:p>
+            <a:pPr algn="l">
+              <a:defRPr>
+                <a:latin typeface="Roboto"/>
+              </a:defRPr>
+            </a:pPr>
+            <a:r>
+              <a:rPr sz="2400" b="1">
+                <a:solidFill>
+                  <a:srgbClr val="25342A"/>
+                </a:solidFill>
+                <a:latin typeface="Roboto"/>
+              </a:rPr>
+              <a:t>Donations</a:t>
+            </a:r>
+          </a:p>
+        </p:txBody>
+      </p:sp>
+      <p:sp>
+        <p:nvSpPr>
+          <p:cNvPr id="3" name="Rectangle 2"/>
           <p:cNvSpPr/>
           <p:nvPr/>
         </p:nvSpPr>
@@ -5789,53 +7151,14 @@
       </p:sp>
       <p:sp>
         <p:nvSpPr>
-          <p:cNvPr id="3" name="TextBox 2"/>
-          <p:cNvSpPr txBox="1"/>
-          <p:nvPr/>
-        </p:nvSpPr>
-        <p:spPr>
-          <a:xfrm>
-            <a:off x="457200" y="164592"/>
-            <a:ext cx="7315200" cy="274320"/>
-          </a:xfrm>
-          <a:prstGeom prst="rect">
-            <a:avLst/>
-          </a:prstGeom>
-          <a:noFill/>
-        </p:spPr>
-        <p:txBody>
-          <a:bodyPr wrap="square">
-            <a:spAutoFit/>
-          </a:bodyPr>
-          <a:lstStyle/>
-          <a:p>
-            <a:pPr>
-              <a:defRPr>
-                <a:latin typeface="Roboto"/>
-              </a:defRPr>
-            </a:pPr>
-            <a:r>
-              <a:rPr sz="1000" b="0">
-                <a:solidFill>
-                  <a:srgbClr val="5F6F63"/>
-                </a:solidFill>
-                <a:latin typeface="Roboto"/>
-              </a:rPr>
-              <a:t>Sample Community Services Ltd · What does it cost to raise a dollar?</a:t>
-            </a:r>
-          </a:p>
-        </p:txBody>
-      </p:sp>
-      <p:sp>
-        <p:nvSpPr>
           <p:cNvPr id="4" name="TextBox 3"/>
           <p:cNvSpPr txBox="1"/>
           <p:nvPr/>
         </p:nvSpPr>
         <p:spPr>
           <a:xfrm>
-            <a:off x="457200" y="411480"/>
-            <a:ext cx="11247120" cy="548640"/>
+            <a:off x="457200" y="146304"/>
+            <a:ext cx="8229600" cy="256032"/>
           </a:xfrm>
           <a:prstGeom prst="rect">
             <a:avLst/>
@@ -5843,7 +7166,7 @@
           <a:noFill/>
         </p:spPr>
         <p:txBody>
-          <a:bodyPr wrap="square">
+          <a:bodyPr wrap="square" lIns="45720" rIns="45720">
             <a:spAutoFit/>
           </a:bodyPr>
           <a:lstStyle/>
@@ -5854,33 +7177,72 @@
               </a:defRPr>
             </a:pPr>
             <a:r>
-              <a:rPr sz="2400" b="1">
-                <a:solidFill>
-                  <a:srgbClr val="25342A"/>
+              <a:rPr sz="1000" b="0">
+                <a:solidFill>
+                  <a:srgbClr val="5F6F63"/>
                 </a:solidFill>
                 <a:latin typeface="Roboto"/>
               </a:rPr>
-              <a:t>What it shows · Source: All fundraising</a:t>
-            </a:r>
-          </a:p>
-        </p:txBody>
-      </p:sp>
-      <p:sp>
-        <p:nvSpPr>
-          <p:cNvPr id="5" name="Rectangle 4"/>
+              <a:t>Sample Community Services Ltd · What does it cost to raise a dollar?</a:t>
+            </a:r>
+          </a:p>
+        </p:txBody>
+      </p:sp>
+      <p:sp>
+        <p:nvSpPr>
+          <p:cNvPr id="5" name="TextBox 4"/>
+          <p:cNvSpPr txBox="1"/>
+          <p:nvPr/>
+        </p:nvSpPr>
+        <p:spPr>
+          <a:xfrm>
+            <a:off x="457200" y="914400"/>
+            <a:ext cx="11277295" cy="263652"/>
+          </a:xfrm>
+          <a:prstGeom prst="rect">
+            <a:avLst/>
+          </a:prstGeom>
+          <a:noFill/>
+        </p:spPr>
+        <p:txBody>
+          <a:bodyPr wrap="square" lIns="45720" rIns="45720">
+            <a:spAutoFit/>
+          </a:bodyPr>
+          <a:lstStyle/>
+          <a:p>
+            <a:pPr>
+              <a:defRPr>
+                <a:latin typeface="Roboto"/>
+              </a:defRPr>
+            </a:pPr>
+            <a:r>
+              <a:rPr sz="1200" b="0">
+                <a:solidFill>
+                  <a:srgbClr val="5F6F63"/>
+                </a:solidFill>
+                <a:latin typeface="Roboto"/>
+              </a:rPr>
+              <a:t>Cost to raise a dollar, by month (cents) · Donations</a:t>
+            </a:r>
+          </a:p>
+        </p:txBody>
+      </p:sp>
+      <p:sp>
+        <p:nvSpPr>
+          <p:cNvPr id="6" name="Rectangle 5"/>
           <p:cNvSpPr/>
           <p:nvPr/>
         </p:nvSpPr>
         <p:spPr>
           <a:xfrm>
-            <a:off x="457200" y="1554480"/>
-            <a:ext cx="5501487" cy="4389120"/>
+            <a:off x="457200" y="1278636"/>
+            <a:ext cx="5524347" cy="1188720"/>
           </a:xfrm>
           <a:prstGeom prst="rect">
             <a:avLst/>
           </a:prstGeom>
           <a:solidFill>
-            <a:srgbClr val="FFFFFF"/>
+            <a:srgbClr val="F7FAF7"/>
           </a:solidFill>
           <a:ln>
             <a:solidFill>
@@ -5916,53 +7278,14 @@
       </p:sp>
       <p:sp>
         <p:nvSpPr>
-          <p:cNvPr id="6" name="TextBox 5"/>
-          <p:cNvSpPr txBox="1"/>
-          <p:nvPr/>
-        </p:nvSpPr>
-        <p:spPr>
-          <a:xfrm>
-            <a:off x="685800" y="1691640"/>
-            <a:ext cx="5044287" cy="365760"/>
-          </a:xfrm>
-          <a:prstGeom prst="rect">
-            <a:avLst/>
-          </a:prstGeom>
-          <a:noFill/>
-        </p:spPr>
-        <p:txBody>
-          <a:bodyPr wrap="square">
-            <a:spAutoFit/>
-          </a:bodyPr>
-          <a:lstStyle/>
-          <a:p>
-            <a:pPr>
-              <a:defRPr>
-                <a:latin typeface="Roboto"/>
-              </a:defRPr>
-            </a:pPr>
-            <a:r>
-              <a:rPr sz="1100" b="1">
-                <a:solidFill>
-                  <a:srgbClr val="5F6F63"/>
-                </a:solidFill>
-                <a:latin typeface="Roboto"/>
-              </a:rPr>
-              <a:t>WHAT IT SHOWS</a:t>
-            </a:r>
-          </a:p>
-        </p:txBody>
-      </p:sp>
-      <p:sp>
-        <p:nvSpPr>
           <p:cNvPr id="7" name="TextBox 6"/>
           <p:cNvSpPr txBox="1"/>
           <p:nvPr/>
         </p:nvSpPr>
         <p:spPr>
           <a:xfrm>
-            <a:off x="685800" y="2103120"/>
-            <a:ext cx="5044287" cy="3749039"/>
+            <a:off x="594360" y="1351788"/>
+            <a:ext cx="5250027" cy="384048"/>
           </a:xfrm>
           <a:prstGeom prst="rect">
             <a:avLst/>
@@ -5970,7 +7293,7 @@
           <a:noFill/>
         </p:spPr>
         <p:txBody>
-          <a:bodyPr wrap="square">
+          <a:bodyPr wrap="square" lIns="45720" rIns="45720">
             <a:spAutoFit/>
           </a:bodyPr>
           <a:lstStyle/>
@@ -5981,33 +7304,111 @@
               </a:defRPr>
             </a:pPr>
             <a:r>
-              <a:rPr sz="1600" b="0">
-                <a:solidFill>
-                  <a:srgbClr val="25342A"/>
+              <a:rPr sz="1100" b="0">
+                <a:solidFill>
+                  <a:srgbClr val="5F6F63"/>
                 </a:solidFill>
                 <a:latin typeface="Roboto"/>
               </a:rPr>
-              <a:t>September cost 20¢ to raise each dollar, against 13¢ in August. Fundraising events raised $41,600 and cost $16,900. This financial year to date it has cost 15¢ a dollar, against 16¢ in the same period last year.</a:t>
-            </a:r>
-          </a:p>
-        </p:txBody>
-      </p:sp>
-      <p:sp>
-        <p:nvSpPr>
-          <p:cNvPr id="8" name="Rectangle 7"/>
+              <a:t>September · Donations</a:t>
+            </a:r>
+          </a:p>
+        </p:txBody>
+      </p:sp>
+      <p:sp>
+        <p:nvSpPr>
+          <p:cNvPr id="8" name="TextBox 7"/>
+          <p:cNvSpPr txBox="1"/>
+          <p:nvPr/>
+        </p:nvSpPr>
+        <p:spPr>
+          <a:xfrm>
+            <a:off x="594360" y="1717548"/>
+            <a:ext cx="5250027" cy="502920"/>
+          </a:xfrm>
+          <a:prstGeom prst="rect">
+            <a:avLst/>
+          </a:prstGeom>
+          <a:noFill/>
+        </p:spPr>
+        <p:txBody>
+          <a:bodyPr wrap="square" lIns="45720" rIns="45720">
+            <a:spAutoFit/>
+          </a:bodyPr>
+          <a:lstStyle/>
+          <a:p>
+            <a:pPr>
+              <a:defRPr>
+                <a:latin typeface="Roboto"/>
+              </a:defRPr>
+            </a:pPr>
+            <a:r>
+              <a:rPr sz="2200" b="1">
+                <a:solidFill>
+                  <a:srgbClr val="2F7A5D"/>
+                </a:solidFill>
+                <a:latin typeface="Roboto"/>
+              </a:rPr>
+              <a:t>19¢</a:t>
+            </a:r>
+          </a:p>
+        </p:txBody>
+      </p:sp>
+      <p:sp>
+        <p:nvSpPr>
+          <p:cNvPr id="9" name="TextBox 8"/>
+          <p:cNvSpPr txBox="1"/>
+          <p:nvPr/>
+        </p:nvSpPr>
+        <p:spPr>
+          <a:xfrm>
+            <a:off x="594360" y="2083308"/>
+            <a:ext cx="5250027" cy="329184"/>
+          </a:xfrm>
+          <a:prstGeom prst="rect">
+            <a:avLst/>
+          </a:prstGeom>
+          <a:noFill/>
+        </p:spPr>
+        <p:txBody>
+          <a:bodyPr wrap="square" lIns="45720" rIns="45720">
+            <a:spAutoFit/>
+          </a:bodyPr>
+          <a:lstStyle/>
+          <a:p>
+            <a:pPr>
+              <a:defRPr>
+                <a:latin typeface="Roboto"/>
+              </a:defRPr>
+            </a:pPr>
+            <a:r>
+              <a:rPr sz="1000" b="0">
+                <a:solidFill>
+                  <a:srgbClr val="5F6F63"/>
+                </a:solidFill>
+                <a:latin typeface="Roboto"/>
+              </a:rPr>
+              <a:t>August 12¢</a:t>
+            </a:r>
+          </a:p>
+        </p:txBody>
+      </p:sp>
+      <p:sp>
+        <p:nvSpPr>
+          <p:cNvPr id="10" name="Rectangle 9"/>
           <p:cNvSpPr/>
           <p:nvPr/>
         </p:nvSpPr>
         <p:spPr>
           <a:xfrm>
-            <a:off x="6233007" y="1554480"/>
-            <a:ext cx="5501487" cy="4389120"/>
+            <a:off x="6210147" y="1278636"/>
+            <a:ext cx="5524347" cy="1188720"/>
           </a:xfrm>
           <a:prstGeom prst="rect">
             <a:avLst/>
           </a:prstGeom>
           <a:solidFill>
-            <a:srgbClr val="EEF5F0"/>
+            <a:srgbClr val="F7FAF7"/>
           </a:solidFill>
           <a:ln>
             <a:solidFill>
@@ -6043,92 +7444,14 @@
       </p:sp>
       <p:sp>
         <p:nvSpPr>
-          <p:cNvPr id="9" name="TextBox 8"/>
-          <p:cNvSpPr txBox="1"/>
-          <p:nvPr/>
-        </p:nvSpPr>
-        <p:spPr>
-          <a:xfrm>
-            <a:off x="6461607" y="1691640"/>
-            <a:ext cx="5044287" cy="365760"/>
-          </a:xfrm>
-          <a:prstGeom prst="rect">
-            <a:avLst/>
-          </a:prstGeom>
-          <a:noFill/>
-        </p:spPr>
-        <p:txBody>
-          <a:bodyPr wrap="square">
-            <a:spAutoFit/>
-          </a:bodyPr>
-          <a:lstStyle/>
-          <a:p>
-            <a:pPr>
-              <a:defRPr>
-                <a:latin typeface="Roboto"/>
-              </a:defRPr>
-            </a:pPr>
-            <a:r>
-              <a:rPr sz="1100" b="1">
-                <a:solidFill>
-                  <a:srgbClr val="5F6F63"/>
-                </a:solidFill>
-                <a:latin typeface="Roboto"/>
-              </a:rPr>
-              <a:t>WHAT YOU'D DO ABOUT IT</a:t>
-            </a:r>
-          </a:p>
-        </p:txBody>
-      </p:sp>
-      <p:sp>
-        <p:nvSpPr>
-          <p:cNvPr id="10" name="TextBox 9"/>
-          <p:cNvSpPr txBox="1"/>
-          <p:nvPr/>
-        </p:nvSpPr>
-        <p:spPr>
-          <a:xfrm>
-            <a:off x="6461607" y="2103120"/>
-            <a:ext cx="5044287" cy="3749039"/>
-          </a:xfrm>
-          <a:prstGeom prst="rect">
-            <a:avLst/>
-          </a:prstGeom>
-          <a:noFill/>
-        </p:spPr>
-        <p:txBody>
-          <a:bodyPr wrap="square">
-            <a:spAutoFit/>
-          </a:bodyPr>
-          <a:lstStyle/>
-          <a:p>
-            <a:pPr>
-              <a:defRPr>
-                <a:latin typeface="Roboto"/>
-              </a:defRPr>
-            </a:pPr>
-            <a:r>
-              <a:rPr sz="1600" b="0">
-                <a:solidFill>
-                  <a:srgbClr val="25342A"/>
-                </a:solidFill>
-                <a:latin typeface="Roboto"/>
-              </a:rPr>
-              <a:t>The year-to-date figure is steadier than single months: events make some months jump. Pick a source above to see which one moves it.</a:t>
-            </a:r>
-          </a:p>
-        </p:txBody>
-      </p:sp>
-      <p:sp>
-        <p:nvSpPr>
           <p:cNvPr id="11" name="TextBox 10"/>
           <p:cNvSpPr txBox="1"/>
           <p:nvPr/>
         </p:nvSpPr>
         <p:spPr>
           <a:xfrm>
-            <a:off x="457200" y="6492240"/>
-            <a:ext cx="3657600" cy="274320"/>
+            <a:off x="6347307" y="1351788"/>
+            <a:ext cx="5250027" cy="384048"/>
           </a:xfrm>
           <a:prstGeom prst="rect">
             <a:avLst/>
@@ -6136,7 +7459,7 @@
           <a:noFill/>
         </p:spPr>
         <p:txBody>
-          <a:bodyPr wrap="square">
+          <a:bodyPr wrap="square" lIns="45720" rIns="45720">
             <a:spAutoFit/>
           </a:bodyPr>
           <a:lstStyle/>
@@ -6147,13 +7470,13 @@
               </a:defRPr>
             </a:pPr>
             <a:r>
-              <a:rPr sz="900" b="0">
+              <a:rPr sz="1100" b="0">
                 <a:solidFill>
                   <a:srgbClr val="5F6F63"/>
                 </a:solidFill>
                 <a:latin typeface="Roboto"/>
               </a:rPr>
-              <a:t>cost-to-raise.pptx</a:t>
+              <a:t>Year to date (Jul to Sep 2026)</a:t>
             </a:r>
           </a:p>
         </p:txBody>
@@ -6166,8 +7489,8 @@
         </p:nvSpPr>
         <p:spPr>
           <a:xfrm>
-            <a:off x="4297680" y="6492240"/>
-            <a:ext cx="3657600" cy="274320"/>
+            <a:off x="6347307" y="1717548"/>
+            <a:ext cx="5250027" cy="502920"/>
           </a:xfrm>
           <a:prstGeom prst="rect">
             <a:avLst/>
@@ -6175,24 +7498,24 @@
           <a:noFill/>
         </p:spPr>
         <p:txBody>
-          <a:bodyPr wrap="square">
+          <a:bodyPr wrap="square" lIns="45720" rIns="45720">
             <a:spAutoFit/>
           </a:bodyPr>
           <a:lstStyle/>
           <a:p>
-            <a:pPr algn="ctr">
-              <a:defRPr>
-                <a:latin typeface="Roboto"/>
-              </a:defRPr>
-            </a:pPr>
-            <a:r>
-              <a:rPr sz="900" b="0">
-                <a:solidFill>
-                  <a:srgbClr val="5F6F63"/>
+            <a:pPr>
+              <a:defRPr>
+                <a:latin typeface="Roboto"/>
+              </a:defRPr>
+            </a:pPr>
+            <a:r>
+              <a:rPr sz="2200" b="1">
+                <a:solidFill>
+                  <a:srgbClr val="2F7A5D"/>
                 </a:solidFill>
                 <a:latin typeface="Roboto"/>
               </a:rPr>
-              <a:t>Data retrieved 2pm, Tue 6 Oct 2026 · Sample data</a:t>
+              <a:t>16¢</a:t>
             </a:r>
           </a:p>
         </p:txBody>
@@ -6205,6 +7528,395 @@
         </p:nvSpPr>
         <p:spPr>
           <a:xfrm>
+            <a:off x="6347307" y="2083308"/>
+            <a:ext cx="5250027" cy="329184"/>
+          </a:xfrm>
+          <a:prstGeom prst="rect">
+            <a:avLst/>
+          </a:prstGeom>
+          <a:noFill/>
+        </p:spPr>
+        <p:txBody>
+          <a:bodyPr wrap="square" lIns="45720" rIns="45720">
+            <a:spAutoFit/>
+          </a:bodyPr>
+          <a:lstStyle/>
+          <a:p>
+            <a:pPr>
+              <a:defRPr>
+                <a:latin typeface="Roboto"/>
+              </a:defRPr>
+            </a:pPr>
+            <a:r>
+              <a:rPr sz="1000" b="0">
+                <a:solidFill>
+                  <a:srgbClr val="5F6F63"/>
+                </a:solidFill>
+                <a:latin typeface="Roboto"/>
+              </a:rPr>
+              <a:t>same period last year: 14¢</a:t>
+            </a:r>
+          </a:p>
+        </p:txBody>
+      </p:sp>
+      <p:graphicFrame>
+        <p:nvGraphicFramePr>
+          <p:cNvPr id="14" name="Chart 13"/>
+          <p:cNvGraphicFramePr>
+            <a:graphicFrameLocks noGrp="1"/>
+          </p:cNvGraphicFramePr>
+          <p:nvPr/>
+        </p:nvGraphicFramePr>
+        <p:xfrm>
+          <a:off x="457200" y="2604516"/>
+          <a:ext cx="11277295" cy="2516124"/>
+        </p:xfrm>
+        <a:graphic>
+          <a:graphicData uri="http://schemas.openxmlformats.org/drawingml/2006/chart">
+            <c:chart xmlns:c="http://schemas.openxmlformats.org/drawingml/2006/chart" r:id="rId3"/>
+          </a:graphicData>
+        </a:graphic>
+      </p:graphicFrame>
+      <p:sp>
+        <p:nvSpPr>
+          <p:cNvPr id="15" name="Rectangle 14"/>
+          <p:cNvSpPr/>
+          <p:nvPr/>
+        </p:nvSpPr>
+        <p:spPr>
+          <a:xfrm>
+            <a:off x="457200" y="5212080"/>
+            <a:ext cx="5501487" cy="1097280"/>
+          </a:xfrm>
+          <a:prstGeom prst="rect">
+            <a:avLst/>
+          </a:prstGeom>
+          <a:solidFill>
+            <a:srgbClr val="FFFFFF"/>
+          </a:solidFill>
+          <a:ln>
+            <a:solidFill>
+              <a:srgbClr val="DCE8DC"/>
+            </a:solidFill>
+          </a:ln>
+        </p:spPr>
+        <p:style>
+          <a:lnRef idx="1">
+            <a:schemeClr val="accent1"/>
+          </a:lnRef>
+          <a:fillRef idx="3">
+            <a:schemeClr val="accent1"/>
+          </a:fillRef>
+          <a:effectRef idx="2">
+            <a:schemeClr val="accent1"/>
+          </a:effectRef>
+          <a:fontRef idx="minor">
+            <a:schemeClr val="lt1"/>
+          </a:fontRef>
+        </p:style>
+        <p:txBody>
+          <a:bodyPr rtlCol="0" anchor="ctr"/>
+          <a:lstStyle/>
+          <a:p>
+            <a:pPr algn="ctr">
+              <a:defRPr>
+                <a:latin typeface="Roboto"/>
+              </a:defRPr>
+            </a:pPr>
+          </a:p>
+        </p:txBody>
+      </p:sp>
+      <p:sp>
+        <p:nvSpPr>
+          <p:cNvPr id="16" name="TextBox 15"/>
+          <p:cNvSpPr txBox="1"/>
+          <p:nvPr/>
+        </p:nvSpPr>
+        <p:spPr>
+          <a:xfrm>
+            <a:off x="594360" y="5266944"/>
+            <a:ext cx="5227167" cy="274320"/>
+          </a:xfrm>
+          <a:prstGeom prst="rect">
+            <a:avLst/>
+          </a:prstGeom>
+          <a:noFill/>
+        </p:spPr>
+        <p:txBody>
+          <a:bodyPr wrap="square" lIns="45720" rIns="45720">
+            <a:spAutoFit/>
+          </a:bodyPr>
+          <a:lstStyle/>
+          <a:p>
+            <a:pPr>
+              <a:defRPr>
+                <a:latin typeface="Roboto"/>
+              </a:defRPr>
+            </a:pPr>
+            <a:r>
+              <a:rPr sz="1000" b="1">
+                <a:solidFill>
+                  <a:srgbClr val="5F6F63"/>
+                </a:solidFill>
+                <a:latin typeface="Roboto"/>
+              </a:rPr>
+              <a:t>WHAT IT SHOWS</a:t>
+            </a:r>
+          </a:p>
+        </p:txBody>
+      </p:sp>
+      <p:sp>
+        <p:nvSpPr>
+          <p:cNvPr id="17" name="TextBox 16"/>
+          <p:cNvSpPr txBox="1"/>
+          <p:nvPr/>
+        </p:nvSpPr>
+        <p:spPr>
+          <a:xfrm>
+            <a:off x="594360" y="5541264"/>
+            <a:ext cx="5227167" cy="731520"/>
+          </a:xfrm>
+          <a:prstGeom prst="rect">
+            <a:avLst/>
+          </a:prstGeom>
+          <a:noFill/>
+        </p:spPr>
+        <p:txBody>
+          <a:bodyPr wrap="square" lIns="45720" rIns="45720">
+            <a:spAutoFit/>
+          </a:bodyPr>
+          <a:lstStyle/>
+          <a:p>
+            <a:pPr>
+              <a:defRPr>
+                <a:latin typeface="Roboto"/>
+              </a:defRPr>
+            </a:pPr>
+            <a:r>
+              <a:rPr sz="1200" b="0">
+                <a:solidFill>
+                  <a:srgbClr val="25342A"/>
+                </a:solidFill>
+                <a:latin typeface="Roboto"/>
+              </a:rPr>
+              <a:t>Donations cost 16¢ to raise each dollar this financial year to date ($9,800 of donor campaigns for $60,600), against 14¢ in the same period last year.</a:t>
+            </a:r>
+          </a:p>
+        </p:txBody>
+      </p:sp>
+      <p:sp>
+        <p:nvSpPr>
+          <p:cNvPr id="18" name="Rectangle 17"/>
+          <p:cNvSpPr/>
+          <p:nvPr/>
+        </p:nvSpPr>
+        <p:spPr>
+          <a:xfrm>
+            <a:off x="6233007" y="5212080"/>
+            <a:ext cx="5501487" cy="1097280"/>
+          </a:xfrm>
+          <a:prstGeom prst="rect">
+            <a:avLst/>
+          </a:prstGeom>
+          <a:solidFill>
+            <a:srgbClr val="EEF5F0"/>
+          </a:solidFill>
+          <a:ln>
+            <a:solidFill>
+              <a:srgbClr val="DCE8DC"/>
+            </a:solidFill>
+          </a:ln>
+        </p:spPr>
+        <p:style>
+          <a:lnRef idx="1">
+            <a:schemeClr val="accent1"/>
+          </a:lnRef>
+          <a:fillRef idx="3">
+            <a:schemeClr val="accent1"/>
+          </a:fillRef>
+          <a:effectRef idx="2">
+            <a:schemeClr val="accent1"/>
+          </a:effectRef>
+          <a:fontRef idx="minor">
+            <a:schemeClr val="lt1"/>
+          </a:fontRef>
+        </p:style>
+        <p:txBody>
+          <a:bodyPr rtlCol="0" anchor="ctr"/>
+          <a:lstStyle/>
+          <a:p>
+            <a:pPr algn="ctr">
+              <a:defRPr>
+                <a:latin typeface="Roboto"/>
+              </a:defRPr>
+            </a:pPr>
+          </a:p>
+        </p:txBody>
+      </p:sp>
+      <p:sp>
+        <p:nvSpPr>
+          <p:cNvPr id="19" name="TextBox 18"/>
+          <p:cNvSpPr txBox="1"/>
+          <p:nvPr/>
+        </p:nvSpPr>
+        <p:spPr>
+          <a:xfrm>
+            <a:off x="6370167" y="5266944"/>
+            <a:ext cx="5227167" cy="274320"/>
+          </a:xfrm>
+          <a:prstGeom prst="rect">
+            <a:avLst/>
+          </a:prstGeom>
+          <a:noFill/>
+        </p:spPr>
+        <p:txBody>
+          <a:bodyPr wrap="square" lIns="45720" rIns="45720">
+            <a:spAutoFit/>
+          </a:bodyPr>
+          <a:lstStyle/>
+          <a:p>
+            <a:pPr>
+              <a:defRPr>
+                <a:latin typeface="Roboto"/>
+              </a:defRPr>
+            </a:pPr>
+            <a:r>
+              <a:rPr sz="1000" b="1">
+                <a:solidFill>
+                  <a:srgbClr val="5F6F63"/>
+                </a:solidFill>
+                <a:latin typeface="Roboto"/>
+              </a:rPr>
+              <a:t>WHAT YOU'D DO ABOUT IT</a:t>
+            </a:r>
+          </a:p>
+        </p:txBody>
+      </p:sp>
+      <p:sp>
+        <p:nvSpPr>
+          <p:cNvPr id="20" name="TextBox 19"/>
+          <p:cNvSpPr txBox="1"/>
+          <p:nvPr/>
+        </p:nvSpPr>
+        <p:spPr>
+          <a:xfrm>
+            <a:off x="6370167" y="5541264"/>
+            <a:ext cx="5227167" cy="731520"/>
+          </a:xfrm>
+          <a:prstGeom prst="rect">
+            <a:avLst/>
+          </a:prstGeom>
+          <a:noFill/>
+        </p:spPr>
+        <p:txBody>
+          <a:bodyPr wrap="square" lIns="45720" rIns="45720">
+            <a:spAutoFit/>
+          </a:bodyPr>
+          <a:lstStyle/>
+          <a:p>
+            <a:pPr>
+              <a:defRPr>
+                <a:latin typeface="Roboto"/>
+              </a:defRPr>
+            </a:pPr>
+            <a:r>
+              <a:rPr sz="1200" b="0">
+                <a:solidFill>
+                  <a:srgbClr val="25342A"/>
+                </a:solidFill>
+                <a:latin typeface="Roboto"/>
+              </a:rPr>
+              <a:t>Steady and cheap, and untied: the money that builds reserves.</a:t>
+            </a:r>
+          </a:p>
+        </p:txBody>
+      </p:sp>
+      <p:sp>
+        <p:nvSpPr>
+          <p:cNvPr id="21" name="TextBox 20"/>
+          <p:cNvSpPr txBox="1"/>
+          <p:nvPr/>
+        </p:nvSpPr>
+        <p:spPr>
+          <a:xfrm>
+            <a:off x="457200" y="6492240"/>
+            <a:ext cx="2926080" cy="274320"/>
+          </a:xfrm>
+          <a:prstGeom prst="rect">
+            <a:avLst/>
+          </a:prstGeom>
+          <a:noFill/>
+        </p:spPr>
+        <p:txBody>
+          <a:bodyPr wrap="square" lIns="45720" rIns="45720">
+            <a:spAutoFit/>
+          </a:bodyPr>
+          <a:lstStyle/>
+          <a:p>
+            <a:pPr>
+              <a:defRPr>
+                <a:latin typeface="Roboto"/>
+              </a:defRPr>
+            </a:pPr>
+            <a:r>
+              <a:rPr sz="900" b="0">
+                <a:solidFill>
+                  <a:srgbClr val="5F6F63"/>
+                </a:solidFill>
+                <a:latin typeface="Roboto"/>
+              </a:rPr>
+              <a:t>cost-to-raise.pptx</a:t>
+            </a:r>
+          </a:p>
+        </p:txBody>
+      </p:sp>
+      <p:sp>
+        <p:nvSpPr>
+          <p:cNvPr id="22" name="TextBox 21"/>
+          <p:cNvSpPr txBox="1"/>
+          <p:nvPr/>
+        </p:nvSpPr>
+        <p:spPr>
+          <a:xfrm>
+            <a:off x="3108960" y="6492240"/>
+            <a:ext cx="5943600" cy="274320"/>
+          </a:xfrm>
+          <a:prstGeom prst="rect">
+            <a:avLst/>
+          </a:prstGeom>
+          <a:noFill/>
+        </p:spPr>
+        <p:txBody>
+          <a:bodyPr wrap="square" lIns="45720" rIns="45720">
+            <a:spAutoFit/>
+          </a:bodyPr>
+          <a:lstStyle/>
+          <a:p>
+            <a:pPr algn="ctr">
+              <a:defRPr>
+                <a:latin typeface="Roboto"/>
+              </a:defRPr>
+            </a:pPr>
+            <a:r>
+              <a:rPr sz="900" b="0">
+                <a:solidFill>
+                  <a:srgbClr val="5F6F63"/>
+                </a:solidFill>
+                <a:latin typeface="Roboto"/>
+              </a:rPr>
+              <a:t>Data retrieved 2pm, Tue 6 Oct 2026 · Generated 8 Oct 2026, 9:35am · Sample data · Made with Python (python-pptx)</a:t>
+            </a:r>
+          </a:p>
+        </p:txBody>
+      </p:sp>
+      <p:sp>
+        <p:nvSpPr>
+          <p:cNvPr id="23" name="TextBox 22"/>
+          <p:cNvSpPr txBox="1"/>
+          <p:nvPr/>
+        </p:nvSpPr>
+        <p:spPr>
+          <a:xfrm>
             <a:off x="8503920" y="6492240"/>
             <a:ext cx="3200400" cy="274320"/>
           </a:xfrm>
@@ -6214,7 +7926,7 @@
           <a:noFill/>
         </p:spPr>
         <p:txBody>
-          <a:bodyPr wrap="square">
+          <a:bodyPr wrap="square" lIns="45720" rIns="45720">
             <a:spAutoFit/>
           </a:bodyPr>
           <a:lstStyle/>
@@ -6231,7 +7943,7 @@
                 </a:solidFill>
                 <a:latin typeface="Roboto"/>
               </a:rPr>
-              <a:t>Slide 4 of 11</a:t>
+              <a:t>Slide 4 of 5</a:t>
             </a:r>
           </a:p>
         </p:txBody>
@@ -6256,7 +7968,44 @@
       <p:grpSpPr/>
       <p:sp>
         <p:nvSpPr>
-          <p:cNvPr id="2" name="Rectangle 1"/>
+          <p:cNvPr id="2" name="Title 1"/>
+          <p:cNvSpPr>
+            <a:spLocks noGrp="1"/>
+          </p:cNvSpPr>
+          <p:nvPr>
+            <p:ph type="title"/>
+          </p:nvPr>
+        </p:nvSpPr>
+        <p:spPr>
+          <a:xfrm>
+            <a:off x="457200" y="384048"/>
+            <a:ext cx="11277295" cy="475488"/>
+          </a:xfrm>
+        </p:spPr>
+        <p:txBody>
+          <a:bodyPr wrap="square" lIns="45720" rIns="45720" tIns="0" bIns="0" anchor="t"/>
+          <a:lstStyle/>
+          <a:p>
+            <a:pPr algn="l">
+              <a:defRPr>
+                <a:latin typeface="Roboto"/>
+              </a:defRPr>
+            </a:pPr>
+            <a:r>
+              <a:rPr sz="2400" b="1">
+                <a:solidFill>
+                  <a:srgbClr val="25342A"/>
+                </a:solidFill>
+                <a:latin typeface="Roboto"/>
+              </a:rPr>
+              <a:t>Fundraising events</a:t>
+            </a:r>
+          </a:p>
+        </p:txBody>
+      </p:sp>
+      <p:sp>
+        <p:nvSpPr>
+          <p:cNvPr id="3" name="Rectangle 2"/>
           <p:cNvSpPr/>
           <p:nvPr/>
         </p:nvSpPr>
@@ -6303,53 +8052,14 @@
       </p:sp>
       <p:sp>
         <p:nvSpPr>
-          <p:cNvPr id="3" name="TextBox 2"/>
-          <p:cNvSpPr txBox="1"/>
-          <p:nvPr/>
-        </p:nvSpPr>
-        <p:spPr>
-          <a:xfrm>
-            <a:off x="457200" y="164592"/>
-            <a:ext cx="7315200" cy="274320"/>
-          </a:xfrm>
-          <a:prstGeom prst="rect">
-            <a:avLst/>
-          </a:prstGeom>
-          <a:noFill/>
-        </p:spPr>
-        <p:txBody>
-          <a:bodyPr wrap="square">
-            <a:spAutoFit/>
-          </a:bodyPr>
-          <a:lstStyle/>
-          <a:p>
-            <a:pPr>
-              <a:defRPr>
-                <a:latin typeface="Roboto"/>
-              </a:defRPr>
-            </a:pPr>
-            <a:r>
-              <a:rPr sz="1000" b="0">
-                <a:solidFill>
-                  <a:srgbClr val="5F6F63"/>
-                </a:solidFill>
-                <a:latin typeface="Roboto"/>
-              </a:rPr>
-              <a:t>Sample Community Services Ltd · What does it cost to raise a dollar?</a:t>
-            </a:r>
-          </a:p>
-        </p:txBody>
-      </p:sp>
-      <p:sp>
-        <p:nvSpPr>
           <p:cNvPr id="4" name="TextBox 3"/>
           <p:cNvSpPr txBox="1"/>
           <p:nvPr/>
         </p:nvSpPr>
         <p:spPr>
           <a:xfrm>
-            <a:off x="457200" y="411480"/>
-            <a:ext cx="11247120" cy="548640"/>
+            <a:off x="457200" y="146304"/>
+            <a:ext cx="8229600" cy="256032"/>
           </a:xfrm>
           <a:prstGeom prst="rect">
             <a:avLst/>
@@ -6357,7 +8067,7 @@
           <a:noFill/>
         </p:spPr>
         <p:txBody>
-          <a:bodyPr wrap="square">
+          <a:bodyPr wrap="square" lIns="45720" rIns="45720">
             <a:spAutoFit/>
           </a:bodyPr>
           <a:lstStyle/>
@@ -6368,27 +8078,66 @@
               </a:defRPr>
             </a:pPr>
             <a:r>
-              <a:rPr sz="2400" b="1">
-                <a:solidFill>
-                  <a:srgbClr val="25342A"/>
+              <a:rPr sz="1000" b="0">
+                <a:solidFill>
+                  <a:srgbClr val="5F6F63"/>
                 </a:solidFill>
                 <a:latin typeface="Roboto"/>
               </a:rPr>
-              <a:t>Headline numbers · Source: Grants</a:t>
-            </a:r>
-          </a:p>
-        </p:txBody>
-      </p:sp>
-      <p:sp>
-        <p:nvSpPr>
-          <p:cNvPr id="5" name="Rectangle 4"/>
+              <a:t>Sample Community Services Ltd · What does it cost to raise a dollar?</a:t>
+            </a:r>
+          </a:p>
+        </p:txBody>
+      </p:sp>
+      <p:sp>
+        <p:nvSpPr>
+          <p:cNvPr id="5" name="TextBox 4"/>
+          <p:cNvSpPr txBox="1"/>
+          <p:nvPr/>
+        </p:nvSpPr>
+        <p:spPr>
+          <a:xfrm>
+            <a:off x="457200" y="914400"/>
+            <a:ext cx="11277295" cy="263652"/>
+          </a:xfrm>
+          <a:prstGeom prst="rect">
+            <a:avLst/>
+          </a:prstGeom>
+          <a:noFill/>
+        </p:spPr>
+        <p:txBody>
+          <a:bodyPr wrap="square" lIns="45720" rIns="45720">
+            <a:spAutoFit/>
+          </a:bodyPr>
+          <a:lstStyle/>
+          <a:p>
+            <a:pPr>
+              <a:defRPr>
+                <a:latin typeface="Roboto"/>
+              </a:defRPr>
+            </a:pPr>
+            <a:r>
+              <a:rPr sz="1200" b="0">
+                <a:solidFill>
+                  <a:srgbClr val="5F6F63"/>
+                </a:solidFill>
+                <a:latin typeface="Roboto"/>
+              </a:rPr>
+              <a:t>Cost to raise a dollar, by month (cents) · Fundraising events</a:t>
+            </a:r>
+          </a:p>
+        </p:txBody>
+      </p:sp>
+      <p:sp>
+        <p:nvSpPr>
+          <p:cNvPr id="6" name="Rectangle 5"/>
           <p:cNvSpPr/>
           <p:nvPr/>
         </p:nvSpPr>
         <p:spPr>
           <a:xfrm>
-            <a:off x="457200" y="1645920"/>
-            <a:ext cx="5501487" cy="2011680"/>
+            <a:off x="457200" y="1278636"/>
+            <a:ext cx="5524347" cy="1188720"/>
           </a:xfrm>
           <a:prstGeom prst="rect">
             <a:avLst/>
@@ -6430,53 +8179,14 @@
       </p:sp>
       <p:sp>
         <p:nvSpPr>
-          <p:cNvPr id="6" name="TextBox 5"/>
-          <p:cNvSpPr txBox="1"/>
-          <p:nvPr/>
-        </p:nvSpPr>
-        <p:spPr>
-          <a:xfrm>
-            <a:off x="640080" y="1783080"/>
-            <a:ext cx="5135727" cy="457200"/>
-          </a:xfrm>
-          <a:prstGeom prst="rect">
-            <a:avLst/>
-          </a:prstGeom>
-          <a:noFill/>
-        </p:spPr>
-        <p:txBody>
-          <a:bodyPr wrap="square">
-            <a:spAutoFit/>
-          </a:bodyPr>
-          <a:lstStyle/>
-          <a:p>
-            <a:pPr>
-              <a:defRPr>
-                <a:latin typeface="Roboto"/>
-              </a:defRPr>
-            </a:pPr>
-            <a:r>
-              <a:rPr sz="1200" b="0">
-                <a:solidFill>
-                  <a:srgbClr val="5F6F63"/>
-                </a:solidFill>
-                <a:latin typeface="Roboto"/>
-              </a:rPr>
-              <a:t>September · Grants</a:t>
-            </a:r>
-          </a:p>
-        </p:txBody>
-      </p:sp>
-      <p:sp>
-        <p:nvSpPr>
           <p:cNvPr id="7" name="TextBox 6"/>
           <p:cNvSpPr txBox="1"/>
           <p:nvPr/>
         </p:nvSpPr>
         <p:spPr>
           <a:xfrm>
-            <a:off x="640080" y="2240280"/>
-            <a:ext cx="5135727" cy="731520"/>
+            <a:off x="594360" y="1351788"/>
+            <a:ext cx="5250027" cy="384048"/>
           </a:xfrm>
           <a:prstGeom prst="rect">
             <a:avLst/>
@@ -6484,7 +8194,7 @@
           <a:noFill/>
         </p:spPr>
         <p:txBody>
-          <a:bodyPr wrap="square">
+          <a:bodyPr wrap="square" lIns="45720" rIns="45720">
             <a:spAutoFit/>
           </a:bodyPr>
           <a:lstStyle/>
@@ -6495,13 +8205,13 @@
               </a:defRPr>
             </a:pPr>
             <a:r>
-              <a:rPr sz="3000" b="1">
-                <a:solidFill>
-                  <a:srgbClr val="2F7A5D"/>
+              <a:rPr sz="1100" b="0">
+                <a:solidFill>
+                  <a:srgbClr val="5F6F63"/>
                 </a:solidFill>
                 <a:latin typeface="Roboto"/>
               </a:rPr>
-              <a:t>9¢</a:t>
+              <a:t>September · Fundraising events</a:t>
             </a:r>
           </a:p>
         </p:txBody>
@@ -6514,8 +8224,8 @@
         </p:nvSpPr>
         <p:spPr>
           <a:xfrm>
-            <a:off x="640080" y="3017520"/>
-            <a:ext cx="5135727" cy="548640"/>
+            <a:off x="594360" y="1717548"/>
+            <a:ext cx="5250027" cy="502920"/>
           </a:xfrm>
           <a:prstGeom prst="rect">
             <a:avLst/>
@@ -6523,7 +8233,7 @@
           <a:noFill/>
         </p:spPr>
         <p:txBody>
-          <a:bodyPr wrap="square">
+          <a:bodyPr wrap="square" lIns="45720" rIns="45720">
             <a:spAutoFit/>
           </a:bodyPr>
           <a:lstStyle/>
@@ -6534,27 +8244,66 @@
               </a:defRPr>
             </a:pPr>
             <a:r>
-              <a:rPr sz="1100" b="0">
+              <a:rPr sz="2200" b="1">
+                <a:solidFill>
+                  <a:srgbClr val="2F7A5D"/>
+                </a:solidFill>
+                <a:latin typeface="Roboto"/>
+              </a:rPr>
+              <a:t>41¢</a:t>
+            </a:r>
+          </a:p>
+        </p:txBody>
+      </p:sp>
+      <p:sp>
+        <p:nvSpPr>
+          <p:cNvPr id="9" name="TextBox 8"/>
+          <p:cNvSpPr txBox="1"/>
+          <p:nvPr/>
+        </p:nvSpPr>
+        <p:spPr>
+          <a:xfrm>
+            <a:off x="594360" y="2083308"/>
+            <a:ext cx="5250027" cy="329184"/>
+          </a:xfrm>
+          <a:prstGeom prst="rect">
+            <a:avLst/>
+          </a:prstGeom>
+          <a:noFill/>
+        </p:spPr>
+        <p:txBody>
+          <a:bodyPr wrap="square" lIns="45720" rIns="45720">
+            <a:spAutoFit/>
+          </a:bodyPr>
+          <a:lstStyle/>
+          <a:p>
+            <a:pPr>
+              <a:defRPr>
+                <a:latin typeface="Roboto"/>
+              </a:defRPr>
+            </a:pPr>
+            <a:r>
+              <a:rPr sz="1000" b="0">
                 <a:solidFill>
                   <a:srgbClr val="5F6F63"/>
                 </a:solidFill>
                 <a:latin typeface="Roboto"/>
               </a:rPr>
-              <a:t>August 10¢</a:t>
-            </a:r>
-          </a:p>
-        </p:txBody>
-      </p:sp>
-      <p:sp>
-        <p:nvSpPr>
-          <p:cNvPr id="9" name="Rectangle 8"/>
+              <a:t>August none raised</a:t>
+            </a:r>
+          </a:p>
+        </p:txBody>
+      </p:sp>
+      <p:sp>
+        <p:nvSpPr>
+          <p:cNvPr id="10" name="Rectangle 9"/>
           <p:cNvSpPr/>
           <p:nvPr/>
         </p:nvSpPr>
         <p:spPr>
           <a:xfrm>
-            <a:off x="6233007" y="1645920"/>
-            <a:ext cx="5501487" cy="2011680"/>
+            <a:off x="6210147" y="1278636"/>
+            <a:ext cx="5524347" cy="1188720"/>
           </a:xfrm>
           <a:prstGeom prst="rect">
             <a:avLst/>
@@ -6596,53 +8345,14 @@
       </p:sp>
       <p:sp>
         <p:nvSpPr>
-          <p:cNvPr id="10" name="TextBox 9"/>
-          <p:cNvSpPr txBox="1"/>
-          <p:nvPr/>
-        </p:nvSpPr>
-        <p:spPr>
-          <a:xfrm>
-            <a:off x="6415887" y="1783080"/>
-            <a:ext cx="5135727" cy="457200"/>
-          </a:xfrm>
-          <a:prstGeom prst="rect">
-            <a:avLst/>
-          </a:prstGeom>
-          <a:noFill/>
-        </p:spPr>
-        <p:txBody>
-          <a:bodyPr wrap="square">
-            <a:spAutoFit/>
-          </a:bodyPr>
-          <a:lstStyle/>
-          <a:p>
-            <a:pPr>
-              <a:defRPr>
-                <a:latin typeface="Roboto"/>
-              </a:defRPr>
-            </a:pPr>
-            <a:r>
-              <a:rPr sz="1200" b="0">
-                <a:solidFill>
-                  <a:srgbClr val="5F6F63"/>
-                </a:solidFill>
-                <a:latin typeface="Roboto"/>
-              </a:rPr>
-              <a:t>Year to date (Jul to Sep 2026)</a:t>
-            </a:r>
-          </a:p>
-        </p:txBody>
-      </p:sp>
-      <p:sp>
-        <p:nvSpPr>
           <p:cNvPr id="11" name="TextBox 10"/>
           <p:cNvSpPr txBox="1"/>
           <p:nvPr/>
         </p:nvSpPr>
         <p:spPr>
           <a:xfrm>
-            <a:off x="6415887" y="2240280"/>
-            <a:ext cx="5135727" cy="731520"/>
+            <a:off x="6347307" y="1351788"/>
+            <a:ext cx="5250027" cy="384048"/>
           </a:xfrm>
           <a:prstGeom prst="rect">
             <a:avLst/>
@@ -6650,7 +8360,7 @@
           <a:noFill/>
         </p:spPr>
         <p:txBody>
-          <a:bodyPr wrap="square">
+          <a:bodyPr wrap="square" lIns="45720" rIns="45720">
             <a:spAutoFit/>
           </a:bodyPr>
           <a:lstStyle/>
@@ -6661,13 +8371,13 @@
               </a:defRPr>
             </a:pPr>
             <a:r>
-              <a:rPr sz="3000" b="1">
-                <a:solidFill>
-                  <a:srgbClr val="2F7A5D"/>
+              <a:rPr sz="1100" b="0">
+                <a:solidFill>
+                  <a:srgbClr val="5F6F63"/>
                 </a:solidFill>
                 <a:latin typeface="Roboto"/>
               </a:rPr>
-              <a:t>10¢</a:t>
+              <a:t>Year to date (Jul to Sep 2026)</a:t>
             </a:r>
           </a:p>
         </p:txBody>
@@ -6680,8 +8390,8 @@
         </p:nvSpPr>
         <p:spPr>
           <a:xfrm>
-            <a:off x="6415887" y="3017520"/>
-            <a:ext cx="5135727" cy="548640"/>
+            <a:off x="6347307" y="1717548"/>
+            <a:ext cx="5250027" cy="502920"/>
           </a:xfrm>
           <a:prstGeom prst="rect">
             <a:avLst/>
@@ -6689,7 +8399,7 @@
           <a:noFill/>
         </p:spPr>
         <p:txBody>
-          <a:bodyPr wrap="square">
+          <a:bodyPr wrap="square" lIns="45720" rIns="45720">
             <a:spAutoFit/>
           </a:bodyPr>
           <a:lstStyle/>
@@ -6700,13 +8410,13 @@
               </a:defRPr>
             </a:pPr>
             <a:r>
-              <a:rPr sz="1100" b="0">
-                <a:solidFill>
-                  <a:srgbClr val="5F6F63"/>
+              <a:rPr sz="2200" b="1">
+                <a:solidFill>
+                  <a:srgbClr val="2F7A5D"/>
                 </a:solidFill>
                 <a:latin typeface="Roboto"/>
               </a:rPr>
-              <a:t>same period last year: 12¢</a:t>
+              <a:t>46¢</a:t>
             </a:r>
           </a:p>
         </p:txBody>
@@ -6719,8 +8429,8 @@
         </p:nvSpPr>
         <p:spPr>
           <a:xfrm>
-            <a:off x="457200" y="6492240"/>
-            <a:ext cx="3657600" cy="274320"/>
+            <a:off x="6347307" y="2083308"/>
+            <a:ext cx="5250027" cy="329184"/>
           </a:xfrm>
           <a:prstGeom prst="rect">
             <a:avLst/>
@@ -6728,7 +8438,7 @@
           <a:noFill/>
         </p:spPr>
         <p:txBody>
-          <a:bodyPr wrap="square">
+          <a:bodyPr wrap="square" lIns="45720" rIns="45720">
             <a:spAutoFit/>
           </a:bodyPr>
           <a:lstStyle/>
@@ -6739,132 +8449,56 @@
               </a:defRPr>
             </a:pPr>
             <a:r>
-              <a:rPr sz="900" b="0">
+              <a:rPr sz="1000" b="0">
                 <a:solidFill>
                   <a:srgbClr val="5F6F63"/>
                 </a:solidFill>
                 <a:latin typeface="Roboto"/>
               </a:rPr>
-              <a:t>cost-to-raise.pptx</a:t>
-            </a:r>
-          </a:p>
-        </p:txBody>
-      </p:sp>
-      <p:sp>
-        <p:nvSpPr>
-          <p:cNvPr id="14" name="TextBox 13"/>
-          <p:cNvSpPr txBox="1"/>
+              <a:t>same period last year: 41¢</a:t>
+            </a:r>
+          </a:p>
+        </p:txBody>
+      </p:sp>
+      <p:graphicFrame>
+        <p:nvGraphicFramePr>
+          <p:cNvPr id="14" name="Chart 13"/>
+          <p:cNvGraphicFramePr>
+            <a:graphicFrameLocks noGrp="1"/>
+          </p:cNvGraphicFramePr>
           <p:nvPr/>
-        </p:nvSpPr>
-        <p:spPr>
-          <a:xfrm>
-            <a:off x="4297680" y="6492240"/>
-            <a:ext cx="3657600" cy="274320"/>
-          </a:xfrm>
-          <a:prstGeom prst="rect">
-            <a:avLst/>
-          </a:prstGeom>
-          <a:noFill/>
-        </p:spPr>
-        <p:txBody>
-          <a:bodyPr wrap="square">
-            <a:spAutoFit/>
-          </a:bodyPr>
-          <a:lstStyle/>
-          <a:p>
-            <a:pPr algn="ctr">
-              <a:defRPr>
-                <a:latin typeface="Roboto"/>
-              </a:defRPr>
-            </a:pPr>
-            <a:r>
-              <a:rPr sz="900" b="0">
-                <a:solidFill>
-                  <a:srgbClr val="5F6F63"/>
-                </a:solidFill>
-                <a:latin typeface="Roboto"/>
-              </a:rPr>
-              <a:t>Data retrieved 2pm, Tue 6 Oct 2026 · Sample data</a:t>
-            </a:r>
-          </a:p>
-        </p:txBody>
-      </p:sp>
-      <p:sp>
-        <p:nvSpPr>
-          <p:cNvPr id="15" name="TextBox 14"/>
-          <p:cNvSpPr txBox="1"/>
-          <p:nvPr/>
-        </p:nvSpPr>
-        <p:spPr>
-          <a:xfrm>
-            <a:off x="8503920" y="6492240"/>
-            <a:ext cx="3200400" cy="274320"/>
-          </a:xfrm>
-          <a:prstGeom prst="rect">
-            <a:avLst/>
-          </a:prstGeom>
-          <a:noFill/>
-        </p:spPr>
-        <p:txBody>
-          <a:bodyPr wrap="square">
-            <a:spAutoFit/>
-          </a:bodyPr>
-          <a:lstStyle/>
-          <a:p>
-            <a:pPr algn="r">
-              <a:defRPr>
-                <a:latin typeface="Roboto"/>
-              </a:defRPr>
-            </a:pPr>
-            <a:r>
-              <a:rPr sz="900" b="0">
-                <a:solidFill>
-                  <a:srgbClr val="5F6F63"/>
-                </a:solidFill>
-                <a:latin typeface="Roboto"/>
-              </a:rPr>
-              <a:t>Slide 5 of 11</a:t>
-            </a:r>
-          </a:p>
-        </p:txBody>
-      </p:sp>
-    </p:spTree>
-  </p:cSld>
-  <p:clrMapOvr>
-    <a:masterClrMapping/>
-  </p:clrMapOvr>
-</p:sld>
-</file>
-
-<file path=ppt/slides/slide6.xml><?xml version="1.0" encoding="utf-8"?>
-<p:sld xmlns:a="http://schemas.openxmlformats.org/drawingml/2006/main" xmlns:p="http://schemas.openxmlformats.org/presentationml/2006/main" xmlns:r="http://schemas.openxmlformats.org/officeDocument/2006/relationships">
-  <p:cSld>
-    <p:spTree>
-      <p:nvGrpSpPr>
-        <p:cNvPr id="1" name=""/>
-        <p:cNvGrpSpPr/>
-        <p:nvPr/>
-      </p:nvGrpSpPr>
-      <p:grpSpPr/>
-      <p:sp>
-        <p:nvSpPr>
-          <p:cNvPr id="2" name="Rectangle 1"/>
+        </p:nvGraphicFramePr>
+        <p:xfrm>
+          <a:off x="457200" y="2604516"/>
+          <a:ext cx="11277295" cy="2516124"/>
+        </p:xfrm>
+        <a:graphic>
+          <a:graphicData uri="http://schemas.openxmlformats.org/drawingml/2006/chart">
+            <c:chart xmlns:c="http://schemas.openxmlformats.org/drawingml/2006/chart" r:id="rId3"/>
+          </a:graphicData>
+        </a:graphic>
+      </p:graphicFrame>
+      <p:sp>
+        <p:nvSpPr>
+          <p:cNvPr id="15" name="Rectangle 14"/>
           <p:cNvSpPr/>
           <p:nvPr/>
         </p:nvSpPr>
         <p:spPr>
           <a:xfrm>
-            <a:off x="0" y="0"/>
-            <a:ext cx="12191695" cy="73152"/>
+            <a:off x="457200" y="5212080"/>
+            <a:ext cx="5501487" cy="1097280"/>
           </a:xfrm>
           <a:prstGeom prst="rect">
             <a:avLst/>
           </a:prstGeom>
           <a:solidFill>
-            <a:srgbClr val="2F7A5D"/>
+            <a:srgbClr val="FFFFFF"/>
           </a:solidFill>
           <a:ln>
-            <a:noFill/>
+            <a:solidFill>
+              <a:srgbClr val="DCE8DC"/>
+            </a:solidFill>
           </a:ln>
         </p:spPr>
         <p:style>
@@ -6895,14 +8529,14 @@
       </p:sp>
       <p:sp>
         <p:nvSpPr>
-          <p:cNvPr id="3" name="TextBox 2"/>
+          <p:cNvPr id="16" name="TextBox 15"/>
           <p:cNvSpPr txBox="1"/>
           <p:nvPr/>
         </p:nvSpPr>
         <p:spPr>
           <a:xfrm>
-            <a:off x="457200" y="164592"/>
-            <a:ext cx="7315200" cy="274320"/>
+            <a:off x="594360" y="5266944"/>
+            <a:ext cx="5227167" cy="274320"/>
           </a:xfrm>
           <a:prstGeom prst="rect">
             <a:avLst/>
@@ -6910,7 +8544,7 @@
           <a:noFill/>
         </p:spPr>
         <p:txBody>
-          <a:bodyPr wrap="square">
+          <a:bodyPr wrap="square" lIns="45720" rIns="45720">
             <a:spAutoFit/>
           </a:bodyPr>
           <a:lstStyle/>
@@ -6921,27 +8555,27 @@
               </a:defRPr>
             </a:pPr>
             <a:r>
-              <a:rPr sz="1000" b="0">
+              <a:rPr sz="1000" b="1">
                 <a:solidFill>
                   <a:srgbClr val="5F6F63"/>
                 </a:solidFill>
                 <a:latin typeface="Roboto"/>
               </a:rPr>
-              <a:t>Sample Community Services Ltd · What does it cost to raise a dollar?</a:t>
-            </a:r>
-          </a:p>
-        </p:txBody>
-      </p:sp>
-      <p:sp>
-        <p:nvSpPr>
-          <p:cNvPr id="4" name="TextBox 3"/>
+              <a:t>WHAT IT SHOWS</a:t>
+            </a:r>
+          </a:p>
+        </p:txBody>
+      </p:sp>
+      <p:sp>
+        <p:nvSpPr>
+          <p:cNvPr id="17" name="TextBox 16"/>
           <p:cNvSpPr txBox="1"/>
           <p:nvPr/>
         </p:nvSpPr>
         <p:spPr>
           <a:xfrm>
-            <a:off x="457200" y="411480"/>
-            <a:ext cx="11247120" cy="548640"/>
+            <a:off x="594360" y="5541264"/>
+            <a:ext cx="5227167" cy="731520"/>
           </a:xfrm>
           <a:prstGeom prst="rect">
             <a:avLst/>
@@ -6949,7 +8583,7 @@
           <a:noFill/>
         </p:spPr>
         <p:txBody>
-          <a:bodyPr wrap="square">
+          <a:bodyPr wrap="square" lIns="45720" rIns="45720">
             <a:spAutoFit/>
           </a:bodyPr>
           <a:lstStyle/>
@@ -6960,33 +8594,33 @@
               </a:defRPr>
             </a:pPr>
             <a:r>
-              <a:rPr sz="2400" b="1">
+              <a:rPr sz="1200" b="0">
                 <a:solidFill>
                   <a:srgbClr val="25342A"/>
                 </a:solidFill>
                 <a:latin typeface="Roboto"/>
               </a:rPr>
-              <a:t>What it shows · Source: Grants</a:t>
-            </a:r>
-          </a:p>
-        </p:txBody>
-      </p:sp>
-      <p:sp>
-        <p:nvSpPr>
-          <p:cNvPr id="5" name="Rectangle 4"/>
+              <a:t>Fundraising events cost 46¢ to raise each dollar this financial year to date ($19,300 of event costs for $41,600), against 41¢ in the same period last year.</a:t>
+            </a:r>
+          </a:p>
+        </p:txBody>
+      </p:sp>
+      <p:sp>
+        <p:nvSpPr>
+          <p:cNvPr id="18" name="Rectangle 17"/>
           <p:cNvSpPr/>
           <p:nvPr/>
         </p:nvSpPr>
         <p:spPr>
           <a:xfrm>
-            <a:off x="457200" y="1554480"/>
-            <a:ext cx="5501487" cy="4389120"/>
+            <a:off x="6233007" y="5212080"/>
+            <a:ext cx="5501487" cy="1097280"/>
           </a:xfrm>
           <a:prstGeom prst="rect">
             <a:avLst/>
           </a:prstGeom>
           <a:solidFill>
-            <a:srgbClr val="FFFFFF"/>
+            <a:srgbClr val="EEF5F0"/>
           </a:solidFill>
           <a:ln>
             <a:solidFill>
@@ -7022,14 +8656,14 @@
       </p:sp>
       <p:sp>
         <p:nvSpPr>
-          <p:cNvPr id="6" name="TextBox 5"/>
+          <p:cNvPr id="19" name="TextBox 18"/>
           <p:cNvSpPr txBox="1"/>
           <p:nvPr/>
         </p:nvSpPr>
         <p:spPr>
           <a:xfrm>
-            <a:off x="685800" y="1691640"/>
-            <a:ext cx="5044287" cy="365760"/>
+            <a:off x="6370167" y="5266944"/>
+            <a:ext cx="5227167" cy="274320"/>
           </a:xfrm>
           <a:prstGeom prst="rect">
             <a:avLst/>
@@ -7037,7 +8671,7 @@
           <a:noFill/>
         </p:spPr>
         <p:txBody>
-          <a:bodyPr wrap="square">
+          <a:bodyPr wrap="square" lIns="45720" rIns="45720">
             <a:spAutoFit/>
           </a:bodyPr>
           <a:lstStyle/>
@@ -7048,27 +8682,27 @@
               </a:defRPr>
             </a:pPr>
             <a:r>
-              <a:rPr sz="1100" b="1">
+              <a:rPr sz="1000" b="1">
                 <a:solidFill>
                   <a:srgbClr val="5F6F63"/>
                 </a:solidFill>
                 <a:latin typeface="Roboto"/>
               </a:rPr>
-              <a:t>WHAT IT SHOWS</a:t>
-            </a:r>
-          </a:p>
-        </p:txBody>
-      </p:sp>
-      <p:sp>
-        <p:nvSpPr>
-          <p:cNvPr id="7" name="TextBox 6"/>
+              <a:t>WHAT YOU'D DO ABOUT IT</a:t>
+            </a:r>
+          </a:p>
+        </p:txBody>
+      </p:sp>
+      <p:sp>
+        <p:nvSpPr>
+          <p:cNvPr id="20" name="TextBox 19"/>
           <p:cNvSpPr txBox="1"/>
           <p:nvPr/>
         </p:nvSpPr>
         <p:spPr>
           <a:xfrm>
-            <a:off x="685800" y="2103120"/>
-            <a:ext cx="5044287" cy="3749039"/>
+            <a:off x="6370167" y="5541264"/>
+            <a:ext cx="5227167" cy="731520"/>
           </a:xfrm>
           <a:prstGeom prst="rect">
             <a:avLst/>
@@ -7076,7 +8710,7 @@
           <a:noFill/>
         </p:spPr>
         <p:txBody>
-          <a:bodyPr wrap="square">
+          <a:bodyPr wrap="square" lIns="45720" rIns="45720">
             <a:spAutoFit/>
           </a:bodyPr>
           <a:lstStyle/>
@@ -7087,76 +8721,27 @@
               </a:defRPr>
             </a:pPr>
             <a:r>
-              <a:rPr sz="1600" b="0">
+              <a:rPr sz="1200" b="0">
                 <a:solidFill>
                   <a:srgbClr val="25342A"/>
                 </a:solidFill>
                 <a:latin typeface="Roboto"/>
               </a:rPr>
-              <a:t>Grants cost 10¢ to raise each dollar this financial year to date ($21,300 of grant writing and reporting for $223,318), against 12¢ in the same period last year.</a:t>
-            </a:r>
-          </a:p>
-        </p:txBody>
-      </p:sp>
-      <p:sp>
-        <p:nvSpPr>
-          <p:cNvPr id="8" name="Rectangle 7"/>
-          <p:cNvSpPr/>
-          <p:nvPr/>
-        </p:nvSpPr>
-        <p:spPr>
-          <a:xfrm>
-            <a:off x="6233007" y="1554480"/>
-            <a:ext cx="5501487" cy="4389120"/>
-          </a:xfrm>
-          <a:prstGeom prst="rect">
-            <a:avLst/>
-          </a:prstGeom>
-          <a:solidFill>
-            <a:srgbClr val="EEF5F0"/>
-          </a:solidFill>
-          <a:ln>
-            <a:solidFill>
-              <a:srgbClr val="DCE8DC"/>
-            </a:solidFill>
-          </a:ln>
-        </p:spPr>
-        <p:style>
-          <a:lnRef idx="1">
-            <a:schemeClr val="accent1"/>
-          </a:lnRef>
-          <a:fillRef idx="3">
-            <a:schemeClr val="accent1"/>
-          </a:fillRef>
-          <a:effectRef idx="2">
-            <a:schemeClr val="accent1"/>
-          </a:effectRef>
-          <a:fontRef idx="minor">
-            <a:schemeClr val="lt1"/>
-          </a:fontRef>
-        </p:style>
-        <p:txBody>
-          <a:bodyPr rtlCol="0" anchor="ctr"/>
-          <a:lstStyle/>
-          <a:p>
-            <a:pPr algn="ctr">
-              <a:defRPr>
-                <a:latin typeface="Roboto"/>
-              </a:defRPr>
-            </a:pPr>
-          </a:p>
-        </p:txBody>
-      </p:sp>
-      <p:sp>
-        <p:nvSpPr>
-          <p:cNvPr id="9" name="TextBox 8"/>
+              <a:t>Usually the dearest money to raise: events are worth counting for what else they bring too (new donors, profile).</a:t>
+            </a:r>
+          </a:p>
+        </p:txBody>
+      </p:sp>
+      <p:sp>
+        <p:nvSpPr>
+          <p:cNvPr id="21" name="TextBox 20"/>
           <p:cNvSpPr txBox="1"/>
           <p:nvPr/>
         </p:nvSpPr>
         <p:spPr>
           <a:xfrm>
-            <a:off x="6461607" y="1691640"/>
-            <a:ext cx="5044287" cy="365760"/>
+            <a:off x="457200" y="6492240"/>
+            <a:ext cx="2926080" cy="274320"/>
           </a:xfrm>
           <a:prstGeom prst="rect">
             <a:avLst/>
@@ -7164,7 +8749,7 @@
           <a:noFill/>
         </p:spPr>
         <p:txBody>
-          <a:bodyPr wrap="square">
+          <a:bodyPr wrap="square" lIns="45720" rIns="45720">
             <a:spAutoFit/>
           </a:bodyPr>
           <a:lstStyle/>
@@ -7175,27 +8760,27 @@
               </a:defRPr>
             </a:pPr>
             <a:r>
-              <a:rPr sz="1100" b="1">
+              <a:rPr sz="900" b="0">
                 <a:solidFill>
                   <a:srgbClr val="5F6F63"/>
                 </a:solidFill>
                 <a:latin typeface="Roboto"/>
               </a:rPr>
-              <a:t>WHAT YOU'D DO ABOUT IT</a:t>
-            </a:r>
-          </a:p>
-        </p:txBody>
-      </p:sp>
-      <p:sp>
-        <p:nvSpPr>
-          <p:cNvPr id="10" name="TextBox 9"/>
+              <a:t>cost-to-raise.pptx</a:t>
+            </a:r>
+          </a:p>
+        </p:txBody>
+      </p:sp>
+      <p:sp>
+        <p:nvSpPr>
+          <p:cNvPr id="22" name="TextBox 21"/>
           <p:cNvSpPr txBox="1"/>
           <p:nvPr/>
         </p:nvSpPr>
         <p:spPr>
           <a:xfrm>
-            <a:off x="6461607" y="2103120"/>
-            <a:ext cx="5044287" cy="3749039"/>
+            <a:off x="3108960" y="6492240"/>
+            <a:ext cx="5943600" cy="274320"/>
           </a:xfrm>
           <a:prstGeom prst="rect">
             <a:avLst/>
@@ -7203,38 +8788,38 @@
           <a:noFill/>
         </p:spPr>
         <p:txBody>
-          <a:bodyPr wrap="square">
+          <a:bodyPr wrap="square" lIns="45720" rIns="45720">
             <a:spAutoFit/>
           </a:bodyPr>
           <a:lstStyle/>
           <a:p>
-            <a:pPr>
-              <a:defRPr>
-                <a:latin typeface="Roboto"/>
-              </a:defRPr>
-            </a:pPr>
-            <a:r>
-              <a:rPr sz="1600" b="0">
-                <a:solidFill>
-                  <a:srgbClr val="25342A"/>
+            <a:pPr algn="ctr">
+              <a:defRPr>
+                <a:latin typeface="Roboto"/>
+              </a:defRPr>
+            </a:pPr>
+            <a:r>
+              <a:rPr sz="900" b="0">
+                <a:solidFill>
+                  <a:srgbClr val="5F6F63"/>
                 </a:solidFill>
                 <a:latin typeface="Roboto"/>
               </a:rPr>
-              <a:t>Usually the cheapest money to raise, as long as the time that goes into applications and acquittals is protected.</a:t>
-            </a:r>
-          </a:p>
-        </p:txBody>
-      </p:sp>
-      <p:sp>
-        <p:nvSpPr>
-          <p:cNvPr id="11" name="TextBox 10"/>
+              <a:t>Data retrieved 2pm, Tue 6 Oct 2026 · Generated 8 Oct 2026, 9:35am · Sample data · Made with Python (python-pptx)</a:t>
+            </a:r>
+          </a:p>
+        </p:txBody>
+      </p:sp>
+      <p:sp>
+        <p:nvSpPr>
+          <p:cNvPr id="23" name="TextBox 22"/>
           <p:cNvSpPr txBox="1"/>
           <p:nvPr/>
         </p:nvSpPr>
         <p:spPr>
           <a:xfrm>
-            <a:off x="457200" y="6492240"/>
-            <a:ext cx="3657600" cy="274320"/>
+            <a:off x="8503920" y="6492240"/>
+            <a:ext cx="3200400" cy="274320"/>
           </a:xfrm>
           <a:prstGeom prst="rect">
             <a:avLst/>
@@ -7242,12 +8827,12 @@
           <a:noFill/>
         </p:spPr>
         <p:txBody>
-          <a:bodyPr wrap="square">
+          <a:bodyPr wrap="square" lIns="45720" rIns="45720">
             <a:spAutoFit/>
           </a:bodyPr>
           <a:lstStyle/>
           <a:p>
-            <a:pPr>
+            <a:pPr algn="r">
               <a:defRPr>
                 <a:latin typeface="Roboto"/>
               </a:defRPr>
@@ -7259,1783 +8844,7 @@
                 </a:solidFill>
                 <a:latin typeface="Roboto"/>
               </a:rPr>
-              <a:t>cost-to-raise.pptx</a:t>
-            </a:r>
-          </a:p>
-        </p:txBody>
-      </p:sp>
-      <p:sp>
-        <p:nvSpPr>
-          <p:cNvPr id="12" name="TextBox 11"/>
-          <p:cNvSpPr txBox="1"/>
-          <p:nvPr/>
-        </p:nvSpPr>
-        <p:spPr>
-          <a:xfrm>
-            <a:off x="4297680" y="6492240"/>
-            <a:ext cx="3657600" cy="274320"/>
-          </a:xfrm>
-          <a:prstGeom prst="rect">
-            <a:avLst/>
-          </a:prstGeom>
-          <a:noFill/>
-        </p:spPr>
-        <p:txBody>
-          <a:bodyPr wrap="square">
-            <a:spAutoFit/>
-          </a:bodyPr>
-          <a:lstStyle/>
-          <a:p>
-            <a:pPr algn="ctr">
-              <a:defRPr>
-                <a:latin typeface="Roboto"/>
-              </a:defRPr>
-            </a:pPr>
-            <a:r>
-              <a:rPr sz="900" b="0">
-                <a:solidFill>
-                  <a:srgbClr val="5F6F63"/>
-                </a:solidFill>
-                <a:latin typeface="Roboto"/>
-              </a:rPr>
-              <a:t>Data retrieved 2pm, Tue 6 Oct 2026 · Sample data</a:t>
-            </a:r>
-          </a:p>
-        </p:txBody>
-      </p:sp>
-      <p:sp>
-        <p:nvSpPr>
-          <p:cNvPr id="13" name="TextBox 12"/>
-          <p:cNvSpPr txBox="1"/>
-          <p:nvPr/>
-        </p:nvSpPr>
-        <p:spPr>
-          <a:xfrm>
-            <a:off x="8503920" y="6492240"/>
-            <a:ext cx="3200400" cy="274320"/>
-          </a:xfrm>
-          <a:prstGeom prst="rect">
-            <a:avLst/>
-          </a:prstGeom>
-          <a:noFill/>
-        </p:spPr>
-        <p:txBody>
-          <a:bodyPr wrap="square">
-            <a:spAutoFit/>
-          </a:bodyPr>
-          <a:lstStyle/>
-          <a:p>
-            <a:pPr algn="r">
-              <a:defRPr>
-                <a:latin typeface="Roboto"/>
-              </a:defRPr>
-            </a:pPr>
-            <a:r>
-              <a:rPr sz="900" b="0">
-                <a:solidFill>
-                  <a:srgbClr val="5F6F63"/>
-                </a:solidFill>
-                <a:latin typeface="Roboto"/>
-              </a:rPr>
-              <a:t>Slide 6 of 11</a:t>
-            </a:r>
-          </a:p>
-        </p:txBody>
-      </p:sp>
-    </p:spTree>
-  </p:cSld>
-  <p:clrMapOvr>
-    <a:masterClrMapping/>
-  </p:clrMapOvr>
-</p:sld>
-</file>
-
-<file path=ppt/slides/slide7.xml><?xml version="1.0" encoding="utf-8"?>
-<p:sld xmlns:a="http://schemas.openxmlformats.org/drawingml/2006/main" xmlns:p="http://schemas.openxmlformats.org/presentationml/2006/main" xmlns:r="http://schemas.openxmlformats.org/officeDocument/2006/relationships">
-  <p:cSld>
-    <p:spTree>
-      <p:nvGrpSpPr>
-        <p:cNvPr id="1" name=""/>
-        <p:cNvGrpSpPr/>
-        <p:nvPr/>
-      </p:nvGrpSpPr>
-      <p:grpSpPr/>
-      <p:sp>
-        <p:nvSpPr>
-          <p:cNvPr id="2" name="Rectangle 1"/>
-          <p:cNvSpPr/>
-          <p:nvPr/>
-        </p:nvSpPr>
-        <p:spPr>
-          <a:xfrm>
-            <a:off x="0" y="0"/>
-            <a:ext cx="12191695" cy="73152"/>
-          </a:xfrm>
-          <a:prstGeom prst="rect">
-            <a:avLst/>
-          </a:prstGeom>
-          <a:solidFill>
-            <a:srgbClr val="2F7A5D"/>
-          </a:solidFill>
-          <a:ln>
-            <a:noFill/>
-          </a:ln>
-        </p:spPr>
-        <p:style>
-          <a:lnRef idx="1">
-            <a:schemeClr val="accent1"/>
-          </a:lnRef>
-          <a:fillRef idx="3">
-            <a:schemeClr val="accent1"/>
-          </a:fillRef>
-          <a:effectRef idx="2">
-            <a:schemeClr val="accent1"/>
-          </a:effectRef>
-          <a:fontRef idx="minor">
-            <a:schemeClr val="lt1"/>
-          </a:fontRef>
-        </p:style>
-        <p:txBody>
-          <a:bodyPr rtlCol="0" anchor="ctr"/>
-          <a:lstStyle/>
-          <a:p>
-            <a:pPr algn="ctr">
-              <a:defRPr>
-                <a:latin typeface="Roboto"/>
-              </a:defRPr>
-            </a:pPr>
-          </a:p>
-        </p:txBody>
-      </p:sp>
-      <p:sp>
-        <p:nvSpPr>
-          <p:cNvPr id="3" name="TextBox 2"/>
-          <p:cNvSpPr txBox="1"/>
-          <p:nvPr/>
-        </p:nvSpPr>
-        <p:spPr>
-          <a:xfrm>
-            <a:off x="457200" y="164592"/>
-            <a:ext cx="7315200" cy="274320"/>
-          </a:xfrm>
-          <a:prstGeom prst="rect">
-            <a:avLst/>
-          </a:prstGeom>
-          <a:noFill/>
-        </p:spPr>
-        <p:txBody>
-          <a:bodyPr wrap="square">
-            <a:spAutoFit/>
-          </a:bodyPr>
-          <a:lstStyle/>
-          <a:p>
-            <a:pPr>
-              <a:defRPr>
-                <a:latin typeface="Roboto"/>
-              </a:defRPr>
-            </a:pPr>
-            <a:r>
-              <a:rPr sz="1000" b="0">
-                <a:solidFill>
-                  <a:srgbClr val="5F6F63"/>
-                </a:solidFill>
-                <a:latin typeface="Roboto"/>
-              </a:rPr>
-              <a:t>Sample Community Services Ltd · What does it cost to raise a dollar?</a:t>
-            </a:r>
-          </a:p>
-        </p:txBody>
-      </p:sp>
-      <p:sp>
-        <p:nvSpPr>
-          <p:cNvPr id="4" name="TextBox 3"/>
-          <p:cNvSpPr txBox="1"/>
-          <p:nvPr/>
-        </p:nvSpPr>
-        <p:spPr>
-          <a:xfrm>
-            <a:off x="457200" y="411480"/>
-            <a:ext cx="11247120" cy="548640"/>
-          </a:xfrm>
-          <a:prstGeom prst="rect">
-            <a:avLst/>
-          </a:prstGeom>
-          <a:noFill/>
-        </p:spPr>
-        <p:txBody>
-          <a:bodyPr wrap="square">
-            <a:spAutoFit/>
-          </a:bodyPr>
-          <a:lstStyle/>
-          <a:p>
-            <a:pPr>
-              <a:defRPr>
-                <a:latin typeface="Roboto"/>
-              </a:defRPr>
-            </a:pPr>
-            <a:r>
-              <a:rPr sz="2400" b="1">
-                <a:solidFill>
-                  <a:srgbClr val="25342A"/>
-                </a:solidFill>
-                <a:latin typeface="Roboto"/>
-              </a:rPr>
-              <a:t>Headline numbers · Source: Donations</a:t>
-            </a:r>
-          </a:p>
-        </p:txBody>
-      </p:sp>
-      <p:sp>
-        <p:nvSpPr>
-          <p:cNvPr id="5" name="Rectangle 4"/>
-          <p:cNvSpPr/>
-          <p:nvPr/>
-        </p:nvSpPr>
-        <p:spPr>
-          <a:xfrm>
-            <a:off x="457200" y="1645920"/>
-            <a:ext cx="5501487" cy="2011680"/>
-          </a:xfrm>
-          <a:prstGeom prst="rect">
-            <a:avLst/>
-          </a:prstGeom>
-          <a:solidFill>
-            <a:srgbClr val="F7FAF7"/>
-          </a:solidFill>
-          <a:ln>
-            <a:solidFill>
-              <a:srgbClr val="DCE8DC"/>
-            </a:solidFill>
-          </a:ln>
-        </p:spPr>
-        <p:style>
-          <a:lnRef idx="1">
-            <a:schemeClr val="accent1"/>
-          </a:lnRef>
-          <a:fillRef idx="3">
-            <a:schemeClr val="accent1"/>
-          </a:fillRef>
-          <a:effectRef idx="2">
-            <a:schemeClr val="accent1"/>
-          </a:effectRef>
-          <a:fontRef idx="minor">
-            <a:schemeClr val="lt1"/>
-          </a:fontRef>
-        </p:style>
-        <p:txBody>
-          <a:bodyPr rtlCol="0" anchor="ctr"/>
-          <a:lstStyle/>
-          <a:p>
-            <a:pPr algn="ctr">
-              <a:defRPr>
-                <a:latin typeface="Roboto"/>
-              </a:defRPr>
-            </a:pPr>
-          </a:p>
-        </p:txBody>
-      </p:sp>
-      <p:sp>
-        <p:nvSpPr>
-          <p:cNvPr id="6" name="TextBox 5"/>
-          <p:cNvSpPr txBox="1"/>
-          <p:nvPr/>
-        </p:nvSpPr>
-        <p:spPr>
-          <a:xfrm>
-            <a:off x="640080" y="1783080"/>
-            <a:ext cx="5135727" cy="457200"/>
-          </a:xfrm>
-          <a:prstGeom prst="rect">
-            <a:avLst/>
-          </a:prstGeom>
-          <a:noFill/>
-        </p:spPr>
-        <p:txBody>
-          <a:bodyPr wrap="square">
-            <a:spAutoFit/>
-          </a:bodyPr>
-          <a:lstStyle/>
-          <a:p>
-            <a:pPr>
-              <a:defRPr>
-                <a:latin typeface="Roboto"/>
-              </a:defRPr>
-            </a:pPr>
-            <a:r>
-              <a:rPr sz="1200" b="0">
-                <a:solidFill>
-                  <a:srgbClr val="5F6F63"/>
-                </a:solidFill>
-                <a:latin typeface="Roboto"/>
-              </a:rPr>
-              <a:t>September · Donations</a:t>
-            </a:r>
-          </a:p>
-        </p:txBody>
-      </p:sp>
-      <p:sp>
-        <p:nvSpPr>
-          <p:cNvPr id="7" name="TextBox 6"/>
-          <p:cNvSpPr txBox="1"/>
-          <p:nvPr/>
-        </p:nvSpPr>
-        <p:spPr>
-          <a:xfrm>
-            <a:off x="640080" y="2240280"/>
-            <a:ext cx="5135727" cy="731520"/>
-          </a:xfrm>
-          <a:prstGeom prst="rect">
-            <a:avLst/>
-          </a:prstGeom>
-          <a:noFill/>
-        </p:spPr>
-        <p:txBody>
-          <a:bodyPr wrap="square">
-            <a:spAutoFit/>
-          </a:bodyPr>
-          <a:lstStyle/>
-          <a:p>
-            <a:pPr>
-              <a:defRPr>
-                <a:latin typeface="Roboto"/>
-              </a:defRPr>
-            </a:pPr>
-            <a:r>
-              <a:rPr sz="3000" b="1">
-                <a:solidFill>
-                  <a:srgbClr val="2F7A5D"/>
-                </a:solidFill>
-                <a:latin typeface="Roboto"/>
-              </a:rPr>
-              <a:t>19¢</a:t>
-            </a:r>
-          </a:p>
-        </p:txBody>
-      </p:sp>
-      <p:sp>
-        <p:nvSpPr>
-          <p:cNvPr id="8" name="TextBox 7"/>
-          <p:cNvSpPr txBox="1"/>
-          <p:nvPr/>
-        </p:nvSpPr>
-        <p:spPr>
-          <a:xfrm>
-            <a:off x="640080" y="3017520"/>
-            <a:ext cx="5135727" cy="548640"/>
-          </a:xfrm>
-          <a:prstGeom prst="rect">
-            <a:avLst/>
-          </a:prstGeom>
-          <a:noFill/>
-        </p:spPr>
-        <p:txBody>
-          <a:bodyPr wrap="square">
-            <a:spAutoFit/>
-          </a:bodyPr>
-          <a:lstStyle/>
-          <a:p>
-            <a:pPr>
-              <a:defRPr>
-                <a:latin typeface="Roboto"/>
-              </a:defRPr>
-            </a:pPr>
-            <a:r>
-              <a:rPr sz="1100" b="0">
-                <a:solidFill>
-                  <a:srgbClr val="5F6F63"/>
-                </a:solidFill>
-                <a:latin typeface="Roboto"/>
-              </a:rPr>
-              <a:t>August 12¢</a:t>
-            </a:r>
-          </a:p>
-        </p:txBody>
-      </p:sp>
-      <p:sp>
-        <p:nvSpPr>
-          <p:cNvPr id="9" name="Rectangle 8"/>
-          <p:cNvSpPr/>
-          <p:nvPr/>
-        </p:nvSpPr>
-        <p:spPr>
-          <a:xfrm>
-            <a:off x="6233007" y="1645920"/>
-            <a:ext cx="5501487" cy="2011680"/>
-          </a:xfrm>
-          <a:prstGeom prst="rect">
-            <a:avLst/>
-          </a:prstGeom>
-          <a:solidFill>
-            <a:srgbClr val="F7FAF7"/>
-          </a:solidFill>
-          <a:ln>
-            <a:solidFill>
-              <a:srgbClr val="DCE8DC"/>
-            </a:solidFill>
-          </a:ln>
-        </p:spPr>
-        <p:style>
-          <a:lnRef idx="1">
-            <a:schemeClr val="accent1"/>
-          </a:lnRef>
-          <a:fillRef idx="3">
-            <a:schemeClr val="accent1"/>
-          </a:fillRef>
-          <a:effectRef idx="2">
-            <a:schemeClr val="accent1"/>
-          </a:effectRef>
-          <a:fontRef idx="minor">
-            <a:schemeClr val="lt1"/>
-          </a:fontRef>
-        </p:style>
-        <p:txBody>
-          <a:bodyPr rtlCol="0" anchor="ctr"/>
-          <a:lstStyle/>
-          <a:p>
-            <a:pPr algn="ctr">
-              <a:defRPr>
-                <a:latin typeface="Roboto"/>
-              </a:defRPr>
-            </a:pPr>
-          </a:p>
-        </p:txBody>
-      </p:sp>
-      <p:sp>
-        <p:nvSpPr>
-          <p:cNvPr id="10" name="TextBox 9"/>
-          <p:cNvSpPr txBox="1"/>
-          <p:nvPr/>
-        </p:nvSpPr>
-        <p:spPr>
-          <a:xfrm>
-            <a:off x="6415887" y="1783080"/>
-            <a:ext cx="5135727" cy="457200"/>
-          </a:xfrm>
-          <a:prstGeom prst="rect">
-            <a:avLst/>
-          </a:prstGeom>
-          <a:noFill/>
-        </p:spPr>
-        <p:txBody>
-          <a:bodyPr wrap="square">
-            <a:spAutoFit/>
-          </a:bodyPr>
-          <a:lstStyle/>
-          <a:p>
-            <a:pPr>
-              <a:defRPr>
-                <a:latin typeface="Roboto"/>
-              </a:defRPr>
-            </a:pPr>
-            <a:r>
-              <a:rPr sz="1200" b="0">
-                <a:solidFill>
-                  <a:srgbClr val="5F6F63"/>
-                </a:solidFill>
-                <a:latin typeface="Roboto"/>
-              </a:rPr>
-              <a:t>Year to date (Jul to Sep 2026)</a:t>
-            </a:r>
-          </a:p>
-        </p:txBody>
-      </p:sp>
-      <p:sp>
-        <p:nvSpPr>
-          <p:cNvPr id="11" name="TextBox 10"/>
-          <p:cNvSpPr txBox="1"/>
-          <p:nvPr/>
-        </p:nvSpPr>
-        <p:spPr>
-          <a:xfrm>
-            <a:off x="6415887" y="2240280"/>
-            <a:ext cx="5135727" cy="731520"/>
-          </a:xfrm>
-          <a:prstGeom prst="rect">
-            <a:avLst/>
-          </a:prstGeom>
-          <a:noFill/>
-        </p:spPr>
-        <p:txBody>
-          <a:bodyPr wrap="square">
-            <a:spAutoFit/>
-          </a:bodyPr>
-          <a:lstStyle/>
-          <a:p>
-            <a:pPr>
-              <a:defRPr>
-                <a:latin typeface="Roboto"/>
-              </a:defRPr>
-            </a:pPr>
-            <a:r>
-              <a:rPr sz="3000" b="1">
-                <a:solidFill>
-                  <a:srgbClr val="2F7A5D"/>
-                </a:solidFill>
-                <a:latin typeface="Roboto"/>
-              </a:rPr>
-              <a:t>16¢</a:t>
-            </a:r>
-          </a:p>
-        </p:txBody>
-      </p:sp>
-      <p:sp>
-        <p:nvSpPr>
-          <p:cNvPr id="12" name="TextBox 11"/>
-          <p:cNvSpPr txBox="1"/>
-          <p:nvPr/>
-        </p:nvSpPr>
-        <p:spPr>
-          <a:xfrm>
-            <a:off x="6415887" y="3017520"/>
-            <a:ext cx="5135727" cy="548640"/>
-          </a:xfrm>
-          <a:prstGeom prst="rect">
-            <a:avLst/>
-          </a:prstGeom>
-          <a:noFill/>
-        </p:spPr>
-        <p:txBody>
-          <a:bodyPr wrap="square">
-            <a:spAutoFit/>
-          </a:bodyPr>
-          <a:lstStyle/>
-          <a:p>
-            <a:pPr>
-              <a:defRPr>
-                <a:latin typeface="Roboto"/>
-              </a:defRPr>
-            </a:pPr>
-            <a:r>
-              <a:rPr sz="1100" b="0">
-                <a:solidFill>
-                  <a:srgbClr val="5F6F63"/>
-                </a:solidFill>
-                <a:latin typeface="Roboto"/>
-              </a:rPr>
-              <a:t>same period last year: 14¢</a:t>
-            </a:r>
-          </a:p>
-        </p:txBody>
-      </p:sp>
-      <p:sp>
-        <p:nvSpPr>
-          <p:cNvPr id="13" name="TextBox 12"/>
-          <p:cNvSpPr txBox="1"/>
-          <p:nvPr/>
-        </p:nvSpPr>
-        <p:spPr>
-          <a:xfrm>
-            <a:off x="457200" y="6492240"/>
-            <a:ext cx="3657600" cy="274320"/>
-          </a:xfrm>
-          <a:prstGeom prst="rect">
-            <a:avLst/>
-          </a:prstGeom>
-          <a:noFill/>
-        </p:spPr>
-        <p:txBody>
-          <a:bodyPr wrap="square">
-            <a:spAutoFit/>
-          </a:bodyPr>
-          <a:lstStyle/>
-          <a:p>
-            <a:pPr>
-              <a:defRPr>
-                <a:latin typeface="Roboto"/>
-              </a:defRPr>
-            </a:pPr>
-            <a:r>
-              <a:rPr sz="900" b="0">
-                <a:solidFill>
-                  <a:srgbClr val="5F6F63"/>
-                </a:solidFill>
-                <a:latin typeface="Roboto"/>
-              </a:rPr>
-              <a:t>cost-to-raise.pptx</a:t>
-            </a:r>
-          </a:p>
-        </p:txBody>
-      </p:sp>
-      <p:sp>
-        <p:nvSpPr>
-          <p:cNvPr id="14" name="TextBox 13"/>
-          <p:cNvSpPr txBox="1"/>
-          <p:nvPr/>
-        </p:nvSpPr>
-        <p:spPr>
-          <a:xfrm>
-            <a:off x="4297680" y="6492240"/>
-            <a:ext cx="3657600" cy="274320"/>
-          </a:xfrm>
-          <a:prstGeom prst="rect">
-            <a:avLst/>
-          </a:prstGeom>
-          <a:noFill/>
-        </p:spPr>
-        <p:txBody>
-          <a:bodyPr wrap="square">
-            <a:spAutoFit/>
-          </a:bodyPr>
-          <a:lstStyle/>
-          <a:p>
-            <a:pPr algn="ctr">
-              <a:defRPr>
-                <a:latin typeface="Roboto"/>
-              </a:defRPr>
-            </a:pPr>
-            <a:r>
-              <a:rPr sz="900" b="0">
-                <a:solidFill>
-                  <a:srgbClr val="5F6F63"/>
-                </a:solidFill>
-                <a:latin typeface="Roboto"/>
-              </a:rPr>
-              <a:t>Data retrieved 2pm, Tue 6 Oct 2026 · Sample data</a:t>
-            </a:r>
-          </a:p>
-        </p:txBody>
-      </p:sp>
-      <p:sp>
-        <p:nvSpPr>
-          <p:cNvPr id="15" name="TextBox 14"/>
-          <p:cNvSpPr txBox="1"/>
-          <p:nvPr/>
-        </p:nvSpPr>
-        <p:spPr>
-          <a:xfrm>
-            <a:off x="8503920" y="6492240"/>
-            <a:ext cx="3200400" cy="274320"/>
-          </a:xfrm>
-          <a:prstGeom prst="rect">
-            <a:avLst/>
-          </a:prstGeom>
-          <a:noFill/>
-        </p:spPr>
-        <p:txBody>
-          <a:bodyPr wrap="square">
-            <a:spAutoFit/>
-          </a:bodyPr>
-          <a:lstStyle/>
-          <a:p>
-            <a:pPr algn="r">
-              <a:defRPr>
-                <a:latin typeface="Roboto"/>
-              </a:defRPr>
-            </a:pPr>
-            <a:r>
-              <a:rPr sz="900" b="0">
-                <a:solidFill>
-                  <a:srgbClr val="5F6F63"/>
-                </a:solidFill>
-                <a:latin typeface="Roboto"/>
-              </a:rPr>
-              <a:t>Slide 7 of 11</a:t>
-            </a:r>
-          </a:p>
-        </p:txBody>
-      </p:sp>
-    </p:spTree>
-  </p:cSld>
-  <p:clrMapOvr>
-    <a:masterClrMapping/>
-  </p:clrMapOvr>
-</p:sld>
-</file>
-
-<file path=ppt/slides/slide8.xml><?xml version="1.0" encoding="utf-8"?>
-<p:sld xmlns:a="http://schemas.openxmlformats.org/drawingml/2006/main" xmlns:p="http://schemas.openxmlformats.org/presentationml/2006/main" xmlns:r="http://schemas.openxmlformats.org/officeDocument/2006/relationships">
-  <p:cSld>
-    <p:spTree>
-      <p:nvGrpSpPr>
-        <p:cNvPr id="1" name=""/>
-        <p:cNvGrpSpPr/>
-        <p:nvPr/>
-      </p:nvGrpSpPr>
-      <p:grpSpPr/>
-      <p:sp>
-        <p:nvSpPr>
-          <p:cNvPr id="2" name="Rectangle 1"/>
-          <p:cNvSpPr/>
-          <p:nvPr/>
-        </p:nvSpPr>
-        <p:spPr>
-          <a:xfrm>
-            <a:off x="0" y="0"/>
-            <a:ext cx="12191695" cy="73152"/>
-          </a:xfrm>
-          <a:prstGeom prst="rect">
-            <a:avLst/>
-          </a:prstGeom>
-          <a:solidFill>
-            <a:srgbClr val="2F7A5D"/>
-          </a:solidFill>
-          <a:ln>
-            <a:noFill/>
-          </a:ln>
-        </p:spPr>
-        <p:style>
-          <a:lnRef idx="1">
-            <a:schemeClr val="accent1"/>
-          </a:lnRef>
-          <a:fillRef idx="3">
-            <a:schemeClr val="accent1"/>
-          </a:fillRef>
-          <a:effectRef idx="2">
-            <a:schemeClr val="accent1"/>
-          </a:effectRef>
-          <a:fontRef idx="minor">
-            <a:schemeClr val="lt1"/>
-          </a:fontRef>
-        </p:style>
-        <p:txBody>
-          <a:bodyPr rtlCol="0" anchor="ctr"/>
-          <a:lstStyle/>
-          <a:p>
-            <a:pPr algn="ctr">
-              <a:defRPr>
-                <a:latin typeface="Roboto"/>
-              </a:defRPr>
-            </a:pPr>
-          </a:p>
-        </p:txBody>
-      </p:sp>
-      <p:sp>
-        <p:nvSpPr>
-          <p:cNvPr id="3" name="TextBox 2"/>
-          <p:cNvSpPr txBox="1"/>
-          <p:nvPr/>
-        </p:nvSpPr>
-        <p:spPr>
-          <a:xfrm>
-            <a:off x="457200" y="164592"/>
-            <a:ext cx="7315200" cy="274320"/>
-          </a:xfrm>
-          <a:prstGeom prst="rect">
-            <a:avLst/>
-          </a:prstGeom>
-          <a:noFill/>
-        </p:spPr>
-        <p:txBody>
-          <a:bodyPr wrap="square">
-            <a:spAutoFit/>
-          </a:bodyPr>
-          <a:lstStyle/>
-          <a:p>
-            <a:pPr>
-              <a:defRPr>
-                <a:latin typeface="Roboto"/>
-              </a:defRPr>
-            </a:pPr>
-            <a:r>
-              <a:rPr sz="1000" b="0">
-                <a:solidFill>
-                  <a:srgbClr val="5F6F63"/>
-                </a:solidFill>
-                <a:latin typeface="Roboto"/>
-              </a:rPr>
-              <a:t>Sample Community Services Ltd · What does it cost to raise a dollar?</a:t>
-            </a:r>
-          </a:p>
-        </p:txBody>
-      </p:sp>
-      <p:sp>
-        <p:nvSpPr>
-          <p:cNvPr id="4" name="TextBox 3"/>
-          <p:cNvSpPr txBox="1"/>
-          <p:nvPr/>
-        </p:nvSpPr>
-        <p:spPr>
-          <a:xfrm>
-            <a:off x="457200" y="411480"/>
-            <a:ext cx="11247120" cy="548640"/>
-          </a:xfrm>
-          <a:prstGeom prst="rect">
-            <a:avLst/>
-          </a:prstGeom>
-          <a:noFill/>
-        </p:spPr>
-        <p:txBody>
-          <a:bodyPr wrap="square">
-            <a:spAutoFit/>
-          </a:bodyPr>
-          <a:lstStyle/>
-          <a:p>
-            <a:pPr>
-              <a:defRPr>
-                <a:latin typeface="Roboto"/>
-              </a:defRPr>
-            </a:pPr>
-            <a:r>
-              <a:rPr sz="2400" b="1">
-                <a:solidFill>
-                  <a:srgbClr val="25342A"/>
-                </a:solidFill>
-                <a:latin typeface="Roboto"/>
-              </a:rPr>
-              <a:t>What it shows · Source: Donations</a:t>
-            </a:r>
-          </a:p>
-        </p:txBody>
-      </p:sp>
-      <p:sp>
-        <p:nvSpPr>
-          <p:cNvPr id="5" name="Rectangle 4"/>
-          <p:cNvSpPr/>
-          <p:nvPr/>
-        </p:nvSpPr>
-        <p:spPr>
-          <a:xfrm>
-            <a:off x="457200" y="1554480"/>
-            <a:ext cx="5501487" cy="4389120"/>
-          </a:xfrm>
-          <a:prstGeom prst="rect">
-            <a:avLst/>
-          </a:prstGeom>
-          <a:solidFill>
-            <a:srgbClr val="FFFFFF"/>
-          </a:solidFill>
-          <a:ln>
-            <a:solidFill>
-              <a:srgbClr val="DCE8DC"/>
-            </a:solidFill>
-          </a:ln>
-        </p:spPr>
-        <p:style>
-          <a:lnRef idx="1">
-            <a:schemeClr val="accent1"/>
-          </a:lnRef>
-          <a:fillRef idx="3">
-            <a:schemeClr val="accent1"/>
-          </a:fillRef>
-          <a:effectRef idx="2">
-            <a:schemeClr val="accent1"/>
-          </a:effectRef>
-          <a:fontRef idx="minor">
-            <a:schemeClr val="lt1"/>
-          </a:fontRef>
-        </p:style>
-        <p:txBody>
-          <a:bodyPr rtlCol="0" anchor="ctr"/>
-          <a:lstStyle/>
-          <a:p>
-            <a:pPr algn="ctr">
-              <a:defRPr>
-                <a:latin typeface="Roboto"/>
-              </a:defRPr>
-            </a:pPr>
-          </a:p>
-        </p:txBody>
-      </p:sp>
-      <p:sp>
-        <p:nvSpPr>
-          <p:cNvPr id="6" name="TextBox 5"/>
-          <p:cNvSpPr txBox="1"/>
-          <p:nvPr/>
-        </p:nvSpPr>
-        <p:spPr>
-          <a:xfrm>
-            <a:off x="685800" y="1691640"/>
-            <a:ext cx="5044287" cy="365760"/>
-          </a:xfrm>
-          <a:prstGeom prst="rect">
-            <a:avLst/>
-          </a:prstGeom>
-          <a:noFill/>
-        </p:spPr>
-        <p:txBody>
-          <a:bodyPr wrap="square">
-            <a:spAutoFit/>
-          </a:bodyPr>
-          <a:lstStyle/>
-          <a:p>
-            <a:pPr>
-              <a:defRPr>
-                <a:latin typeface="Roboto"/>
-              </a:defRPr>
-            </a:pPr>
-            <a:r>
-              <a:rPr sz="1100" b="1">
-                <a:solidFill>
-                  <a:srgbClr val="5F6F63"/>
-                </a:solidFill>
-                <a:latin typeface="Roboto"/>
-              </a:rPr>
-              <a:t>WHAT IT SHOWS</a:t>
-            </a:r>
-          </a:p>
-        </p:txBody>
-      </p:sp>
-      <p:sp>
-        <p:nvSpPr>
-          <p:cNvPr id="7" name="TextBox 6"/>
-          <p:cNvSpPr txBox="1"/>
-          <p:nvPr/>
-        </p:nvSpPr>
-        <p:spPr>
-          <a:xfrm>
-            <a:off x="685800" y="2103120"/>
-            <a:ext cx="5044287" cy="3749039"/>
-          </a:xfrm>
-          <a:prstGeom prst="rect">
-            <a:avLst/>
-          </a:prstGeom>
-          <a:noFill/>
-        </p:spPr>
-        <p:txBody>
-          <a:bodyPr wrap="square">
-            <a:spAutoFit/>
-          </a:bodyPr>
-          <a:lstStyle/>
-          <a:p>
-            <a:pPr>
-              <a:defRPr>
-                <a:latin typeface="Roboto"/>
-              </a:defRPr>
-            </a:pPr>
-            <a:r>
-              <a:rPr sz="1600" b="0">
-                <a:solidFill>
-                  <a:srgbClr val="25342A"/>
-                </a:solidFill>
-                <a:latin typeface="Roboto"/>
-              </a:rPr>
-              <a:t>Donations cost 16¢ to raise each dollar this financial year to date ($9,800 of donor campaigns for $60,600), against 14¢ in the same period last year.</a:t>
-            </a:r>
-          </a:p>
-        </p:txBody>
-      </p:sp>
-      <p:sp>
-        <p:nvSpPr>
-          <p:cNvPr id="8" name="Rectangle 7"/>
-          <p:cNvSpPr/>
-          <p:nvPr/>
-        </p:nvSpPr>
-        <p:spPr>
-          <a:xfrm>
-            <a:off x="6233007" y="1554480"/>
-            <a:ext cx="5501487" cy="4389120"/>
-          </a:xfrm>
-          <a:prstGeom prst="rect">
-            <a:avLst/>
-          </a:prstGeom>
-          <a:solidFill>
-            <a:srgbClr val="EEF5F0"/>
-          </a:solidFill>
-          <a:ln>
-            <a:solidFill>
-              <a:srgbClr val="DCE8DC"/>
-            </a:solidFill>
-          </a:ln>
-        </p:spPr>
-        <p:style>
-          <a:lnRef idx="1">
-            <a:schemeClr val="accent1"/>
-          </a:lnRef>
-          <a:fillRef idx="3">
-            <a:schemeClr val="accent1"/>
-          </a:fillRef>
-          <a:effectRef idx="2">
-            <a:schemeClr val="accent1"/>
-          </a:effectRef>
-          <a:fontRef idx="minor">
-            <a:schemeClr val="lt1"/>
-          </a:fontRef>
-        </p:style>
-        <p:txBody>
-          <a:bodyPr rtlCol="0" anchor="ctr"/>
-          <a:lstStyle/>
-          <a:p>
-            <a:pPr algn="ctr">
-              <a:defRPr>
-                <a:latin typeface="Roboto"/>
-              </a:defRPr>
-            </a:pPr>
-          </a:p>
-        </p:txBody>
-      </p:sp>
-      <p:sp>
-        <p:nvSpPr>
-          <p:cNvPr id="9" name="TextBox 8"/>
-          <p:cNvSpPr txBox="1"/>
-          <p:nvPr/>
-        </p:nvSpPr>
-        <p:spPr>
-          <a:xfrm>
-            <a:off x="6461607" y="1691640"/>
-            <a:ext cx="5044287" cy="365760"/>
-          </a:xfrm>
-          <a:prstGeom prst="rect">
-            <a:avLst/>
-          </a:prstGeom>
-          <a:noFill/>
-        </p:spPr>
-        <p:txBody>
-          <a:bodyPr wrap="square">
-            <a:spAutoFit/>
-          </a:bodyPr>
-          <a:lstStyle/>
-          <a:p>
-            <a:pPr>
-              <a:defRPr>
-                <a:latin typeface="Roboto"/>
-              </a:defRPr>
-            </a:pPr>
-            <a:r>
-              <a:rPr sz="1100" b="1">
-                <a:solidFill>
-                  <a:srgbClr val="5F6F63"/>
-                </a:solidFill>
-                <a:latin typeface="Roboto"/>
-              </a:rPr>
-              <a:t>WHAT YOU'D DO ABOUT IT</a:t>
-            </a:r>
-          </a:p>
-        </p:txBody>
-      </p:sp>
-      <p:sp>
-        <p:nvSpPr>
-          <p:cNvPr id="10" name="TextBox 9"/>
-          <p:cNvSpPr txBox="1"/>
-          <p:nvPr/>
-        </p:nvSpPr>
-        <p:spPr>
-          <a:xfrm>
-            <a:off x="6461607" y="2103120"/>
-            <a:ext cx="5044287" cy="3749039"/>
-          </a:xfrm>
-          <a:prstGeom prst="rect">
-            <a:avLst/>
-          </a:prstGeom>
-          <a:noFill/>
-        </p:spPr>
-        <p:txBody>
-          <a:bodyPr wrap="square">
-            <a:spAutoFit/>
-          </a:bodyPr>
-          <a:lstStyle/>
-          <a:p>
-            <a:pPr>
-              <a:defRPr>
-                <a:latin typeface="Roboto"/>
-              </a:defRPr>
-            </a:pPr>
-            <a:r>
-              <a:rPr sz="1600" b="0">
-                <a:solidFill>
-                  <a:srgbClr val="25342A"/>
-                </a:solidFill>
-                <a:latin typeface="Roboto"/>
-              </a:rPr>
-              <a:t>Steady and cheap, and untied: the money that builds reserves.</a:t>
-            </a:r>
-          </a:p>
-        </p:txBody>
-      </p:sp>
-      <p:sp>
-        <p:nvSpPr>
-          <p:cNvPr id="11" name="TextBox 10"/>
-          <p:cNvSpPr txBox="1"/>
-          <p:nvPr/>
-        </p:nvSpPr>
-        <p:spPr>
-          <a:xfrm>
-            <a:off x="457200" y="6492240"/>
-            <a:ext cx="3657600" cy="274320"/>
-          </a:xfrm>
-          <a:prstGeom prst="rect">
-            <a:avLst/>
-          </a:prstGeom>
-          <a:noFill/>
-        </p:spPr>
-        <p:txBody>
-          <a:bodyPr wrap="square">
-            <a:spAutoFit/>
-          </a:bodyPr>
-          <a:lstStyle/>
-          <a:p>
-            <a:pPr>
-              <a:defRPr>
-                <a:latin typeface="Roboto"/>
-              </a:defRPr>
-            </a:pPr>
-            <a:r>
-              <a:rPr sz="900" b="0">
-                <a:solidFill>
-                  <a:srgbClr val="5F6F63"/>
-                </a:solidFill>
-                <a:latin typeface="Roboto"/>
-              </a:rPr>
-              <a:t>cost-to-raise.pptx</a:t>
-            </a:r>
-          </a:p>
-        </p:txBody>
-      </p:sp>
-      <p:sp>
-        <p:nvSpPr>
-          <p:cNvPr id="12" name="TextBox 11"/>
-          <p:cNvSpPr txBox="1"/>
-          <p:nvPr/>
-        </p:nvSpPr>
-        <p:spPr>
-          <a:xfrm>
-            <a:off x="4297680" y="6492240"/>
-            <a:ext cx="3657600" cy="274320"/>
-          </a:xfrm>
-          <a:prstGeom prst="rect">
-            <a:avLst/>
-          </a:prstGeom>
-          <a:noFill/>
-        </p:spPr>
-        <p:txBody>
-          <a:bodyPr wrap="square">
-            <a:spAutoFit/>
-          </a:bodyPr>
-          <a:lstStyle/>
-          <a:p>
-            <a:pPr algn="ctr">
-              <a:defRPr>
-                <a:latin typeface="Roboto"/>
-              </a:defRPr>
-            </a:pPr>
-            <a:r>
-              <a:rPr sz="900" b="0">
-                <a:solidFill>
-                  <a:srgbClr val="5F6F63"/>
-                </a:solidFill>
-                <a:latin typeface="Roboto"/>
-              </a:rPr>
-              <a:t>Data retrieved 2pm, Tue 6 Oct 2026 · Sample data</a:t>
-            </a:r>
-          </a:p>
-        </p:txBody>
-      </p:sp>
-      <p:sp>
-        <p:nvSpPr>
-          <p:cNvPr id="13" name="TextBox 12"/>
-          <p:cNvSpPr txBox="1"/>
-          <p:nvPr/>
-        </p:nvSpPr>
-        <p:spPr>
-          <a:xfrm>
-            <a:off x="8503920" y="6492240"/>
-            <a:ext cx="3200400" cy="274320"/>
-          </a:xfrm>
-          <a:prstGeom prst="rect">
-            <a:avLst/>
-          </a:prstGeom>
-          <a:noFill/>
-        </p:spPr>
-        <p:txBody>
-          <a:bodyPr wrap="square">
-            <a:spAutoFit/>
-          </a:bodyPr>
-          <a:lstStyle/>
-          <a:p>
-            <a:pPr algn="r">
-              <a:defRPr>
-                <a:latin typeface="Roboto"/>
-              </a:defRPr>
-            </a:pPr>
-            <a:r>
-              <a:rPr sz="900" b="0">
-                <a:solidFill>
-                  <a:srgbClr val="5F6F63"/>
-                </a:solidFill>
-                <a:latin typeface="Roboto"/>
-              </a:rPr>
-              <a:t>Slide 8 of 11</a:t>
-            </a:r>
-          </a:p>
-        </p:txBody>
-      </p:sp>
-    </p:spTree>
-  </p:cSld>
-  <p:clrMapOvr>
-    <a:masterClrMapping/>
-  </p:clrMapOvr>
-</p:sld>
-</file>
-
-<file path=ppt/slides/slide9.xml><?xml version="1.0" encoding="utf-8"?>
-<p:sld xmlns:a="http://schemas.openxmlformats.org/drawingml/2006/main" xmlns:p="http://schemas.openxmlformats.org/presentationml/2006/main" xmlns:r="http://schemas.openxmlformats.org/officeDocument/2006/relationships">
-  <p:cSld>
-    <p:spTree>
-      <p:nvGrpSpPr>
-        <p:cNvPr id="1" name=""/>
-        <p:cNvGrpSpPr/>
-        <p:nvPr/>
-      </p:nvGrpSpPr>
-      <p:grpSpPr/>
-      <p:sp>
-        <p:nvSpPr>
-          <p:cNvPr id="2" name="Rectangle 1"/>
-          <p:cNvSpPr/>
-          <p:nvPr/>
-        </p:nvSpPr>
-        <p:spPr>
-          <a:xfrm>
-            <a:off x="0" y="0"/>
-            <a:ext cx="12191695" cy="73152"/>
-          </a:xfrm>
-          <a:prstGeom prst="rect">
-            <a:avLst/>
-          </a:prstGeom>
-          <a:solidFill>
-            <a:srgbClr val="2F7A5D"/>
-          </a:solidFill>
-          <a:ln>
-            <a:noFill/>
-          </a:ln>
-        </p:spPr>
-        <p:style>
-          <a:lnRef idx="1">
-            <a:schemeClr val="accent1"/>
-          </a:lnRef>
-          <a:fillRef idx="3">
-            <a:schemeClr val="accent1"/>
-          </a:fillRef>
-          <a:effectRef idx="2">
-            <a:schemeClr val="accent1"/>
-          </a:effectRef>
-          <a:fontRef idx="minor">
-            <a:schemeClr val="lt1"/>
-          </a:fontRef>
-        </p:style>
-        <p:txBody>
-          <a:bodyPr rtlCol="0" anchor="ctr"/>
-          <a:lstStyle/>
-          <a:p>
-            <a:pPr algn="ctr">
-              <a:defRPr>
-                <a:latin typeface="Roboto"/>
-              </a:defRPr>
-            </a:pPr>
-          </a:p>
-        </p:txBody>
-      </p:sp>
-      <p:sp>
-        <p:nvSpPr>
-          <p:cNvPr id="3" name="TextBox 2"/>
-          <p:cNvSpPr txBox="1"/>
-          <p:nvPr/>
-        </p:nvSpPr>
-        <p:spPr>
-          <a:xfrm>
-            <a:off x="457200" y="164592"/>
-            <a:ext cx="7315200" cy="274320"/>
-          </a:xfrm>
-          <a:prstGeom prst="rect">
-            <a:avLst/>
-          </a:prstGeom>
-          <a:noFill/>
-        </p:spPr>
-        <p:txBody>
-          <a:bodyPr wrap="square">
-            <a:spAutoFit/>
-          </a:bodyPr>
-          <a:lstStyle/>
-          <a:p>
-            <a:pPr>
-              <a:defRPr>
-                <a:latin typeface="Roboto"/>
-              </a:defRPr>
-            </a:pPr>
-            <a:r>
-              <a:rPr sz="1000" b="0">
-                <a:solidFill>
-                  <a:srgbClr val="5F6F63"/>
-                </a:solidFill>
-                <a:latin typeface="Roboto"/>
-              </a:rPr>
-              <a:t>Sample Community Services Ltd · What does it cost to raise a dollar?</a:t>
-            </a:r>
-          </a:p>
-        </p:txBody>
-      </p:sp>
-      <p:sp>
-        <p:nvSpPr>
-          <p:cNvPr id="4" name="TextBox 3"/>
-          <p:cNvSpPr txBox="1"/>
-          <p:nvPr/>
-        </p:nvSpPr>
-        <p:spPr>
-          <a:xfrm>
-            <a:off x="457200" y="411480"/>
-            <a:ext cx="11247120" cy="548640"/>
-          </a:xfrm>
-          <a:prstGeom prst="rect">
-            <a:avLst/>
-          </a:prstGeom>
-          <a:noFill/>
-        </p:spPr>
-        <p:txBody>
-          <a:bodyPr wrap="square">
-            <a:spAutoFit/>
-          </a:bodyPr>
-          <a:lstStyle/>
-          <a:p>
-            <a:pPr>
-              <a:defRPr>
-                <a:latin typeface="Roboto"/>
-              </a:defRPr>
-            </a:pPr>
-            <a:r>
-              <a:rPr sz="2400" b="1">
-                <a:solidFill>
-                  <a:srgbClr val="25342A"/>
-                </a:solidFill>
-                <a:latin typeface="Roboto"/>
-              </a:rPr>
-              <a:t>Headline numbers · Source: Fundraising events</a:t>
-            </a:r>
-          </a:p>
-        </p:txBody>
-      </p:sp>
-      <p:sp>
-        <p:nvSpPr>
-          <p:cNvPr id="5" name="Rectangle 4"/>
-          <p:cNvSpPr/>
-          <p:nvPr/>
-        </p:nvSpPr>
-        <p:spPr>
-          <a:xfrm>
-            <a:off x="457200" y="1645920"/>
-            <a:ext cx="5501487" cy="2011680"/>
-          </a:xfrm>
-          <a:prstGeom prst="rect">
-            <a:avLst/>
-          </a:prstGeom>
-          <a:solidFill>
-            <a:srgbClr val="F7FAF7"/>
-          </a:solidFill>
-          <a:ln>
-            <a:solidFill>
-              <a:srgbClr val="DCE8DC"/>
-            </a:solidFill>
-          </a:ln>
-        </p:spPr>
-        <p:style>
-          <a:lnRef idx="1">
-            <a:schemeClr val="accent1"/>
-          </a:lnRef>
-          <a:fillRef idx="3">
-            <a:schemeClr val="accent1"/>
-          </a:fillRef>
-          <a:effectRef idx="2">
-            <a:schemeClr val="accent1"/>
-          </a:effectRef>
-          <a:fontRef idx="minor">
-            <a:schemeClr val="lt1"/>
-          </a:fontRef>
-        </p:style>
-        <p:txBody>
-          <a:bodyPr rtlCol="0" anchor="ctr"/>
-          <a:lstStyle/>
-          <a:p>
-            <a:pPr algn="ctr">
-              <a:defRPr>
-                <a:latin typeface="Roboto"/>
-              </a:defRPr>
-            </a:pPr>
-          </a:p>
-        </p:txBody>
-      </p:sp>
-      <p:sp>
-        <p:nvSpPr>
-          <p:cNvPr id="6" name="TextBox 5"/>
-          <p:cNvSpPr txBox="1"/>
-          <p:nvPr/>
-        </p:nvSpPr>
-        <p:spPr>
-          <a:xfrm>
-            <a:off x="640080" y="1783080"/>
-            <a:ext cx="5135727" cy="457200"/>
-          </a:xfrm>
-          <a:prstGeom prst="rect">
-            <a:avLst/>
-          </a:prstGeom>
-          <a:noFill/>
-        </p:spPr>
-        <p:txBody>
-          <a:bodyPr wrap="square">
-            <a:spAutoFit/>
-          </a:bodyPr>
-          <a:lstStyle/>
-          <a:p>
-            <a:pPr>
-              <a:defRPr>
-                <a:latin typeface="Roboto"/>
-              </a:defRPr>
-            </a:pPr>
-            <a:r>
-              <a:rPr sz="1200" b="0">
-                <a:solidFill>
-                  <a:srgbClr val="5F6F63"/>
-                </a:solidFill>
-                <a:latin typeface="Roboto"/>
-              </a:rPr>
-              <a:t>September · Fundraising events</a:t>
-            </a:r>
-          </a:p>
-        </p:txBody>
-      </p:sp>
-      <p:sp>
-        <p:nvSpPr>
-          <p:cNvPr id="7" name="TextBox 6"/>
-          <p:cNvSpPr txBox="1"/>
-          <p:nvPr/>
-        </p:nvSpPr>
-        <p:spPr>
-          <a:xfrm>
-            <a:off x="640080" y="2240280"/>
-            <a:ext cx="5135727" cy="731520"/>
-          </a:xfrm>
-          <a:prstGeom prst="rect">
-            <a:avLst/>
-          </a:prstGeom>
-          <a:noFill/>
-        </p:spPr>
-        <p:txBody>
-          <a:bodyPr wrap="square">
-            <a:spAutoFit/>
-          </a:bodyPr>
-          <a:lstStyle/>
-          <a:p>
-            <a:pPr>
-              <a:defRPr>
-                <a:latin typeface="Roboto"/>
-              </a:defRPr>
-            </a:pPr>
-            <a:r>
-              <a:rPr sz="3000" b="1">
-                <a:solidFill>
-                  <a:srgbClr val="2F7A5D"/>
-                </a:solidFill>
-                <a:latin typeface="Roboto"/>
-              </a:rPr>
-              <a:t>41¢</a:t>
-            </a:r>
-          </a:p>
-        </p:txBody>
-      </p:sp>
-      <p:sp>
-        <p:nvSpPr>
-          <p:cNvPr id="8" name="TextBox 7"/>
-          <p:cNvSpPr txBox="1"/>
-          <p:nvPr/>
-        </p:nvSpPr>
-        <p:spPr>
-          <a:xfrm>
-            <a:off x="640080" y="3017520"/>
-            <a:ext cx="5135727" cy="548640"/>
-          </a:xfrm>
-          <a:prstGeom prst="rect">
-            <a:avLst/>
-          </a:prstGeom>
-          <a:noFill/>
-        </p:spPr>
-        <p:txBody>
-          <a:bodyPr wrap="square">
-            <a:spAutoFit/>
-          </a:bodyPr>
-          <a:lstStyle/>
-          <a:p>
-            <a:pPr>
-              <a:defRPr>
-                <a:latin typeface="Roboto"/>
-              </a:defRPr>
-            </a:pPr>
-            <a:r>
-              <a:rPr sz="1100" b="0">
-                <a:solidFill>
-                  <a:srgbClr val="5F6F63"/>
-                </a:solidFill>
-                <a:latin typeface="Roboto"/>
-              </a:rPr>
-              <a:t>August none raised</a:t>
-            </a:r>
-          </a:p>
-        </p:txBody>
-      </p:sp>
-      <p:sp>
-        <p:nvSpPr>
-          <p:cNvPr id="9" name="Rectangle 8"/>
-          <p:cNvSpPr/>
-          <p:nvPr/>
-        </p:nvSpPr>
-        <p:spPr>
-          <a:xfrm>
-            <a:off x="6233007" y="1645920"/>
-            <a:ext cx="5501487" cy="2011680"/>
-          </a:xfrm>
-          <a:prstGeom prst="rect">
-            <a:avLst/>
-          </a:prstGeom>
-          <a:solidFill>
-            <a:srgbClr val="F7FAF7"/>
-          </a:solidFill>
-          <a:ln>
-            <a:solidFill>
-              <a:srgbClr val="DCE8DC"/>
-            </a:solidFill>
-          </a:ln>
-        </p:spPr>
-        <p:style>
-          <a:lnRef idx="1">
-            <a:schemeClr val="accent1"/>
-          </a:lnRef>
-          <a:fillRef idx="3">
-            <a:schemeClr val="accent1"/>
-          </a:fillRef>
-          <a:effectRef idx="2">
-            <a:schemeClr val="accent1"/>
-          </a:effectRef>
-          <a:fontRef idx="minor">
-            <a:schemeClr val="lt1"/>
-          </a:fontRef>
-        </p:style>
-        <p:txBody>
-          <a:bodyPr rtlCol="0" anchor="ctr"/>
-          <a:lstStyle/>
-          <a:p>
-            <a:pPr algn="ctr">
-              <a:defRPr>
-                <a:latin typeface="Roboto"/>
-              </a:defRPr>
-            </a:pPr>
-          </a:p>
-        </p:txBody>
-      </p:sp>
-      <p:sp>
-        <p:nvSpPr>
-          <p:cNvPr id="10" name="TextBox 9"/>
-          <p:cNvSpPr txBox="1"/>
-          <p:nvPr/>
-        </p:nvSpPr>
-        <p:spPr>
-          <a:xfrm>
-            <a:off x="6415887" y="1783080"/>
-            <a:ext cx="5135727" cy="457200"/>
-          </a:xfrm>
-          <a:prstGeom prst="rect">
-            <a:avLst/>
-          </a:prstGeom>
-          <a:noFill/>
-        </p:spPr>
-        <p:txBody>
-          <a:bodyPr wrap="square">
-            <a:spAutoFit/>
-          </a:bodyPr>
-          <a:lstStyle/>
-          <a:p>
-            <a:pPr>
-              <a:defRPr>
-                <a:latin typeface="Roboto"/>
-              </a:defRPr>
-            </a:pPr>
-            <a:r>
-              <a:rPr sz="1200" b="0">
-                <a:solidFill>
-                  <a:srgbClr val="5F6F63"/>
-                </a:solidFill>
-                <a:latin typeface="Roboto"/>
-              </a:rPr>
-              <a:t>Year to date (Jul to Sep 2026)</a:t>
-            </a:r>
-          </a:p>
-        </p:txBody>
-      </p:sp>
-      <p:sp>
-        <p:nvSpPr>
-          <p:cNvPr id="11" name="TextBox 10"/>
-          <p:cNvSpPr txBox="1"/>
-          <p:nvPr/>
-        </p:nvSpPr>
-        <p:spPr>
-          <a:xfrm>
-            <a:off x="6415887" y="2240280"/>
-            <a:ext cx="5135727" cy="731520"/>
-          </a:xfrm>
-          <a:prstGeom prst="rect">
-            <a:avLst/>
-          </a:prstGeom>
-          <a:noFill/>
-        </p:spPr>
-        <p:txBody>
-          <a:bodyPr wrap="square">
-            <a:spAutoFit/>
-          </a:bodyPr>
-          <a:lstStyle/>
-          <a:p>
-            <a:pPr>
-              <a:defRPr>
-                <a:latin typeface="Roboto"/>
-              </a:defRPr>
-            </a:pPr>
-            <a:r>
-              <a:rPr sz="3000" b="1">
-                <a:solidFill>
-                  <a:srgbClr val="2F7A5D"/>
-                </a:solidFill>
-                <a:latin typeface="Roboto"/>
-              </a:rPr>
-              <a:t>46¢</a:t>
-            </a:r>
-          </a:p>
-        </p:txBody>
-      </p:sp>
-      <p:sp>
-        <p:nvSpPr>
-          <p:cNvPr id="12" name="TextBox 11"/>
-          <p:cNvSpPr txBox="1"/>
-          <p:nvPr/>
-        </p:nvSpPr>
-        <p:spPr>
-          <a:xfrm>
-            <a:off x="6415887" y="3017520"/>
-            <a:ext cx="5135727" cy="548640"/>
-          </a:xfrm>
-          <a:prstGeom prst="rect">
-            <a:avLst/>
-          </a:prstGeom>
-          <a:noFill/>
-        </p:spPr>
-        <p:txBody>
-          <a:bodyPr wrap="square">
-            <a:spAutoFit/>
-          </a:bodyPr>
-          <a:lstStyle/>
-          <a:p>
-            <a:pPr>
-              <a:defRPr>
-                <a:latin typeface="Roboto"/>
-              </a:defRPr>
-            </a:pPr>
-            <a:r>
-              <a:rPr sz="1100" b="0">
-                <a:solidFill>
-                  <a:srgbClr val="5F6F63"/>
-                </a:solidFill>
-                <a:latin typeface="Roboto"/>
-              </a:rPr>
-              <a:t>same period last year: 41¢</a:t>
-            </a:r>
-          </a:p>
-        </p:txBody>
-      </p:sp>
-      <p:sp>
-        <p:nvSpPr>
-          <p:cNvPr id="13" name="TextBox 12"/>
-          <p:cNvSpPr txBox="1"/>
-          <p:nvPr/>
-        </p:nvSpPr>
-        <p:spPr>
-          <a:xfrm>
-            <a:off x="457200" y="6492240"/>
-            <a:ext cx="3657600" cy="274320"/>
-          </a:xfrm>
-          <a:prstGeom prst="rect">
-            <a:avLst/>
-          </a:prstGeom>
-          <a:noFill/>
-        </p:spPr>
-        <p:txBody>
-          <a:bodyPr wrap="square">
-            <a:spAutoFit/>
-          </a:bodyPr>
-          <a:lstStyle/>
-          <a:p>
-            <a:pPr>
-              <a:defRPr>
-                <a:latin typeface="Roboto"/>
-              </a:defRPr>
-            </a:pPr>
-            <a:r>
-              <a:rPr sz="900" b="0">
-                <a:solidFill>
-                  <a:srgbClr val="5F6F63"/>
-                </a:solidFill>
-                <a:latin typeface="Roboto"/>
-              </a:rPr>
-              <a:t>cost-to-raise.pptx</a:t>
-            </a:r>
-          </a:p>
-        </p:txBody>
-      </p:sp>
-      <p:sp>
-        <p:nvSpPr>
-          <p:cNvPr id="14" name="TextBox 13"/>
-          <p:cNvSpPr txBox="1"/>
-          <p:nvPr/>
-        </p:nvSpPr>
-        <p:spPr>
-          <a:xfrm>
-            <a:off x="4297680" y="6492240"/>
-            <a:ext cx="3657600" cy="274320"/>
-          </a:xfrm>
-          <a:prstGeom prst="rect">
-            <a:avLst/>
-          </a:prstGeom>
-          <a:noFill/>
-        </p:spPr>
-        <p:txBody>
-          <a:bodyPr wrap="square">
-            <a:spAutoFit/>
-          </a:bodyPr>
-          <a:lstStyle/>
-          <a:p>
-            <a:pPr algn="ctr">
-              <a:defRPr>
-                <a:latin typeface="Roboto"/>
-              </a:defRPr>
-            </a:pPr>
-            <a:r>
-              <a:rPr sz="900" b="0">
-                <a:solidFill>
-                  <a:srgbClr val="5F6F63"/>
-                </a:solidFill>
-                <a:latin typeface="Roboto"/>
-              </a:rPr>
-              <a:t>Data retrieved 2pm, Tue 6 Oct 2026 · Sample data</a:t>
-            </a:r>
-          </a:p>
-        </p:txBody>
-      </p:sp>
-      <p:sp>
-        <p:nvSpPr>
-          <p:cNvPr id="15" name="TextBox 14"/>
-          <p:cNvSpPr txBox="1"/>
-          <p:nvPr/>
-        </p:nvSpPr>
-        <p:spPr>
-          <a:xfrm>
-            <a:off x="8503920" y="6492240"/>
-            <a:ext cx="3200400" cy="274320"/>
-          </a:xfrm>
-          <a:prstGeom prst="rect">
-            <a:avLst/>
-          </a:prstGeom>
-          <a:noFill/>
-        </p:spPr>
-        <p:txBody>
-          <a:bodyPr wrap="square">
-            <a:spAutoFit/>
-          </a:bodyPr>
-          <a:lstStyle/>
-          <a:p>
-            <a:pPr algn="r">
-              <a:defRPr>
-                <a:latin typeface="Roboto"/>
-              </a:defRPr>
-            </a:pPr>
-            <a:r>
-              <a:rPr sz="900" b="0">
-                <a:solidFill>
-                  <a:srgbClr val="5F6F63"/>
-                </a:solidFill>
-                <a:latin typeface="Roboto"/>
-              </a:rPr>
-              <a:t>Slide 9 of 11</a:t>
+              <a:t>Slide 5 of 5</a:t>
             </a:r>
           </a:p>
         </p:txBody>
@@ -9049,6 +8858,326 @@
 </file>
 
 <file path=ppt/theme/theme1.xml><?xml version="1.0" encoding="utf-8"?>
+<a:theme xmlns:a="http://schemas.openxmlformats.org/drawingml/2006/main" name="Office Theme">
+  <a:themeElements>
+    <a:clrScheme name="Office">
+      <a:dk1>
+        <a:sysClr val="windowText" lastClr="000000"/>
+      </a:dk1>
+      <a:lt1>
+        <a:sysClr val="window" lastClr="FFFFFF"/>
+      </a:lt1>
+      <a:dk2>
+        <a:srgbClr val="25342A"/>
+      </a:dk2>
+      <a:lt2>
+        <a:srgbClr val="F4F7F2"/>
+      </a:lt2>
+      <a:accent1>
+        <a:srgbClr val="2F7A5D"/>
+      </a:accent1>
+      <a:accent2>
+        <a:srgbClr val="0E9F6E"/>
+      </a:accent2>
+      <a:accent3>
+        <a:srgbClr val="7D8790"/>
+      </a:accent3>
+      <a:accent4>
+        <a:srgbClr val="8A6D3B"/>
+      </a:accent4>
+      <a:accent5>
+        <a:srgbClr val="B42318"/>
+      </a:accent5>
+      <a:accent6>
+        <a:srgbClr val="8E9CAB"/>
+      </a:accent6>
+      <a:hlink>
+        <a:srgbClr val="0000FF"/>
+      </a:hlink>
+      <a:folHlink>
+        <a:srgbClr val="800080"/>
+      </a:folHlink>
+    </a:clrScheme>
+    <a:fontScheme name="Office">
+      <a:majorFont>
+        <a:latin typeface="Roboto"/>
+        <a:ea typeface=""/>
+        <a:cs typeface=""/>
+        <a:font script="Jpan" typeface="ＭＳ Ｐゴシック"/>
+        <a:font script="Hang" typeface="맑은 고딕"/>
+        <a:font script="Hans" typeface="宋体"/>
+        <a:font script="Hant" typeface="新細明體"/>
+        <a:font script="Arab" typeface="Times New Roman"/>
+        <a:font script="Hebr" typeface="Times New Roman"/>
+        <a:font script="Thai" typeface="Angsana New"/>
+        <a:font script="Ethi" typeface="Nyala"/>
+        <a:font script="Beng" typeface="Vrinda"/>
+        <a:font script="Gujr" typeface="Shruti"/>
+        <a:font script="Khmr" typeface="MoolBoran"/>
+        <a:font script="Knda" typeface="Tunga"/>
+        <a:font script="Guru" typeface="Raavi"/>
+        <a:font script="Cans" typeface="Euphemia"/>
+        <a:font script="Cher" typeface="Plantagenet Cherokee"/>
+        <a:font script="Yiii" typeface="Microsoft Yi Baiti"/>
+        <a:font script="Tibt" typeface="Microsoft Himalaya"/>
+        <a:font script="Thaa" typeface="MV Boli"/>
+        <a:font script="Deva" typeface="Mangal"/>
+        <a:font script="Telu" typeface="Gautami"/>
+        <a:font script="Taml" typeface="Latha"/>
+        <a:font script="Syrc" typeface="Estrangelo Edessa"/>
+        <a:font script="Orya" typeface="Kalinga"/>
+        <a:font script="Mlym" typeface="Kartika"/>
+        <a:font script="Laoo" typeface="DokChampa"/>
+        <a:font script="Sinh" typeface="Iskoola Pota"/>
+        <a:font script="Mong" typeface="Mongolian Baiti"/>
+        <a:font script="Viet" typeface="Times New Roman"/>
+        <a:font script="Uigh" typeface="Microsoft Uighur"/>
+        <a:font script="Geor" typeface="Sylfaen"/>
+      </a:majorFont>
+      <a:minorFont>
+        <a:latin typeface="Roboto"/>
+        <a:ea typeface=""/>
+        <a:cs typeface=""/>
+        <a:font script="Jpan" typeface="ＭＳ Ｐゴシック"/>
+        <a:font script="Hang" typeface="맑은 고딕"/>
+        <a:font script="Hans" typeface="宋体"/>
+        <a:font script="Hant" typeface="新細明體"/>
+        <a:font script="Arab" typeface="Arial"/>
+        <a:font script="Hebr" typeface="Arial"/>
+        <a:font script="Thai" typeface="Cordia New"/>
+        <a:font script="Ethi" typeface="Nyala"/>
+        <a:font script="Beng" typeface="Vrinda"/>
+        <a:font script="Gujr" typeface="Shruti"/>
+        <a:font script="Khmr" typeface="DaunPenh"/>
+        <a:font script="Knda" typeface="Tunga"/>
+        <a:font script="Guru" typeface="Raavi"/>
+        <a:font script="Cans" typeface="Euphemia"/>
+        <a:font script="Cher" typeface="Plantagenet Cherokee"/>
+        <a:font script="Yiii" typeface="Microsoft Yi Baiti"/>
+        <a:font script="Tibt" typeface="Microsoft Himalaya"/>
+        <a:font script="Thaa" typeface="MV Boli"/>
+        <a:font script="Deva" typeface="Mangal"/>
+        <a:font script="Telu" typeface="Gautami"/>
+        <a:font script="Taml" typeface="Latha"/>
+        <a:font script="Syrc" typeface="Estrangelo Edessa"/>
+        <a:font script="Orya" typeface="Kalinga"/>
+        <a:font script="Mlym" typeface="Kartika"/>
+        <a:font script="Laoo" typeface="DokChampa"/>
+        <a:font script="Sinh" typeface="Iskoola Pota"/>
+        <a:font script="Mong" typeface="Mongolian Baiti"/>
+        <a:font script="Viet" typeface="Arial"/>
+        <a:font script="Uigh" typeface="Microsoft Uighur"/>
+        <a:font script="Geor" typeface="Sylfaen"/>
+      </a:minorFont>
+    </a:fontScheme>
+    <a:fmtScheme name="Office">
+      <a:fillStyleLst>
+        <a:solidFill>
+          <a:schemeClr val="phClr"/>
+        </a:solidFill>
+        <a:gradFill rotWithShape="1">
+          <a:gsLst>
+            <a:gs pos="0">
+              <a:schemeClr val="phClr">
+                <a:tint val="50000"/>
+                <a:satMod val="300000"/>
+              </a:schemeClr>
+            </a:gs>
+            <a:gs pos="35000">
+              <a:schemeClr val="phClr">
+                <a:tint val="37000"/>
+                <a:satMod val="300000"/>
+              </a:schemeClr>
+            </a:gs>
+            <a:gs pos="100000">
+              <a:schemeClr val="phClr">
+                <a:tint val="15000"/>
+                <a:satMod val="350000"/>
+              </a:schemeClr>
+            </a:gs>
+          </a:gsLst>
+          <a:lin ang="16200000" scaled="1"/>
+        </a:gradFill>
+        <a:gradFill rotWithShape="1">
+          <a:gsLst>
+            <a:gs pos="0">
+              <a:schemeClr val="phClr">
+                <a:tint val="100000"/>
+                <a:shade val="100000"/>
+                <a:satMod val="130000"/>
+              </a:schemeClr>
+            </a:gs>
+            <a:gs pos="100000">
+              <a:schemeClr val="phClr">
+                <a:tint val="50000"/>
+                <a:shade val="100000"/>
+                <a:satMod val="350000"/>
+              </a:schemeClr>
+            </a:gs>
+          </a:gsLst>
+          <a:lin ang="16200000" scaled="0"/>
+        </a:gradFill>
+      </a:fillStyleLst>
+      <a:lnStyleLst>
+        <a:ln w="9525" cap="flat" cmpd="sng" algn="ctr">
+          <a:solidFill>
+            <a:schemeClr val="phClr">
+              <a:shade val="95000"/>
+              <a:satMod val="105000"/>
+            </a:schemeClr>
+          </a:solidFill>
+          <a:prstDash val="solid"/>
+        </a:ln>
+        <a:ln w="25400" cap="flat" cmpd="sng" algn="ctr">
+          <a:solidFill>
+            <a:schemeClr val="phClr"/>
+          </a:solidFill>
+          <a:prstDash val="solid"/>
+        </a:ln>
+        <a:ln w="38100" cap="flat" cmpd="sng" algn="ctr">
+          <a:solidFill>
+            <a:schemeClr val="phClr"/>
+          </a:solidFill>
+          <a:prstDash val="solid"/>
+        </a:ln>
+      </a:lnStyleLst>
+      <a:effectStyleLst>
+        <a:effectStyle>
+          <a:effectLst>
+            <a:outerShdw blurRad="40000" dist="20000" dir="5400000" rotWithShape="0">
+              <a:srgbClr val="000000">
+                <a:alpha val="38000"/>
+              </a:srgbClr>
+            </a:outerShdw>
+          </a:effectLst>
+        </a:effectStyle>
+        <a:effectStyle>
+          <a:effectLst>
+            <a:outerShdw blurRad="40000" dist="23000" dir="5400000" rotWithShape="0">
+              <a:srgbClr val="000000">
+                <a:alpha val="35000"/>
+              </a:srgbClr>
+            </a:outerShdw>
+          </a:effectLst>
+        </a:effectStyle>
+        <a:effectStyle>
+          <a:effectLst>
+            <a:outerShdw blurRad="40000" dist="23000" dir="5400000" rotWithShape="0">
+              <a:srgbClr val="000000">
+                <a:alpha val="35000"/>
+              </a:srgbClr>
+            </a:outerShdw>
+          </a:effectLst>
+          <a:scene3d>
+            <a:camera prst="orthographicFront">
+              <a:rot lat="0" lon="0" rev="0"/>
+            </a:camera>
+            <a:lightRig rig="threePt" dir="t">
+              <a:rot lat="0" lon="0" rev="1200000"/>
+            </a:lightRig>
+          </a:scene3d>
+          <a:sp3d>
+            <a:bevelT w="63500" h="25400"/>
+          </a:sp3d>
+        </a:effectStyle>
+      </a:effectStyleLst>
+      <a:bgFillStyleLst>
+        <a:solidFill>
+          <a:schemeClr val="phClr"/>
+        </a:solidFill>
+        <a:gradFill rotWithShape="1">
+          <a:gsLst>
+            <a:gs pos="0">
+              <a:schemeClr val="phClr">
+                <a:tint val="40000"/>
+                <a:satMod val="350000"/>
+              </a:schemeClr>
+            </a:gs>
+            <a:gs pos="40000">
+              <a:schemeClr val="phClr">
+                <a:tint val="45000"/>
+                <a:shade val="99000"/>
+                <a:satMod val="350000"/>
+              </a:schemeClr>
+            </a:gs>
+            <a:gs pos="100000">
+              <a:schemeClr val="phClr">
+                <a:shade val="20000"/>
+                <a:satMod val="255000"/>
+              </a:schemeClr>
+            </a:gs>
+          </a:gsLst>
+          <a:path path="circle">
+            <a:fillToRect l="50000" t="-80000" r="50000" b="180000"/>
+          </a:path>
+        </a:gradFill>
+        <a:gradFill rotWithShape="1">
+          <a:gsLst>
+            <a:gs pos="0">
+              <a:schemeClr val="phClr">
+                <a:tint val="80000"/>
+                <a:satMod val="300000"/>
+              </a:schemeClr>
+            </a:gs>
+            <a:gs pos="100000">
+              <a:schemeClr val="phClr">
+                <a:shade val="30000"/>
+                <a:satMod val="200000"/>
+              </a:schemeClr>
+            </a:gs>
+          </a:gsLst>
+          <a:path path="circle">
+            <a:fillToRect l="50000" t="50000" r="50000" b="50000"/>
+          </a:path>
+        </a:gradFill>
+      </a:bgFillStyleLst>
+    </a:fmtScheme>
+  </a:themeElements>
+  <a:objectDefaults>
+    <a:spDef>
+      <a:spPr/>
+      <a:bodyPr/>
+      <a:lstStyle/>
+      <a:style>
+        <a:lnRef idx="1">
+          <a:schemeClr val="accent1"/>
+        </a:lnRef>
+        <a:fillRef idx="3">
+          <a:schemeClr val="accent1"/>
+        </a:fillRef>
+        <a:effectRef idx="2">
+          <a:schemeClr val="accent1"/>
+        </a:effectRef>
+        <a:fontRef idx="minor">
+          <a:schemeClr val="lt1"/>
+        </a:fontRef>
+      </a:style>
+    </a:spDef>
+    <a:lnDef>
+      <a:spPr/>
+      <a:bodyPr/>
+      <a:lstStyle/>
+      <a:style>
+        <a:lnRef idx="2">
+          <a:schemeClr val="accent1"/>
+        </a:lnRef>
+        <a:fillRef idx="0">
+          <a:schemeClr val="accent1"/>
+        </a:fillRef>
+        <a:effectRef idx="1">
+          <a:schemeClr val="accent1"/>
+        </a:effectRef>
+        <a:fontRef idx="minor">
+          <a:schemeClr val="tx1"/>
+        </a:fontRef>
+      </a:style>
+    </a:lnDef>
+  </a:objectDefaults>
+  <a:extraClrSchemeLst/>
+</a:theme>
+</file>
+
+<file path=ppt/theme/theme2.xml><?xml version="1.0" encoding="utf-8"?>
 <a:theme xmlns:a="http://schemas.openxmlformats.org/drawingml/2006/main" name="Office Theme">
   <a:themeElements>
     <a:clrScheme name="Office">

--- a/media/exports/reports/2026-09/cost-to-raise.pptx
+++ b/media/exports/reports/2026-09/cost-to-raise.pptx
@@ -1506,7 +1506,7 @@
           <a:lstStyle/>
           <a:p>
             <a:r>
-              <a:t>What does it cost to raise a dollar?. Sample Community Services Ltd. Period: September 2026. What fundraising costs (grant writing, donor campaigns, events) for every dollar it brings in. Pick a source and every number, chart and note follows it.</a:t>
+              <a:t>What does it cost to raise a dollar?. Sample Community Services Ltd. Period: September 2026. In short: Each dollar raised cost 20¢ in September, and 15¢ a dollar this financial year to date. What fundraising costs (grant writing, donor campaigns, events) for every dollar it brings in. Pick a source and every number, chart and note follows it.</a:t>
             </a:r>
           </a:p>
         </p:txBody>
@@ -5011,7 +5011,7 @@
         <p:spPr>
           <a:xfrm>
             <a:off x="457200" y="3703320"/>
-            <a:ext cx="11277295" cy="535940"/>
+            <a:ext cx="11277295" cy="758190"/>
           </a:xfrm>
           <a:prstGeom prst="rect">
             <a:avLst/>
@@ -5036,7 +5036,7 @@
                 </a:solidFill>
                 <a:latin typeface="Roboto"/>
               </a:rPr>
-              <a:t>Period: September 2026. What fundraising costs (grant writing, donor campaigns, events) for every dollar it brings in. Pick a source and every number, chart and note follows it.</a:t>
+              <a:t>Period: September 2026. In short: Each dollar raised cost 20¢ in September, and 15¢ a dollar this financial year to date. What fundraising costs (grant writing, donor campaigns, events) for every dollar it brings in. Pick a source and every number, chart and note follows it.</a:t>
             </a:r>
           </a:p>
         </p:txBody>
@@ -5049,7 +5049,7 @@
         </p:nvSpPr>
         <p:spPr>
           <a:xfrm>
-            <a:off x="457200" y="4330700"/>
+            <a:off x="457200" y="4552950"/>
             <a:ext cx="11277295" cy="1097280"/>
           </a:xfrm>
           <a:prstGeom prst="rect">
@@ -5201,7 +5201,7 @@
                 </a:solidFill>
                 <a:latin typeface="Roboto"/>
               </a:rPr>
-              <a:t>Data retrieved 2pm, Tue 6 Oct 2026 · Generated 8 Oct 2026, 9:35am · Sample data · Made with Python (python-pptx)</a:t>
+              <a:t>Data retrieved 2pm, Tue 6 Oct 2026 · Generated 10 Oct 2026, 9:55pm · Sample data · Made with Python (python-pptx)</a:t>
             </a:r>
           </a:p>
         </p:txBody>
@@ -6102,7 +6102,7 @@
                 </a:solidFill>
                 <a:latin typeface="Roboto"/>
               </a:rPr>
-              <a:t>Data retrieved 2pm, Tue 6 Oct 2026 · Generated 8 Oct 2026, 9:35am · Sample data · Made with Python (python-pptx)</a:t>
+              <a:t>Data retrieved 2pm, Tue 6 Oct 2026 · Generated 10 Oct 2026, 9:55pm · Sample data · Made with Python (python-pptx)</a:t>
             </a:r>
           </a:p>
         </p:txBody>
@@ -7003,7 +7003,7 @@
                 </a:solidFill>
                 <a:latin typeface="Roboto"/>
               </a:rPr>
-              <a:t>Data retrieved 2pm, Tue 6 Oct 2026 · Generated 8 Oct 2026, 9:35am · Sample data · Made with Python (python-pptx)</a:t>
+              <a:t>Data retrieved 2pm, Tue 6 Oct 2026 · Generated 10 Oct 2026, 9:55pm · Sample data · Made with Python (python-pptx)</a:t>
             </a:r>
           </a:p>
         </p:txBody>
@@ -7904,7 +7904,7 @@
                 </a:solidFill>
                 <a:latin typeface="Roboto"/>
               </a:rPr>
-              <a:t>Data retrieved 2pm, Tue 6 Oct 2026 · Generated 8 Oct 2026, 9:35am · Sample data · Made with Python (python-pptx)</a:t>
+              <a:t>Data retrieved 2pm, Tue 6 Oct 2026 · Generated 10 Oct 2026, 9:55pm · Sample data · Made with Python (python-pptx)</a:t>
             </a:r>
           </a:p>
         </p:txBody>
@@ -8805,7 +8805,7 @@
                 </a:solidFill>
                 <a:latin typeface="Roboto"/>
               </a:rPr>
-              <a:t>Data retrieved 2pm, Tue 6 Oct 2026 · Generated 8 Oct 2026, 9:35am · Sample data · Made with Python (python-pptx)</a:t>
+              <a:t>Data retrieved 2pm, Tue 6 Oct 2026 · Generated 10 Oct 2026, 9:55pm · Sample data · Made with Python (python-pptx)</a:t>
             </a:r>
           </a:p>
         </p:txBody>
